--- a/BioProfile_Generated.pptx
+++ b/BioProfile_Generated.pptx
@@ -3520,14 +3520,14 @@
         <p:spPr>
           <a:xfrm>
             <a:off x="319092" y="5762738"/>
-            <a:ext cx="5709336" cy="953360"/>
+            <a:ext cx="4849850" cy="437299"/>
           </a:xfrm>
           <a:prstGeom prst="rect">
             <a:avLst/>
           </a:prstGeom>
         </p:spPr>
         <p:txBody>
-          <a:bodyPr lIns="0" tIns="0" rIns="0" bIns="0" rtlCol="0" anchor="t">
+          <a:bodyPr wrap="square" lIns="0" tIns="0" rIns="0" bIns="0" rtlCol="0" anchor="t">
             <a:spAutoFit/>
           </a:bodyPr>
           <a:lstStyle/>
@@ -3537,17 +3537,29 @@
                 <a:spcPts val="3627"/>
               </a:lnSpc>
             </a:pPr>
-          </a:p>
-          <a:p>
-            <a:pPr>
-              <a:defRPr sz="2200" b="1">
+            <a:r>
+              <a:rPr lang="en-US" sz="2400" b="1" dirty="0">
                 <a:solidFill>
-                  <a:srgbClr val="000000"/>
+                  <a:srgbClr val="FF52BA"/>
                 </a:solidFill>
-              </a:defRPr>
-            </a:pPr>
-            <a:r>
-              <a:t>DISPONIBILITÉ:   immédiate</a:t>
+                <a:latin typeface="Arial MT Pro Bold"/>
+                <a:ea typeface="Arial MT Pro Bold"/>
+                <a:cs typeface="Arial MT Pro Bold"/>
+                <a:sym typeface="Arial MT Pro Bold"/>
+              </a:rPr>
+              <a:t>DISPONIBILITÉ : </a:t>
+            </a:r>
+            <a:r>
+              <a:rPr lang="en-US" sz="2400" b="1" dirty="0">
+                <a:solidFill>
+                  <a:srgbClr val="FFFFFF"/>
+                </a:solidFill>
+                <a:latin typeface="Arial MT Pro Bold"/>
+                <a:ea typeface="Arial MT Pro Bold"/>
+                <a:cs typeface="Arial MT Pro Bold"/>
+                <a:sym typeface="Arial MT Pro Bold"/>
+              </a:rPr>
+              <a:t>immédiate</a:t>
             </a:r>
           </a:p>
         </p:txBody>
@@ -3561,7 +3573,7 @@
         <p:spPr>
           <a:xfrm>
             <a:off x="319092" y="6797004"/>
-            <a:ext cx="5709336" cy="496160"/>
+            <a:ext cx="5709336" cy="430567"/>
           </a:xfrm>
           <a:prstGeom prst="rect">
             <a:avLst/>
@@ -3579,7 +3591,7 @@
               </a:lnSpc>
             </a:pPr>
             <a:r>
-              <a:rPr lang="en-US" sz="2591" b="1">
+              <a:rPr lang="en-US" sz="2400" b="1" dirty="0">
                 <a:solidFill>
                   <a:srgbClr val="FF52BA"/>
                 </a:solidFill>
@@ -3601,28 +3613,97 @@
         </p:nvSpPr>
         <p:spPr>
           <a:xfrm>
-            <a:off x="1372186" y="4240485"/>
-            <a:ext cx="2469118" cy="509050"/>
+            <a:off x="1085817" y="4250010"/>
+            <a:ext cx="3041855" cy="496160"/>
           </a:xfrm>
           <a:prstGeom prst="rect">
             <a:avLst/>
           </a:prstGeom>
         </p:spPr>
         <p:txBody>
-          <a:bodyPr lIns="0" tIns="0" rIns="0" bIns="0" rtlCol="0" anchor="t">
+          <a:bodyPr lIns="0" tIns="0" rIns="0" bIns="0" rtlCol="0" anchor="t" wrap="square">
             <a:spAutoFit/>
           </a:bodyPr>
           <a:lstStyle/>
           <a:p>
             <a:pPr algn="ctr">
               <a:lnSpc>
-                <a:spcPts val="4187"/>
+                <a:spcPts val="3627"/>
               </a:lnSpc>
               <a:spcBef>
                 <a:spcPct val="0"/>
               </a:spcBef>
             </a:pPr>
-            <a:endParaRPr lang="en-US" sz="2991" b="1" dirty="0">
+            <a:r>
+              <a:rPr lang="en-US" sz="2591" b="1" dirty="0">
+                <a:solidFill>
+                  <a:srgbClr val="FFFFFF"/>
+                </a:solidFill>
+                <a:latin typeface="Arial MT Pro Bold"/>
+                <a:ea typeface="Arial MT Pro Bold"/>
+                <a:cs typeface="Arial MT Pro Bold"/>
+                <a:sym typeface="Arial MT Pro Bold"/>
+              </a:rPr>
+              <a:t>Maryam Mouaki</a:t>
+            </a:r>
+          </a:p>
+        </p:txBody>
+      </p:sp>
+      <p:sp>
+        <p:nvSpPr>
+          <p:cNvPr id="16" name="TextBox 16"/>
+          <p:cNvSpPr txBox="1"/>
+          <p:nvPr/>
+        </p:nvSpPr>
+        <p:spPr>
+          <a:xfrm>
+            <a:off x="807859" y="7188389"/>
+            <a:ext cx="3751544" cy="2324960"/>
+          </a:xfrm>
+          <a:prstGeom prst="rect">
+            <a:avLst/>
+          </a:prstGeom>
+        </p:spPr>
+        <p:txBody>
+          <a:bodyPr lIns="0" tIns="0" rIns="0" bIns="0" rtlCol="0" anchor="t" wrap="square">
+            <a:spAutoFit/>
+          </a:bodyPr>
+          <a:lstStyle/>
+          <a:p>
+            <a:pPr marL="0" lvl="0" indent="0" algn="l">
+              <a:lnSpc>
+                <a:spcPts val="3627"/>
+              </a:lnSpc>
+              <a:spcBef>
+                <a:spcPct val="0"/>
+              </a:spcBef>
+            </a:pPr>
+            <a:r>
+              <a:rPr lang="en-US" sz="2400" b="1" u="none" strike="noStrike" dirty="0">
+                <a:solidFill>
+                  <a:srgbClr val="FFFFFF"/>
+                </a:solidFill>
+                <a:latin typeface="Arial MT Pro Bold"/>
+                <a:ea typeface="Arial MT Pro Bold"/>
+                <a:cs typeface="Arial MT Pro Bold"/>
+                <a:sym typeface="Arial MT Pro Bold"/>
+              </a:rPr>
+              <a:t>arabe - Langue maternelle
+anglais - C1 (Rosetta Stone)
+français - B2 (Rosetta Stone)
+espagnol - A1 (Rosetta Stone)</a:t>
+            </a:r>
+          </a:p>
+          <a:p>
+            <a:pPr marL="0" lvl="0" indent="0" algn="l">
+              <a:lnSpc>
+                <a:spcPts val="3627"/>
+              </a:lnSpc>
+              <a:spcBef>
+                <a:spcPct val="0"/>
+              </a:spcBef>
+            </a:pPr>
+            <a:endParaRPr lang="en-US" sz="2400" b="1" u="none" strike="noStrike" dirty="0">
               <a:solidFill>
                 <a:srgbClr val="FFFFFF"/>
               </a:solidFill>
@@ -3632,11 +3713,900 @@
               <a:sym typeface="Arial MT Pro Bold"/>
             </a:endParaRPr>
           </a:p>
+          <a:p>
+            <a:pPr marL="0" lvl="0" indent="0" algn="l">
+              <a:lnSpc>
+                <a:spcPts val="3627"/>
+              </a:lnSpc>
+              <a:spcBef>
+                <a:spcPct val="0"/>
+              </a:spcBef>
+            </a:pPr>
+            <a:endParaRPr lang="en-US" sz="2400" b="1" u="none" strike="noStrike" dirty="0">
+              <a:solidFill>
+                <a:srgbClr val="FFFFFF"/>
+              </a:solidFill>
+              <a:latin typeface="Arial MT Pro Bold"/>
+              <a:ea typeface="Arial MT Pro Bold"/>
+              <a:cs typeface="Arial MT Pro Bold"/>
+              <a:sym typeface="Arial MT Pro Bold"/>
+            </a:endParaRPr>
+          </a:p>
+          <a:p>
+            <a:pPr marL="0" lvl="0" indent="0" algn="l">
+              <a:lnSpc>
+                <a:spcPts val="3627"/>
+              </a:lnSpc>
+              <a:spcBef>
+                <a:spcPct val="0"/>
+              </a:spcBef>
+            </a:pPr>
+            <a:endParaRPr lang="en-US" sz="2400" b="1" u="none" strike="noStrike" dirty="0">
+              <a:solidFill>
+                <a:srgbClr val="FFFFFF"/>
+              </a:solidFill>
+              <a:latin typeface="Arial MT Pro Bold"/>
+              <a:ea typeface="Arial MT Pro Bold"/>
+              <a:cs typeface="Arial MT Pro Bold"/>
+              <a:sym typeface="Arial MT Pro Bold"/>
+            </a:endParaRPr>
+          </a:p>
+          <a:p>
+            <a:pPr marL="0" lvl="0" indent="0" algn="l">
+              <a:lnSpc>
+                <a:spcPts val="3627"/>
+              </a:lnSpc>
+              <a:spcBef>
+                <a:spcPct val="0"/>
+              </a:spcBef>
+            </a:pPr>
+            <a:endParaRPr lang="en-US" sz="2400" b="1" u="none" strike="noStrike" dirty="0">
+              <a:solidFill>
+                <a:srgbClr val="FFFFFF"/>
+              </a:solidFill>
+              <a:latin typeface="Arial MT Pro Bold"/>
+              <a:ea typeface="Arial MT Pro Bold"/>
+              <a:cs typeface="Arial MT Pro Bold"/>
+              <a:sym typeface="Arial MT Pro Bold"/>
+            </a:endParaRPr>
+          </a:p>
+        </p:txBody>
+      </p:sp>
+      <p:sp>
+        <p:nvSpPr>
+          <p:cNvPr id="17" name="TextBox 17"/>
+          <p:cNvSpPr txBox="1"/>
+          <p:nvPr/>
+        </p:nvSpPr>
+        <p:spPr>
+          <a:xfrm>
+            <a:off x="6185963" y="933450"/>
+            <a:ext cx="11583532" cy="4225515"/>
+          </a:xfrm>
+          <a:prstGeom prst="rect">
+            <a:avLst/>
+          </a:prstGeom>
+        </p:spPr>
+        <p:txBody>
+          <a:bodyPr lIns="0" tIns="0" rIns="0" bIns="0" rtlCol="0" anchor="t" wrap="square">
+            <a:normAutofit/>
+          </a:bodyPr>
+          <a:lstStyle/>
+          <a:p>
+            <a:pPr algn="ctr">
+              <a:lnSpc>
+                <a:spcPts val="3347"/>
+              </a:lnSpc>
+              <a:spcBef>
+                <a:spcPct val="0"/>
+              </a:spcBef>
+            </a:pPr>
+          </a:p>
+          <a:p>
+            <a:pPr>
+              <a:defRPr sz="1991" b="1">
+                <a:solidFill>
+                  <a:srgbClr val="000000"/>
+                </a:solidFill>
+                <a:latin typeface="Arial MT Pro Bold"/>
+              </a:defRPr>
+            </a:pPr>
+            <a:r>
+              <a:t>Plateforme de Collecte et Gestion d’Appels d’Offres Publics</a:t>
+            </a:r>
+          </a:p>
+          <a:p>
+            <a:pPr>
+              <a:defRPr sz="1591" b="0">
+                <a:solidFill>
+                  <a:srgbClr val="000000"/>
+                </a:solidFill>
+                <a:latin typeface="Arial MT Pro Bold"/>
+              </a:defRPr>
+            </a:pPr>
+            <a:r>
+              <a:t>Développement d’une plateforme backend pour la collecte, le stockage et la gestion d’appels d’offres publics via web scraping et API REST. Utilisation de FastAPI, MongoDB, Docker, Docker Compose, Python, Pandas, APScheduler.</a:t>
+            </a:r>
+          </a:p>
+          <a:p>
+            <a:pPr>
+              <a:defRPr sz="1191"/>
+            </a:pPr>
+          </a:p>
+          <a:p>
+            <a:pPr>
+              <a:defRPr sz="1991" b="1">
+                <a:solidFill>
+                  <a:srgbClr val="000000"/>
+                </a:solidFill>
+                <a:latin typeface="Arial MT Pro Bold"/>
+              </a:defRPr>
+            </a:pPr>
+            <a:r>
+              <a:t>Système de Collecte et Recherche de Données Sanctionnées</a:t>
+            </a:r>
+          </a:p>
+          <a:p>
+            <a:pPr>
+              <a:defRPr sz="1591" b="0">
+                <a:solidFill>
+                  <a:srgbClr val="000000"/>
+                </a:solidFill>
+                <a:latin typeface="Arial MT Pro Bold"/>
+              </a:defRPr>
+            </a:pPr>
+            <a:r>
+              <a:t>Conception d’un système utilisant Prefect pour l’orchestration, Elasticsearch pour l’indexation, et FastAPI pour une API de recherche.</a:t>
+            </a:r>
+          </a:p>
+          <a:p>
+            <a:pPr>
+              <a:defRPr sz="1191"/>
+            </a:pPr>
+          </a:p>
+          <a:p>
+            <a:pPr>
+              <a:defRPr sz="1991" b="1">
+                <a:solidFill>
+                  <a:srgbClr val="000000"/>
+                </a:solidFill>
+                <a:latin typeface="Arial MT Pro Bold"/>
+              </a:defRPr>
+            </a:pPr>
+            <a:r>
+              <a:t>Modèle Prédiction de Quantité d’Importation de Produits</a:t>
+            </a:r>
+          </a:p>
+          <a:p>
+            <a:pPr>
+              <a:defRPr sz="1591" b="0">
+                <a:solidFill>
+                  <a:srgbClr val="000000"/>
+                </a:solidFill>
+                <a:latin typeface="Arial MT Pro Bold"/>
+              </a:defRPr>
+            </a:pPr>
+            <a:r>
+              <a:t>Développement d’un modèle de machine learning basé sur XGBoost pour prédire la quantité à importer de chaque produit identifié par un CODE SH, en exploitant des données économiques et douanières. Évaluation du modèle avec des métriques de régression (RMSE, MAE, R2) et visualisation des résultats.</a:t>
+            </a:r>
+          </a:p>
+          <a:p>
+            <a:pPr>
+              <a:defRPr sz="1191"/>
+            </a:pPr>
+          </a:p>
+          <a:p>
+            <a:pPr>
+              <a:defRPr sz="1991" b="1">
+                <a:solidFill>
+                  <a:srgbClr val="000000"/>
+                </a:solidFill>
+                <a:latin typeface="Arial MT Pro Bold"/>
+              </a:defRPr>
+            </a:pPr>
+            <a:r>
+              <a:t>Formation Data/AI</a:t>
+            </a:r>
+          </a:p>
+          <a:p>
+            <a:pPr>
+              <a:defRPr sz="1591" b="0">
+                <a:solidFill>
+                  <a:srgbClr val="000000"/>
+                </a:solidFill>
+                <a:latin typeface="Arial MT Pro Bold"/>
+              </a:defRPr>
+            </a:pPr>
+            <a:r>
+              <a:t>Formation sur le web scraping, la modélisation de données, et la conteneurisation avec Docker. Réalisations : Plateforme d’appels d’offres et système de recherche de données sanctionnées.</a:t>
+            </a:r>
+          </a:p>
+          <a:p>
+            <a:pPr>
+              <a:defRPr sz="1191"/>
+            </a:pPr>
+          </a:p>
+          <a:p>
+            <a:pPr>
+              <a:defRPr sz="1991" b="1">
+                <a:solidFill>
+                  <a:srgbClr val="000000"/>
+                </a:solidFill>
+                <a:latin typeface="Arial MT Pro Bold"/>
+              </a:defRPr>
+            </a:pPr>
+            <a:r>
+              <a:t>Hackathon RedGuard</a:t>
+            </a:r>
+          </a:p>
+          <a:p>
+            <a:pPr>
+              <a:defRPr sz="1591" b="0">
+                <a:solidFill>
+                  <a:srgbClr val="000000"/>
+                </a:solidFill>
+                <a:latin typeface="Arial MT Pro Bold"/>
+              </a:defRPr>
+            </a:pPr>
+            <a:r>
+              <a:t>Développement d’un agent de sécurité IA pour détecter et classifier les intrusions. Résultat : 2ème place.</a:t>
+            </a:r>
+          </a:p>
+          <a:p>
+            <a:pPr>
+              <a:defRPr sz="1191"/>
+            </a:pPr>
+          </a:p>
+        </p:txBody>
+      </p:sp>
+      <p:sp>
+        <p:nvSpPr>
+          <p:cNvPr id="18" name="TextBox 18"/>
+          <p:cNvSpPr txBox="1"/>
+          <p:nvPr/>
+        </p:nvSpPr>
+        <p:spPr>
+          <a:xfrm>
+            <a:off x="6028428" y="5805283"/>
+            <a:ext cx="3115572" cy="4225515"/>
+          </a:xfrm>
+          <a:prstGeom prst="rect">
+            <a:avLst/>
+          </a:prstGeom>
+        </p:spPr>
+        <p:txBody>
+          <a:bodyPr lIns="0" tIns="0" rIns="0" bIns="0" rtlCol="0" anchor="t" wrap="square">
+            <a:spAutoFit/>
+          </a:bodyPr>
+          <a:lstStyle/>
+          <a:p>
+            <a:pPr marL="0" lvl="0" indent="0" algn="ctr">
+              <a:lnSpc>
+                <a:spcPts val="3347"/>
+              </a:lnSpc>
+              <a:spcBef>
+                <a:spcPct val="0"/>
+              </a:spcBef>
+            </a:pPr>
+            <a:r>
+              <a:rPr lang="en-US" sz="1891" b="1" u="none" strike="noStrike" dirty="0">
+                <a:solidFill>
+                  <a:srgbClr val="000000"/>
+                </a:solidFill>
+                <a:latin typeface="Arial MT Pro Bold"/>
+                <a:ea typeface="Arial MT Pro Bold"/>
+                <a:cs typeface="Arial MT Pro Bold"/>
+                <a:sym typeface="Arial MT Pro Bold"/>
+              </a:rPr>
+              <a:t>Python, Java, C, SQL, PL/SQL, HTML, CSS, JavaScript, MongoDB, Oracle, Elasticsearch, PostgreSQL, Neo4j, Agno, Langchaine, Fast Scikit-learn, Pandas, NumPy, Streamlit, Matplotlib, Prefect, APScheduler, XGBoost, Seaborn, MinIO, Hadoop, Kafka, Docker, Docker Compose, Power Bi, Git, GitHub, LaTeX, Matlab, Maple</a:t>
+            </a:r>
+          </a:p>
+          <a:p>
+            <a:pPr marL="0" lvl="0" indent="0" algn="ctr">
+              <a:lnSpc>
+                <a:spcPts val="3347"/>
+              </a:lnSpc>
+              <a:spcBef>
+                <a:spcPct val="0"/>
+              </a:spcBef>
+            </a:pPr>
+            <a:endParaRPr lang="en-US" sz="2391" b="1" u="none" strike="noStrike" dirty="0">
+              <a:solidFill>
+                <a:srgbClr val="000000"/>
+              </a:solidFill>
+              <a:latin typeface="Arial MT Pro Bold"/>
+              <a:ea typeface="Arial MT Pro Bold"/>
+              <a:cs typeface="Arial MT Pro Bold"/>
+              <a:sym typeface="Arial MT Pro Bold"/>
+            </a:endParaRPr>
+          </a:p>
+          <a:p>
+            <a:pPr marL="0" lvl="0" indent="0" algn="ctr">
+              <a:lnSpc>
+                <a:spcPts val="3347"/>
+              </a:lnSpc>
+              <a:spcBef>
+                <a:spcPct val="0"/>
+              </a:spcBef>
+            </a:pPr>
+            <a:endParaRPr lang="en-US" sz="2391" b="1" u="none" strike="noStrike" dirty="0">
+              <a:solidFill>
+                <a:srgbClr val="000000"/>
+              </a:solidFill>
+              <a:latin typeface="Arial MT Pro Bold"/>
+              <a:ea typeface="Arial MT Pro Bold"/>
+              <a:cs typeface="Arial MT Pro Bold"/>
+              <a:sym typeface="Arial MT Pro Bold"/>
+            </a:endParaRPr>
+          </a:p>
+          <a:p>
+            <a:pPr marL="0" lvl="0" indent="0" algn="ctr">
+              <a:lnSpc>
+                <a:spcPts val="3347"/>
+              </a:lnSpc>
+              <a:spcBef>
+                <a:spcPct val="0"/>
+              </a:spcBef>
+            </a:pPr>
+            <a:endParaRPr lang="en-US" sz="2391" b="1" u="none" strike="noStrike" dirty="0">
+              <a:solidFill>
+                <a:srgbClr val="000000"/>
+              </a:solidFill>
+              <a:latin typeface="Arial MT Pro Bold"/>
+              <a:ea typeface="Arial MT Pro Bold"/>
+              <a:cs typeface="Arial MT Pro Bold"/>
+              <a:sym typeface="Arial MT Pro Bold"/>
+            </a:endParaRPr>
+          </a:p>
+          <a:p>
+            <a:pPr marL="0" lvl="0" indent="0" algn="ctr">
+              <a:lnSpc>
+                <a:spcPts val="3347"/>
+              </a:lnSpc>
+              <a:spcBef>
+                <a:spcPct val="0"/>
+              </a:spcBef>
+            </a:pPr>
+            <a:endParaRPr lang="en-US" sz="2391" b="1" u="none" strike="noStrike" dirty="0">
+              <a:solidFill>
+                <a:srgbClr val="000000"/>
+              </a:solidFill>
+              <a:latin typeface="Arial MT Pro Bold"/>
+              <a:ea typeface="Arial MT Pro Bold"/>
+              <a:cs typeface="Arial MT Pro Bold"/>
+              <a:sym typeface="Arial MT Pro Bold"/>
+            </a:endParaRPr>
+          </a:p>
+          <a:p>
+            <a:pPr marL="0" lvl="0" indent="0" algn="ctr">
+              <a:lnSpc>
+                <a:spcPts val="3347"/>
+              </a:lnSpc>
+              <a:spcBef>
+                <a:spcPct val="0"/>
+              </a:spcBef>
+            </a:pPr>
+            <a:endParaRPr lang="en-US" sz="2391" b="1" u="none" strike="noStrike" dirty="0">
+              <a:solidFill>
+                <a:srgbClr val="000000"/>
+              </a:solidFill>
+              <a:latin typeface="Arial MT Pro Bold"/>
+              <a:ea typeface="Arial MT Pro Bold"/>
+              <a:cs typeface="Arial MT Pro Bold"/>
+              <a:sym typeface="Arial MT Pro Bold"/>
+            </a:endParaRPr>
+          </a:p>
+          <a:p>
+            <a:pPr marL="0" lvl="0" indent="0" algn="ctr">
+              <a:lnSpc>
+                <a:spcPts val="3347"/>
+              </a:lnSpc>
+              <a:spcBef>
+                <a:spcPct val="0"/>
+              </a:spcBef>
+            </a:pPr>
+            <a:endParaRPr lang="en-US" sz="2391" b="1" u="none" strike="noStrike" dirty="0">
+              <a:solidFill>
+                <a:srgbClr val="000000"/>
+              </a:solidFill>
+              <a:latin typeface="Arial MT Pro Bold"/>
+              <a:ea typeface="Arial MT Pro Bold"/>
+              <a:cs typeface="Arial MT Pro Bold"/>
+              <a:sym typeface="Arial MT Pro Bold"/>
+            </a:endParaRPr>
+          </a:p>
+          <a:p>
+            <a:pPr marL="0" lvl="0" indent="0" algn="ctr">
+              <a:lnSpc>
+                <a:spcPts val="3347"/>
+              </a:lnSpc>
+              <a:spcBef>
+                <a:spcPct val="0"/>
+              </a:spcBef>
+            </a:pPr>
+            <a:endParaRPr lang="en-US" sz="2391" b="1" u="none" strike="noStrike" dirty="0">
+              <a:solidFill>
+                <a:srgbClr val="000000"/>
+              </a:solidFill>
+              <a:latin typeface="Arial MT Pro Bold"/>
+              <a:ea typeface="Arial MT Pro Bold"/>
+              <a:cs typeface="Arial MT Pro Bold"/>
+              <a:sym typeface="Arial MT Pro Bold"/>
+            </a:endParaRPr>
+          </a:p>
+          <a:p>
+            <a:pPr marL="0" lvl="0" indent="0" algn="ctr">
+              <a:lnSpc>
+                <a:spcPts val="3347"/>
+              </a:lnSpc>
+              <a:spcBef>
+                <a:spcPct val="0"/>
+              </a:spcBef>
+            </a:pPr>
+            <a:endParaRPr lang="en-US" sz="2391" b="1" u="none" strike="noStrike" dirty="0">
+              <a:solidFill>
+                <a:srgbClr val="000000"/>
+              </a:solidFill>
+              <a:latin typeface="Arial MT Pro Bold"/>
+              <a:ea typeface="Arial MT Pro Bold"/>
+              <a:cs typeface="Arial MT Pro Bold"/>
+              <a:sym typeface="Arial MT Pro Bold"/>
+            </a:endParaRPr>
+          </a:p>
+          <a:p>
+            <a:pPr marL="0" lvl="0" indent="0" algn="ctr">
+              <a:lnSpc>
+                <a:spcPts val="3347"/>
+              </a:lnSpc>
+              <a:spcBef>
+                <a:spcPct val="0"/>
+              </a:spcBef>
+            </a:pPr>
+            <a:endParaRPr lang="en-US" sz="2391" b="1" u="none" strike="noStrike" dirty="0">
+              <a:solidFill>
+                <a:srgbClr val="000000"/>
+              </a:solidFill>
+              <a:latin typeface="Arial MT Pro Bold"/>
+              <a:ea typeface="Arial MT Pro Bold"/>
+              <a:cs typeface="Arial MT Pro Bold"/>
+              <a:sym typeface="Arial MT Pro Bold"/>
+            </a:endParaRPr>
+          </a:p>
+        </p:txBody>
+      </p:sp>
+      <p:sp>
+        <p:nvSpPr>
+          <p:cNvPr id="19" name="TextBox 19"/>
+          <p:cNvSpPr txBox="1"/>
+          <p:nvPr/>
+        </p:nvSpPr>
+        <p:spPr>
+          <a:xfrm>
+            <a:off x="9530636" y="5805283"/>
+            <a:ext cx="3265717" cy="4225515"/>
+          </a:xfrm>
+          <a:prstGeom prst="rect">
+            <a:avLst/>
+          </a:prstGeom>
+        </p:spPr>
+        <p:txBody>
+          <a:bodyPr lIns="0" tIns="0" rIns="0" bIns="0" rtlCol="0" anchor="t" wrap="square">
+            <a:spAutoFit/>
+          </a:bodyPr>
+          <a:lstStyle/>
+          <a:p>
+            <a:pPr marL="0" lvl="0" indent="0" algn="ctr">
+              <a:lnSpc>
+                <a:spcPts val="3347"/>
+              </a:lnSpc>
+              <a:spcBef>
+                <a:spcPct val="0"/>
+              </a:spcBef>
+            </a:pPr>
+            <a:r>
+              <a:rPr lang="en-US" sz="2391" b="1" u="none" strike="noStrike" dirty="0">
+                <a:solidFill>
+                  <a:srgbClr val="000000"/>
+                </a:solidFill>
+                <a:latin typeface="Arial MT Pro Bold"/>
+                <a:ea typeface="Arial MT Pro Bold"/>
+                <a:cs typeface="Arial MT Pro Bold"/>
+                <a:sym typeface="Arial MT Pro Bold"/>
+              </a:rPr>
+              <a:t/>
+            </a:r>
+          </a:p>
+          <a:p>
+            <a:pPr marL="0" lvl="0" indent="0" algn="ctr">
+              <a:lnSpc>
+                <a:spcPts val="3347"/>
+              </a:lnSpc>
+              <a:spcBef>
+                <a:spcPct val="0"/>
+              </a:spcBef>
+            </a:pPr>
+            <a:endParaRPr lang="en-US" sz="2391" b="1" u="none" strike="noStrike" dirty="0">
+              <a:solidFill>
+                <a:srgbClr val="000000"/>
+              </a:solidFill>
+              <a:latin typeface="Arial MT Pro Bold"/>
+              <a:ea typeface="Arial MT Pro Bold"/>
+              <a:cs typeface="Arial MT Pro Bold"/>
+              <a:sym typeface="Arial MT Pro Bold"/>
+            </a:endParaRPr>
+          </a:p>
+          <a:p>
+            <a:pPr marL="0" lvl="0" indent="0" algn="ctr">
+              <a:lnSpc>
+                <a:spcPts val="3347"/>
+              </a:lnSpc>
+              <a:spcBef>
+                <a:spcPct val="0"/>
+              </a:spcBef>
+            </a:pPr>
+            <a:endParaRPr lang="en-US" sz="2391" b="1" u="none" strike="noStrike" dirty="0">
+              <a:solidFill>
+                <a:srgbClr val="000000"/>
+              </a:solidFill>
+              <a:latin typeface="Arial MT Pro Bold"/>
+              <a:ea typeface="Arial MT Pro Bold"/>
+              <a:cs typeface="Arial MT Pro Bold"/>
+              <a:sym typeface="Arial MT Pro Bold"/>
+            </a:endParaRPr>
+          </a:p>
+          <a:p>
+            <a:pPr marL="0" lvl="0" indent="0" algn="ctr">
+              <a:lnSpc>
+                <a:spcPts val="3347"/>
+              </a:lnSpc>
+              <a:spcBef>
+                <a:spcPct val="0"/>
+              </a:spcBef>
+            </a:pPr>
+            <a:endParaRPr lang="en-US" sz="2391" b="1" u="none" strike="noStrike" dirty="0">
+              <a:solidFill>
+                <a:srgbClr val="000000"/>
+              </a:solidFill>
+              <a:latin typeface="Arial MT Pro Bold"/>
+              <a:ea typeface="Arial MT Pro Bold"/>
+              <a:cs typeface="Arial MT Pro Bold"/>
+              <a:sym typeface="Arial MT Pro Bold"/>
+            </a:endParaRPr>
+          </a:p>
+          <a:p>
+            <a:pPr marL="0" lvl="0" indent="0" algn="ctr">
+              <a:lnSpc>
+                <a:spcPts val="3347"/>
+              </a:lnSpc>
+              <a:spcBef>
+                <a:spcPct val="0"/>
+              </a:spcBef>
+            </a:pPr>
+            <a:endParaRPr lang="en-US" sz="2391" b="1" u="none" strike="noStrike" dirty="0">
+              <a:solidFill>
+                <a:srgbClr val="000000"/>
+              </a:solidFill>
+              <a:latin typeface="Arial MT Pro Bold"/>
+              <a:ea typeface="Arial MT Pro Bold"/>
+              <a:cs typeface="Arial MT Pro Bold"/>
+              <a:sym typeface="Arial MT Pro Bold"/>
+            </a:endParaRPr>
+          </a:p>
+          <a:p>
+            <a:pPr marL="0" lvl="0" indent="0" algn="ctr">
+              <a:lnSpc>
+                <a:spcPts val="3347"/>
+              </a:lnSpc>
+              <a:spcBef>
+                <a:spcPct val="0"/>
+              </a:spcBef>
+            </a:pPr>
+            <a:endParaRPr lang="en-US" sz="2391" b="1" u="none" strike="noStrike" dirty="0">
+              <a:solidFill>
+                <a:srgbClr val="000000"/>
+              </a:solidFill>
+              <a:latin typeface="Arial MT Pro Bold"/>
+              <a:ea typeface="Arial MT Pro Bold"/>
+              <a:cs typeface="Arial MT Pro Bold"/>
+              <a:sym typeface="Arial MT Pro Bold"/>
+            </a:endParaRPr>
+          </a:p>
+          <a:p>
+            <a:pPr marL="0" lvl="0" indent="0" algn="ctr">
+              <a:lnSpc>
+                <a:spcPts val="3347"/>
+              </a:lnSpc>
+              <a:spcBef>
+                <a:spcPct val="0"/>
+              </a:spcBef>
+            </a:pPr>
+            <a:endParaRPr lang="en-US" sz="2391" b="1" u="none" strike="noStrike" dirty="0">
+              <a:solidFill>
+                <a:srgbClr val="000000"/>
+              </a:solidFill>
+              <a:latin typeface="Arial MT Pro Bold"/>
+              <a:ea typeface="Arial MT Pro Bold"/>
+              <a:cs typeface="Arial MT Pro Bold"/>
+              <a:sym typeface="Arial MT Pro Bold"/>
+            </a:endParaRPr>
+          </a:p>
+          <a:p>
+            <a:pPr marL="0" lvl="0" indent="0" algn="ctr">
+              <a:lnSpc>
+                <a:spcPts val="3347"/>
+              </a:lnSpc>
+              <a:spcBef>
+                <a:spcPct val="0"/>
+              </a:spcBef>
+            </a:pPr>
+            <a:endParaRPr lang="en-US" sz="2391" b="1" u="none" strike="noStrike" dirty="0">
+              <a:solidFill>
+                <a:srgbClr val="000000"/>
+              </a:solidFill>
+              <a:latin typeface="Arial MT Pro Bold"/>
+              <a:ea typeface="Arial MT Pro Bold"/>
+              <a:cs typeface="Arial MT Pro Bold"/>
+              <a:sym typeface="Arial MT Pro Bold"/>
+            </a:endParaRPr>
+          </a:p>
+          <a:p>
+            <a:pPr marL="0" lvl="0" indent="0" algn="ctr">
+              <a:lnSpc>
+                <a:spcPts val="3347"/>
+              </a:lnSpc>
+              <a:spcBef>
+                <a:spcPct val="0"/>
+              </a:spcBef>
+            </a:pPr>
+            <a:endParaRPr lang="en-US" sz="2391" b="1" u="none" strike="noStrike" dirty="0">
+              <a:solidFill>
+                <a:srgbClr val="000000"/>
+              </a:solidFill>
+              <a:latin typeface="Arial MT Pro Bold"/>
+              <a:ea typeface="Arial MT Pro Bold"/>
+              <a:cs typeface="Arial MT Pro Bold"/>
+              <a:sym typeface="Arial MT Pro Bold"/>
+            </a:endParaRPr>
+          </a:p>
+          <a:p>
+            <a:pPr marL="0" lvl="0" indent="0" algn="ctr">
+              <a:lnSpc>
+                <a:spcPts val="3347"/>
+              </a:lnSpc>
+              <a:spcBef>
+                <a:spcPct val="0"/>
+              </a:spcBef>
+            </a:pPr>
+            <a:endParaRPr lang="en-US" sz="2391" b="1" u="none" strike="noStrike" dirty="0">
+              <a:solidFill>
+                <a:srgbClr val="000000"/>
+              </a:solidFill>
+              <a:latin typeface="Arial MT Pro Bold"/>
+              <a:ea typeface="Arial MT Pro Bold"/>
+              <a:cs typeface="Arial MT Pro Bold"/>
+              <a:sym typeface="Arial MT Pro Bold"/>
+            </a:endParaRPr>
+          </a:p>
+        </p:txBody>
+      </p:sp>
+      <p:sp>
+        <p:nvSpPr>
+          <p:cNvPr id="20" name="TextBox 20"/>
+          <p:cNvSpPr txBox="1"/>
+          <p:nvPr/>
+        </p:nvSpPr>
+        <p:spPr>
+          <a:xfrm>
+            <a:off x="14223688" y="5805283"/>
+            <a:ext cx="3035612" cy="4225515"/>
+          </a:xfrm>
+          <a:prstGeom prst="rect">
+            <a:avLst/>
+          </a:prstGeom>
+        </p:spPr>
+        <p:txBody>
+          <a:bodyPr lIns="0" tIns="0" rIns="0" bIns="0" rtlCol="0" anchor="t" wrap="square">
+            <a:spAutoFit/>
+          </a:bodyPr>
+          <a:lstStyle/>
+          <a:p>
+            <a:pPr marL="0" lvl="0" indent="0" algn="ctr">
+              <a:lnSpc>
+                <a:spcPts val="3347"/>
+              </a:lnSpc>
+              <a:spcBef>
+                <a:spcPct val="0"/>
+              </a:spcBef>
+            </a:pPr>
+            <a:r>
+              <a:rPr lang="en-US" sz="2391" b="1" u="none" strike="noStrike" dirty="0">
+                <a:solidFill>
+                  <a:srgbClr val="000000"/>
+                </a:solidFill>
+                <a:latin typeface="Arial MT Pro Bold"/>
+                <a:ea typeface="Arial MT Pro Bold"/>
+                <a:cs typeface="Arial MT Pro Bold"/>
+                <a:sym typeface="Arial MT Pro Bold"/>
+              </a:rPr>
+              <a:t>FastAPI, MongoDB, Docker, Docker Compose, Python, Pandas, APScheduler</a:t>
+            </a:r>
+          </a:p>
+          <a:p>
+            <a:pPr marL="0" lvl="0" indent="0" algn="ctr">
+              <a:lnSpc>
+                <a:spcPts val="3347"/>
+              </a:lnSpc>
+              <a:spcBef>
+                <a:spcPct val="0"/>
+              </a:spcBef>
+            </a:pPr>
+            <a:endParaRPr lang="en-US" sz="2391" b="1" u="none" strike="noStrike" dirty="0">
+              <a:solidFill>
+                <a:srgbClr val="000000"/>
+              </a:solidFill>
+              <a:latin typeface="Arial MT Pro Bold"/>
+              <a:ea typeface="Arial MT Pro Bold"/>
+              <a:cs typeface="Arial MT Pro Bold"/>
+              <a:sym typeface="Arial MT Pro Bold"/>
+            </a:endParaRPr>
+          </a:p>
+          <a:p>
+            <a:pPr marL="0" lvl="0" indent="0" algn="ctr">
+              <a:lnSpc>
+                <a:spcPts val="3347"/>
+              </a:lnSpc>
+              <a:spcBef>
+                <a:spcPct val="0"/>
+              </a:spcBef>
+            </a:pPr>
+            <a:endParaRPr lang="en-US" sz="2391" b="1" u="none" strike="noStrike" dirty="0">
+              <a:solidFill>
+                <a:srgbClr val="000000"/>
+              </a:solidFill>
+              <a:latin typeface="Arial MT Pro Bold"/>
+              <a:ea typeface="Arial MT Pro Bold"/>
+              <a:cs typeface="Arial MT Pro Bold"/>
+              <a:sym typeface="Arial MT Pro Bold"/>
+            </a:endParaRPr>
+          </a:p>
+          <a:p>
+            <a:pPr marL="0" lvl="0" indent="0" algn="ctr">
+              <a:lnSpc>
+                <a:spcPts val="3347"/>
+              </a:lnSpc>
+              <a:spcBef>
+                <a:spcPct val="0"/>
+              </a:spcBef>
+            </a:pPr>
+            <a:endParaRPr lang="en-US" sz="2391" b="1" u="none" strike="noStrike" dirty="0">
+              <a:solidFill>
+                <a:srgbClr val="000000"/>
+              </a:solidFill>
+              <a:latin typeface="Arial MT Pro Bold"/>
+              <a:ea typeface="Arial MT Pro Bold"/>
+              <a:cs typeface="Arial MT Pro Bold"/>
+              <a:sym typeface="Arial MT Pro Bold"/>
+            </a:endParaRPr>
+          </a:p>
+          <a:p>
+            <a:pPr marL="0" lvl="0" indent="0" algn="ctr">
+              <a:lnSpc>
+                <a:spcPts val="3347"/>
+              </a:lnSpc>
+              <a:spcBef>
+                <a:spcPct val="0"/>
+              </a:spcBef>
+            </a:pPr>
+            <a:endParaRPr lang="en-US" sz="2391" b="1" u="none" strike="noStrike" dirty="0">
+              <a:solidFill>
+                <a:srgbClr val="000000"/>
+              </a:solidFill>
+              <a:latin typeface="Arial MT Pro Bold"/>
+              <a:ea typeface="Arial MT Pro Bold"/>
+              <a:cs typeface="Arial MT Pro Bold"/>
+              <a:sym typeface="Arial MT Pro Bold"/>
+            </a:endParaRPr>
+          </a:p>
+          <a:p>
+            <a:pPr marL="0" lvl="0" indent="0" algn="ctr">
+              <a:lnSpc>
+                <a:spcPts val="3347"/>
+              </a:lnSpc>
+              <a:spcBef>
+                <a:spcPct val="0"/>
+              </a:spcBef>
+            </a:pPr>
+            <a:endParaRPr lang="en-US" sz="2391" b="1" u="none" strike="noStrike" dirty="0">
+              <a:solidFill>
+                <a:srgbClr val="000000"/>
+              </a:solidFill>
+              <a:latin typeface="Arial MT Pro Bold"/>
+              <a:ea typeface="Arial MT Pro Bold"/>
+              <a:cs typeface="Arial MT Pro Bold"/>
+              <a:sym typeface="Arial MT Pro Bold"/>
+            </a:endParaRPr>
+          </a:p>
+          <a:p>
+            <a:pPr marL="0" lvl="0" indent="0" algn="ctr">
+              <a:lnSpc>
+                <a:spcPts val="3347"/>
+              </a:lnSpc>
+              <a:spcBef>
+                <a:spcPct val="0"/>
+              </a:spcBef>
+            </a:pPr>
+            <a:endParaRPr lang="en-US" sz="2391" b="1" u="none" strike="noStrike" dirty="0">
+              <a:solidFill>
+                <a:srgbClr val="000000"/>
+              </a:solidFill>
+              <a:latin typeface="Arial MT Pro Bold"/>
+              <a:ea typeface="Arial MT Pro Bold"/>
+              <a:cs typeface="Arial MT Pro Bold"/>
+              <a:sym typeface="Arial MT Pro Bold"/>
+            </a:endParaRPr>
+          </a:p>
+          <a:p>
+            <a:pPr marL="0" lvl="0" indent="0" algn="ctr">
+              <a:lnSpc>
+                <a:spcPts val="3347"/>
+              </a:lnSpc>
+              <a:spcBef>
+                <a:spcPct val="0"/>
+              </a:spcBef>
+            </a:pPr>
+            <a:endParaRPr lang="en-US" sz="2391" b="1" u="none" strike="noStrike" dirty="0">
+              <a:solidFill>
+                <a:srgbClr val="000000"/>
+              </a:solidFill>
+              <a:latin typeface="Arial MT Pro Bold"/>
+              <a:ea typeface="Arial MT Pro Bold"/>
+              <a:cs typeface="Arial MT Pro Bold"/>
+              <a:sym typeface="Arial MT Pro Bold"/>
+            </a:endParaRPr>
+          </a:p>
+          <a:p>
+            <a:pPr marL="0" lvl="0" indent="0" algn="ctr">
+              <a:lnSpc>
+                <a:spcPts val="3347"/>
+              </a:lnSpc>
+              <a:spcBef>
+                <a:spcPct val="0"/>
+              </a:spcBef>
+            </a:pPr>
+            <a:endParaRPr lang="en-US" sz="2391" b="1" u="none" strike="noStrike" dirty="0">
+              <a:solidFill>
+                <a:srgbClr val="000000"/>
+              </a:solidFill>
+              <a:latin typeface="Arial MT Pro Bold"/>
+              <a:ea typeface="Arial MT Pro Bold"/>
+              <a:cs typeface="Arial MT Pro Bold"/>
+              <a:sym typeface="Arial MT Pro Bold"/>
+            </a:endParaRPr>
+          </a:p>
+          <a:p>
+            <a:pPr marL="0" lvl="0" indent="0" algn="ctr">
+              <a:lnSpc>
+                <a:spcPts val="3347"/>
+              </a:lnSpc>
+              <a:spcBef>
+                <a:spcPct val="0"/>
+              </a:spcBef>
+            </a:pPr>
+            <a:endParaRPr lang="en-US" sz="2391" b="1" u="none" strike="noStrike" dirty="0">
+              <a:solidFill>
+                <a:srgbClr val="000000"/>
+              </a:solidFill>
+              <a:latin typeface="Arial MT Pro Bold"/>
+              <a:ea typeface="Arial MT Pro Bold"/>
+              <a:cs typeface="Arial MT Pro Bold"/>
+              <a:sym typeface="Arial MT Pro Bold"/>
+            </a:endParaRPr>
+          </a:p>
         </p:txBody>
       </p:sp>
       <p:pic>
         <p:nvPicPr>
-          <p:cNvPr id="16" name="Picture 15" descr="temp_photo.png"/>
+          <p:cNvPr id="22" name="Picture 21" descr="temp_photo.png"/>
           <p:cNvPicPr>
             <a:picLocks noChangeAspect="1"/>
           </p:cNvPicPr>
@@ -3650,341 +4620,14 @@
         </p:blipFill>
         <p:spPr>
           <a:xfrm>
-            <a:off x="1085817" y="1314776"/>
-            <a:ext cx="3041855" cy="2754260"/>
+            <a:off x="1085817" y="1357995"/>
+            <a:ext cx="3041855" cy="2549115"/>
           </a:xfrm>
           <a:prstGeom prst="rect">
             <a:avLst/>
           </a:prstGeom>
         </p:spPr>
       </p:pic>
-      <p:sp>
-        <p:nvSpPr>
-          <p:cNvPr id="17" name="TextBox 16"/>
-          <p:cNvSpPr txBox="1"/>
-          <p:nvPr/>
-        </p:nvSpPr>
-        <p:spPr>
-          <a:xfrm>
-            <a:off x="1180138" y="4240485"/>
-            <a:ext cx="2853214" cy="562200"/>
-          </a:xfrm>
-          <a:prstGeom prst="rect">
-            <a:avLst/>
-          </a:prstGeom>
-          <a:noFill/>
-        </p:spPr>
-        <p:txBody>
-          <a:bodyPr wrap="square">
-            <a:spAutoFit/>
-          </a:bodyPr>
-          <a:lstStyle/>
-          <a:p/>
-          <a:p>
-            <a:pPr algn="ctr">
-              <a:defRPr sz="3000" b="1">
-                <a:solidFill>
-                  <a:srgbClr val="FFFFFF"/>
-                </a:solidFill>
-              </a:defRPr>
-            </a:pPr>
-            <a:r>
-              <a:t>Maryam Mouaki</a:t>
-            </a:r>
-          </a:p>
-        </p:txBody>
-      </p:sp>
-      <p:sp>
-        <p:nvSpPr>
-          <p:cNvPr id="18" name="TextBox 17"/>
-          <p:cNvSpPr txBox="1"/>
-          <p:nvPr/>
-        </p:nvSpPr>
-        <p:spPr>
-          <a:xfrm>
-            <a:off x="1180138" y="4840485"/>
-            <a:ext cx="3000000" cy="500000"/>
-          </a:xfrm>
-          <a:prstGeom prst="rect">
-            <a:avLst/>
-          </a:prstGeom>
-          <a:noFill/>
-        </p:spPr>
-        <p:txBody>
-          <a:bodyPr wrap="square">
-            <a:spAutoFit/>
-          </a:bodyPr>
-          <a:lstStyle/>
-          <a:p/>
-          <a:p>
-            <a:pPr algn="ctr">
-              <a:defRPr sz="2000" b="0">
-                <a:solidFill>
-                  <a:srgbClr val="C8C8C8"/>
-                </a:solidFill>
-              </a:defRPr>
-            </a:pPr>
-            <a:r>
-              <a:t>Etudiante en deuxième année du cycle Big Data et Systèmes d’Information</a:t>
-            </a:r>
-          </a:p>
-        </p:txBody>
-      </p:sp>
-      <p:sp>
-        <p:nvSpPr>
-          <p:cNvPr id="19" name="TextBox 18"/>
-          <p:cNvSpPr txBox="1"/>
-          <p:nvPr/>
-        </p:nvSpPr>
-        <p:spPr>
-          <a:xfrm>
-            <a:off x="588266" y="7000000"/>
-            <a:ext cx="4036957" cy="1785964"/>
-          </a:xfrm>
-          <a:prstGeom prst="rect">
-            <a:avLst/>
-          </a:prstGeom>
-          <a:noFill/>
-        </p:spPr>
-        <p:txBody>
-          <a:bodyPr wrap="square">
-            <a:spAutoFit/>
-          </a:bodyPr>
-          <a:lstStyle/>
-          <a:p/>
-          <a:p>
-            <a:pPr>
-              <a:defRPr sz="2000" b="1">
-                <a:solidFill>
-                  <a:srgbClr val="000000"/>
-                </a:solidFill>
-              </a:defRPr>
-            </a:pPr>
-            <a:r>
-              <a:t>{'arabe': 'Langue maternelle', 'anglais': 'C1 (Rosetta Stone)', 'français': 'B2 (Rosetta Stone)', 'espagnol': 'A1 (Rosetta Stone)'}</a:t>
-            </a:r>
-          </a:p>
-        </p:txBody>
-      </p:sp>
-      <p:sp>
-        <p:nvSpPr>
-          <p:cNvPr id="20" name="TextBox 19"/>
-          <p:cNvSpPr txBox="1"/>
-          <p:nvPr/>
-        </p:nvSpPr>
-        <p:spPr>
-          <a:xfrm>
-            <a:off x="6388294" y="1000000"/>
-            <a:ext cx="11297755" cy="4000000"/>
-          </a:xfrm>
-          <a:prstGeom prst="rect">
-            <a:avLst/>
-          </a:prstGeom>
-          <a:noFill/>
-        </p:spPr>
-        <p:txBody>
-          <a:bodyPr wrap="square">
-            <a:spAutoFit/>
-          </a:bodyPr>
-          <a:lstStyle/>
-          <a:p/>
-          <a:p>
-            <a:pPr>
-              <a:defRPr sz="2200" b="1">
-                <a:solidFill>
-                  <a:srgbClr val="000000"/>
-                </a:solidFill>
-              </a:defRPr>
-            </a:pPr>
-            <a:r>
-              <a:t>Plateforme de Collecte et Gestion d’Appels d’Offres Publics</a:t>
-            </a:r>
-          </a:p>
-          <a:p>
-            <a:pPr>
-              <a:defRPr sz="1800" b="0">
-                <a:solidFill>
-                  <a:srgbClr val="000000"/>
-                </a:solidFill>
-              </a:defRPr>
-            </a:pPr>
-            <a:r>
-              <a:t>Développement d’une plateforme backend pour la collecte, le stockage et la gestion d’appels d’offres publics via web scraping et API REST. Utilisation de FastAPI, MongoDB, Docker, Docker Compose, Python, Pandas, APScheduler.</a:t>
-            </a:r>
-          </a:p>
-          <a:p>
-            <a:pPr>
-              <a:defRPr sz="1400"/>
-            </a:pPr>
-          </a:p>
-          <a:p>
-            <a:pPr>
-              <a:defRPr sz="2200" b="1">
-                <a:solidFill>
-                  <a:srgbClr val="000000"/>
-                </a:solidFill>
-              </a:defRPr>
-            </a:pPr>
-            <a:r>
-              <a:t>Système de Collecte et Recherche de Données Sanctionnées</a:t>
-            </a:r>
-          </a:p>
-          <a:p>
-            <a:pPr>
-              <a:defRPr sz="1800" b="0">
-                <a:solidFill>
-                  <a:srgbClr val="000000"/>
-                </a:solidFill>
-              </a:defRPr>
-            </a:pPr>
-            <a:r>
-              <a:t>Conception d’un système utilisant Prefect pour l’orchestration, Elasticsearch pour l’indexation, et FastAPI pour une API de recherche.</a:t>
-            </a:r>
-          </a:p>
-          <a:p>
-            <a:pPr>
-              <a:defRPr sz="1400"/>
-            </a:pPr>
-          </a:p>
-          <a:p>
-            <a:pPr>
-              <a:defRPr sz="2200" b="1">
-                <a:solidFill>
-                  <a:srgbClr val="000000"/>
-                </a:solidFill>
-              </a:defRPr>
-            </a:pPr>
-            <a:r>
-              <a:t>Modèle Prédiction de Quantité d’Importation de Produits</a:t>
-            </a:r>
-          </a:p>
-          <a:p>
-            <a:pPr>
-              <a:defRPr sz="1800" b="0">
-                <a:solidFill>
-                  <a:srgbClr val="000000"/>
-                </a:solidFill>
-              </a:defRPr>
-            </a:pPr>
-            <a:r>
-              <a:t>Développement d’un modèle de machine learning basé sur XGBoost pour prédire la quantité à importer de chaque produit identifié par un CODE SH, en exploitant des données économiques et douanières. Évaluation du modèle avec des métriques de régression (RMSE, MAE, R2) et visualisation des résultats.</a:t>
-            </a:r>
-          </a:p>
-          <a:p>
-            <a:pPr>
-              <a:defRPr sz="1400"/>
-            </a:pPr>
-          </a:p>
-        </p:txBody>
-      </p:sp>
-      <p:sp>
-        <p:nvSpPr>
-          <p:cNvPr id="21" name="TextBox 20"/>
-          <p:cNvSpPr txBox="1"/>
-          <p:nvPr/>
-        </p:nvSpPr>
-        <p:spPr>
-          <a:xfrm>
-            <a:off x="5821465" y="5815490"/>
-            <a:ext cx="3115572" cy="4132468"/>
-          </a:xfrm>
-          <a:prstGeom prst="rect">
-            <a:avLst/>
-          </a:prstGeom>
-          <a:noFill/>
-        </p:spPr>
-        <p:txBody>
-          <a:bodyPr wrap="square">
-            <a:spAutoFit/>
-          </a:bodyPr>
-          <a:lstStyle/>
-          <a:p/>
-          <a:p>
-            <a:pPr>
-              <a:defRPr sz="1800" b="1">
-                <a:solidFill>
-                  <a:srgbClr val="000000"/>
-                </a:solidFill>
-              </a:defRPr>
-            </a:pPr>
-            <a:r>
-              <a:t>Python, Java, C, SQL, PL/SQL, HTML, CSS, JavaScript, MongoDB, Oracle, Elasticsearch, PostgreSQL, Neo4j, Agno, Langchaine, Fast Scikit-learn, Pandas, NumPy, Streamlit, Matplotlib, Prefect, APScheduler, XGBoost, Seaborn</a:t>
-            </a:r>
-          </a:p>
-        </p:txBody>
-      </p:sp>
-      <p:sp>
-        <p:nvSpPr>
-          <p:cNvPr id="22" name="TextBox 21"/>
-          <p:cNvSpPr txBox="1"/>
-          <p:nvPr/>
-        </p:nvSpPr>
-        <p:spPr>
-          <a:xfrm>
-            <a:off x="9546637" y="6020278"/>
-            <a:ext cx="3565954" cy="3722893"/>
-          </a:xfrm>
-          <a:prstGeom prst="rect">
-            <a:avLst/>
-          </a:prstGeom>
-          <a:noFill/>
-        </p:spPr>
-        <p:txBody>
-          <a:bodyPr wrap="square">
-            <a:spAutoFit/>
-          </a:bodyPr>
-          <a:lstStyle/>
-          <a:p/>
-          <a:p>
-            <a:pPr>
-              <a:defRPr sz="1800" b="1">
-                <a:solidFill>
-                  <a:srgbClr val="000000"/>
-                </a:solidFill>
-              </a:defRPr>
-            </a:pPr>
-            <a:r>
-              <a:t>Communication, Travail en équipe</a:t>
-            </a:r>
-          </a:p>
-        </p:txBody>
-      </p:sp>
-      <p:sp>
-        <p:nvSpPr>
-          <p:cNvPr id="23" name="TextBox 22"/>
-          <p:cNvSpPr txBox="1"/>
-          <p:nvPr/>
-        </p:nvSpPr>
-        <p:spPr>
-          <a:xfrm>
-            <a:off x="13655839" y="5944982"/>
-            <a:ext cx="3962469" cy="3313318"/>
-          </a:xfrm>
-          <a:prstGeom prst="rect">
-            <a:avLst/>
-          </a:prstGeom>
-          <a:noFill/>
-        </p:spPr>
-        <p:txBody>
-          <a:bodyPr wrap="square">
-            <a:spAutoFit/>
-          </a:bodyPr>
-          <a:lstStyle/>
-          <a:p/>
-          <a:p>
-            <a:pPr>
-              <a:defRPr sz="1800" b="1">
-                <a:solidFill>
-                  <a:srgbClr val="000000"/>
-                </a:solidFill>
-              </a:defRPr>
-            </a:pPr>
-            <a:r>
-              <a:t>MinIO, Hadoop, Kafka, Docker, Docker Compose, Prefect, Power Bi, Git, GitHub, LaTeX, Matlab, Maple</a:t>
-            </a:r>
-          </a:p>
-        </p:txBody>
-      </p:sp>
     </p:spTree>
   </p:cSld>
   <p:clrMapOvr>

--- a/BioProfile_Generated.pptx
+++ b/BioProfile_Generated.pptx
@@ -3644,7 +3644,7 @@
                 <a:cs typeface="Arial MT Pro Bold"/>
                 <a:sym typeface="Arial MT Pro Bold"/>
               </a:rPr>
-              <a:t>Ait Alla Latifa</a:t>
+              <a:t>Mouaki Maryam</a:t>
             </a:r>
           </a:p>
         </p:txBody>
@@ -3688,9 +3688,10 @@
                 <a:cs typeface="Arial MT Pro Bold"/>
                 <a:sym typeface="Arial MT Pro Bold"/>
               </a:rPr>
-              <a:t>English
-Français
-Arabe</a:t>
+              <a:t>arabe — Langue maternelle
+anglais — C1 (Rosetta Stone)
+français — B2 (Rosetta Stone)
+espagnol — A1 (Rosetta Stone)</a:t>
             </a:r>
           </a:p>
           <a:p>
@@ -3803,7 +3804,7 @@
           </a:p>
           <a:p>
             <a:pPr>
-              <a:defRPr sz="1800" b="1">
+              <a:defRPr sz="1600" b="1">
                 <a:solidFill>
                   <a:srgbClr val="FF69B4"/>
                 </a:solidFill>
@@ -3811,27 +3812,30 @@
               </a:defRPr>
             </a:pPr>
             <a:r>
-              <a:t>Pipeline Big Data temps réel pour la surveillance médicale</a:t>
+              <a:t>Plateforme de Collecte et Gestion d’Appels d’Offres Publics</a:t>
             </a:r>
           </a:p>
           <a:p>
             <a:pPr>
-              <a:defRPr sz="1400" b="1">
+              <a:defRPr sz="1300" b="1">
                 <a:solidFill>
                   <a:srgbClr val="000000"/>
                 </a:solidFill>
                 <a:latin typeface="Arial MT Pro Bold"/>
               </a:defRPr>
             </a:pPr>
+            <a:r>
+              <a:t>Developpement d’une plateforme backend pour la collecte, le stockage et la gestion d’appels d’offres publics via web scraping et API REST. Utilisation de FastAPI, MongoDB, Docker, Docker Compose, Python, Pandas.</a:t>
+            </a:r>
           </a:p>
           <a:p>
             <a:pPr>
-              <a:defRPr sz="1200"/>
+              <a:defRPr sz="800"/>
             </a:pPr>
           </a:p>
           <a:p>
             <a:pPr>
-              <a:defRPr sz="1800" b="1">
+              <a:defRPr sz="1600" b="1">
                 <a:solidFill>
                   <a:srgbClr val="FF69B4"/>
                 </a:solidFill>
@@ -3839,27 +3843,30 @@
               </a:defRPr>
             </a:pPr>
             <a:r>
-              <a:t>Pipeline Big Data Blockchain pour la traçabilité des rapports financiers audités</a:t>
+              <a:t>Système de Collecte et Recherche de Données Sanctionnées</a:t>
             </a:r>
           </a:p>
           <a:p>
             <a:pPr>
-              <a:defRPr sz="1400" b="1">
+              <a:defRPr sz="1300" b="1">
                 <a:solidFill>
                   <a:srgbClr val="000000"/>
                 </a:solidFill>
                 <a:latin typeface="Arial MT Pro Bold"/>
               </a:defRPr>
             </a:pPr>
+            <a:r>
+              <a:t>Conception d’un système utilisant Prefect pour l'orchestration, Elasticsearch pour l'indexation, et FastAPI pour une API de recherche. Utilisation de Python, Prefect, Elasticsearch, FastAPI, Levenshtein, APScheduler, Pandas, Plotly.</a:t>
+            </a:r>
           </a:p>
           <a:p>
             <a:pPr>
-              <a:defRPr sz="1200"/>
+              <a:defRPr sz="800"/>
             </a:pPr>
           </a:p>
           <a:p>
             <a:pPr>
-              <a:defRPr sz="1800" b="1">
+              <a:defRPr sz="1600" b="1">
                 <a:solidFill>
                   <a:srgbClr val="FF69B4"/>
                 </a:solidFill>
@@ -3867,12 +3874,12 @@
               </a:defRPr>
             </a:pPr>
             <a:r>
-              <a:t>Stagiaire Développement Informatique – YAZAKI Morocco, Meknès</a:t>
+              <a:t>Modèle Prédiction de Quantité d’Importation de Produits</a:t>
             </a:r>
           </a:p>
           <a:p>
             <a:pPr>
-              <a:defRPr sz="1400" b="1">
+              <a:defRPr sz="1300" b="1">
                 <a:solidFill>
                   <a:srgbClr val="000000"/>
                 </a:solidFill>
@@ -3880,7 +3887,38 @@
               </a:defRPr>
             </a:pPr>
             <a:r>
-              <a:t>Développement d’un outil permettant l’automatisation de la génération des contrats ANAPEC à partir de fichiers Excel, avec stockage de l’historique dans une base SQLite et interface graphique sous PyQt6.</a:t>
+              <a:t>Developpement d’un modèle de machine learning basé sur XGBoost pour prédire la quantité à importer de chaque produit identifié par un CODE SH, en exploitant des données économiques et douanières. Utilisation de Python, Pandas, Scikit-learn, Matplotlib, Seaborn.</a:t>
+            </a:r>
+          </a:p>
+          <a:p>
+            <a:pPr>
+              <a:defRPr sz="800"/>
+            </a:pPr>
+          </a:p>
+          <a:p>
+            <a:pPr>
+              <a:defRPr sz="1600" b="1">
+                <a:solidFill>
+                  <a:srgbClr val="FF69B4"/>
+                </a:solidFill>
+                <a:latin typeface="Arial MT Pro Bold"/>
+              </a:defRPr>
+            </a:pPr>
+            <a:r>
+              <a:t>RedGuard (Hackathon AI Coding Tech 2025)</a:t>
+            </a:r>
+          </a:p>
+          <a:p>
+            <a:pPr>
+              <a:defRPr sz="1300" b="1">
+                <a:solidFill>
+                  <a:srgbClr val="000000"/>
+                </a:solidFill>
+                <a:latin typeface="Arial MT Pro Bold"/>
+              </a:defRPr>
+            </a:pPr>
+            <a:r>
+              <a:t>Developpement d’un agent de sécurité IA pour détecter et classifier les intrusions. Utilisation de Python, Scikit-learn , Pandas, NumPy, Streamlit.</a:t>
             </a:r>
           </a:p>
         </p:txBody>
@@ -3924,7 +3962,7 @@
                 <a:cs typeface="Arial MT Pro Bold"/>
                 <a:sym typeface="Arial MT Pro Bold"/>
               </a:rPr>
-              <a:t>Python, Java, SQL, Apache Kafka, Apache Spark Structured Streaming, Delta Lake, PySpark, Docker</a:t>
+              <a:t>Python, Java, C, SQL, PL/SQL, FastAPI, Pandas, NumPy, Streamlit, Matplotlib, Prefect, APScheduler, XGBoost, Seaborn</a:t>
             </a:r>
           </a:p>
           <a:p>
@@ -4139,7 +4177,7 @@
                 <a:cs typeface="Arial MT Pro Bold"/>
                 <a:sym typeface="Arial MT Pro Bold"/>
               </a:rPr>
-              <a:t>Gestion d'équipe, Sens du détail, Résolution de problèmes, Collaboration en équipe</a:t>
+              <a:t/>
             </a:r>
           </a:p>
           <a:p>
@@ -4354,7 +4392,7 @@
                 <a:cs typeface="Arial MT Pro Bold"/>
                 <a:sym typeface="Arial MT Pro Bold"/>
               </a:rPr>
-              <a:t>Hadoop, Kafka, Spark, Data Lake, Data Warehouse, Data Lakehouse, Apache Iceberg, MySQL, PL/SQL, MongoDB, HBase, Neo4j, Hive, Merise, UML, Power BI, HTML, CSS, JavaScript, Azure Blob Storage, Azure Data Lake Gen2, Azure Queue Storage, Azure Files, Git, GitHub, Unity, Windows, Linux, Hyperledger Besu, Web3.py, PostgreSQL, Power BI, Smart Contracts, Blockchain, ETL</a:t>
+              <a:t>FastAPI, MongoDB, Docker, Docker Compose, Elasticsearch, Oracle, PostgreSQL, MinIO, Hadoop, Kafka, Prefect, Power Bi, Git, GitHub, LaTeX, Matlab, Maple</a:t>
             </a:r>
           </a:p>
           <a:p>

--- a/BioProfile_Generated.pptx
+++ b/BioProfile_Generated.pptx
@@ -4,6 +4,9 @@
   <p:sldMasterIdLst>
     <p:sldMasterId id="2147483648" r:id="rId1"/>
   </p:sldMasterIdLst>
+  <p:notesMasterIdLst>
+    <p:notesMasterId r:id="rId3"/>
+  </p:notesMasterIdLst>
   <p:sldIdLst>
     <p:sldId id="256" r:id="rId2"/>
   </p:sldIdLst>
@@ -11,15 +14,27 @@
   <p:notesSz cx="6858000" cy="9144000"/>
   <p:embeddedFontLst>
     <p:embeddedFont>
-      <p:font typeface="Arial MT Pro Bold" panose="020B0604020202020204" charset="0"/>
-      <p:regular r:id="rId3"/>
+      <p:font typeface="Arial" panose="020B0604020202020204" pitchFamily="34" charset="0"/>
+      <p:regular r:id="rId4"/>
+    </p:embeddedFont>
+    <p:embeddedFont>
+      <p:font typeface="Arial Bold" panose="020B0604020202020204" charset="0"/>
+      <p:regular r:id="rId5"/>
     </p:embeddedFont>
     <p:embeddedFont>
       <p:font typeface="Calibri" panose="020F0502020204030204" pitchFamily="34" charset="0"/>
-      <p:regular r:id="rId4"/>
-      <p:bold r:id="rId5"/>
-      <p:italic r:id="rId6"/>
-      <p:boldItalic r:id="rId7"/>
+      <p:regular r:id="rId6"/>
+      <p:bold r:id="rId7"/>
+      <p:italic r:id="rId8"/>
+      <p:boldItalic r:id="rId9"/>
+    </p:embeddedFont>
+    <p:embeddedFont>
+      <p:font typeface="Calibri (MS)" panose="020B0604020202020204" charset="0"/>
+      <p:regular r:id="rId10"/>
+    </p:embeddedFont>
+    <p:embeddedFont>
+      <p:font typeface="Calibri (MS) Bold" panose="020B0604020202020204" charset="0"/>
+      <p:regular r:id="rId11"/>
     </p:embeddedFont>
   </p:embeddedFontLst>
   <p:defaultTextStyle>
@@ -134,6 +149,574 @@
     </p:ext>
   </p:extLst>
 </p:presentation>
+</file>
+
+<file path=ppt/notesMasters/notesMaster1.xml><?xml version="1.0" encoding="utf-8"?>
+<p:notesMaster xmlns:a="http://schemas.openxmlformats.org/drawingml/2006/main" xmlns:r="http://schemas.openxmlformats.org/officeDocument/2006/relationships" xmlns:p="http://schemas.openxmlformats.org/presentationml/2006/main">
+  <p:cSld>
+    <p:bg>
+      <p:bgRef idx="1001">
+        <a:schemeClr val="bg1"/>
+      </p:bgRef>
+    </p:bg>
+    <p:spTree>
+      <p:nvGrpSpPr>
+        <p:cNvPr id="1" name=""/>
+        <p:cNvGrpSpPr/>
+        <p:nvPr/>
+      </p:nvGrpSpPr>
+      <p:grpSpPr>
+        <a:xfrm>
+          <a:off x="0" y="0"/>
+          <a:ext cx="0" cy="0"/>
+          <a:chOff x="0" y="0"/>
+          <a:chExt cx="0" cy="0"/>
+        </a:xfrm>
+      </p:grpSpPr>
+      <p:sp>
+        <p:nvSpPr>
+          <p:cNvPr id="2" name="Header Placeholder 1"/>
+          <p:cNvSpPr>
+            <a:spLocks noGrp="1"/>
+          </p:cNvSpPr>
+          <p:nvPr>
+            <p:ph type="hdr" sz="quarter"/>
+          </p:nvPr>
+        </p:nvSpPr>
+        <p:spPr>
+          <a:xfrm>
+            <a:off x="0" y="0"/>
+            <a:ext cx="3962400" cy="342900"/>
+          </a:xfrm>
+          <a:prstGeom prst="rect">
+            <a:avLst/>
+          </a:prstGeom>
+        </p:spPr>
+        <p:txBody>
+          <a:bodyPr vert="horz" lIns="91440" tIns="45720" rIns="91440" bIns="45720" rtlCol="0"/>
+          <a:lstStyle>
+            <a:lvl1pPr algn="l">
+              <a:defRPr sz="1200"/>
+            </a:lvl1pPr>
+          </a:lstStyle>
+          <a:p>
+            <a:endParaRPr lang="cs-CZ"/>
+          </a:p>
+        </p:txBody>
+      </p:sp>
+      <p:sp>
+        <p:nvSpPr>
+          <p:cNvPr id="3" name="Date Placeholder 2"/>
+          <p:cNvSpPr>
+            <a:spLocks noGrp="1"/>
+          </p:cNvSpPr>
+          <p:nvPr>
+            <p:ph type="dt" idx="1"/>
+          </p:nvPr>
+        </p:nvSpPr>
+        <p:spPr>
+          <a:xfrm>
+            <a:off x="5180013" y="0"/>
+            <a:ext cx="3962400" cy="342900"/>
+          </a:xfrm>
+          <a:prstGeom prst="rect">
+            <a:avLst/>
+          </a:prstGeom>
+        </p:spPr>
+        <p:txBody>
+          <a:bodyPr vert="horz" lIns="91440" tIns="45720" rIns="91440" bIns="45720" rtlCol="0"/>
+          <a:lstStyle>
+            <a:lvl1pPr algn="r">
+              <a:defRPr sz="1200"/>
+            </a:lvl1pPr>
+          </a:lstStyle>
+          <a:p>
+            <a:fld id="{B7268E1E-0E44-426D-905E-8AD9B19D2182}" type="datetimeFigureOut">
+              <a:rPr lang="cs-CZ" smtClean="0"/>
+              <a:t>28.07.2026</a:t>
+            </a:fld>
+            <a:endParaRPr lang="cs-CZ"/>
+          </a:p>
+        </p:txBody>
+      </p:sp>
+      <p:sp>
+        <p:nvSpPr>
+          <p:cNvPr id="4" name="Slide Image Placeholder 3"/>
+          <p:cNvSpPr>
+            <a:spLocks noGrp="1" noRot="1" noChangeAspect="1"/>
+          </p:cNvSpPr>
+          <p:nvPr>
+            <p:ph type="sldImg" idx="2"/>
+          </p:nvPr>
+        </p:nvSpPr>
+        <p:spPr>
+          <a:xfrm>
+            <a:off x="2857500" y="512763"/>
+            <a:ext cx="3429000" cy="2566987"/>
+          </a:xfrm>
+          <a:prstGeom prst="rect">
+            <a:avLst/>
+          </a:prstGeom>
+          <a:noFill/>
+          <a:ln w="12700">
+            <a:solidFill>
+              <a:prstClr val="black"/>
+            </a:solidFill>
+          </a:ln>
+        </p:spPr>
+        <p:txBody>
+          <a:bodyPr vert="horz" lIns="91440" tIns="45720" rIns="91440" bIns="45720" rtlCol="0" anchor="ctr"/>
+          <a:lstStyle/>
+          <a:p>
+            <a:endParaRPr lang="cs-CZ"/>
+          </a:p>
+        </p:txBody>
+      </p:sp>
+      <p:sp>
+        <p:nvSpPr>
+          <p:cNvPr id="5" name="Notes Placeholder 4"/>
+          <p:cNvSpPr>
+            <a:spLocks noGrp="1"/>
+          </p:cNvSpPr>
+          <p:nvPr>
+            <p:ph type="body" sz="quarter" idx="3"/>
+          </p:nvPr>
+        </p:nvSpPr>
+        <p:spPr>
+          <a:xfrm>
+            <a:off x="914400" y="3251200"/>
+            <a:ext cx="7315200" cy="3081338"/>
+          </a:xfrm>
+          <a:prstGeom prst="rect">
+            <a:avLst/>
+          </a:prstGeom>
+        </p:spPr>
+        <p:txBody>
+          <a:bodyPr vert="horz" lIns="91440" tIns="45720" rIns="91440" bIns="45720" rtlCol="0"/>
+          <a:lstStyle/>
+          <a:p>
+            <a:pPr lvl="0"/>
+            <a:r>
+              <a:rPr lang="en-US"/>
+              <a:t>Click to edit Master text styles</a:t>
+            </a:r>
+          </a:p>
+          <a:p>
+            <a:pPr lvl="1"/>
+            <a:r>
+              <a:rPr lang="en-US"/>
+              <a:t>Second level</a:t>
+            </a:r>
+          </a:p>
+          <a:p>
+            <a:pPr lvl="2"/>
+            <a:r>
+              <a:rPr lang="en-US"/>
+              <a:t>Third level</a:t>
+            </a:r>
+          </a:p>
+          <a:p>
+            <a:pPr lvl="3"/>
+            <a:r>
+              <a:rPr lang="en-US"/>
+              <a:t>Fourth level</a:t>
+            </a:r>
+          </a:p>
+          <a:p>
+            <a:pPr lvl="4"/>
+            <a:r>
+              <a:rPr lang="en-US"/>
+              <a:t>Fifth level</a:t>
+            </a:r>
+            <a:endParaRPr lang="cs-CZ"/>
+          </a:p>
+        </p:txBody>
+      </p:sp>
+      <p:sp>
+        <p:nvSpPr>
+          <p:cNvPr id="6" name="Footer Placeholder 5"/>
+          <p:cNvSpPr>
+            <a:spLocks noGrp="1"/>
+          </p:cNvSpPr>
+          <p:nvPr>
+            <p:ph type="ftr" sz="quarter" idx="4"/>
+          </p:nvPr>
+        </p:nvSpPr>
+        <p:spPr>
+          <a:xfrm>
+            <a:off x="0" y="6502400"/>
+            <a:ext cx="3962400" cy="341313"/>
+          </a:xfrm>
+          <a:prstGeom prst="rect">
+            <a:avLst/>
+          </a:prstGeom>
+        </p:spPr>
+        <p:txBody>
+          <a:bodyPr vert="horz" lIns="91440" tIns="45720" rIns="91440" bIns="45720" rtlCol="0" anchor="b"/>
+          <a:lstStyle>
+            <a:lvl1pPr algn="l">
+              <a:defRPr sz="1200"/>
+            </a:lvl1pPr>
+          </a:lstStyle>
+          <a:p>
+            <a:endParaRPr lang="cs-CZ"/>
+          </a:p>
+        </p:txBody>
+      </p:sp>
+      <p:sp>
+        <p:nvSpPr>
+          <p:cNvPr id="7" name="Slide Number Placeholder 6"/>
+          <p:cNvSpPr>
+            <a:spLocks noGrp="1"/>
+          </p:cNvSpPr>
+          <p:nvPr>
+            <p:ph type="sldNum" sz="quarter" idx="5"/>
+          </p:nvPr>
+        </p:nvSpPr>
+        <p:spPr>
+          <a:xfrm>
+            <a:off x="5180013" y="6502400"/>
+            <a:ext cx="3962400" cy="341313"/>
+          </a:xfrm>
+          <a:prstGeom prst="rect">
+            <a:avLst/>
+          </a:prstGeom>
+        </p:spPr>
+        <p:txBody>
+          <a:bodyPr vert="horz" lIns="91440" tIns="45720" rIns="91440" bIns="45720" rtlCol="0" anchor="b"/>
+          <a:lstStyle>
+            <a:lvl1pPr algn="r">
+              <a:defRPr sz="1200"/>
+            </a:lvl1pPr>
+          </a:lstStyle>
+          <a:p>
+            <a:fld id="{871B2431-D351-4C6E-A3CF-9DFAC0E3E050}" type="slidenum">
+              <a:rPr lang="cs-CZ" smtClean="0"/>
+              <a:t>‹N°›</a:t>
+            </a:fld>
+            <a:endParaRPr lang="cs-CZ"/>
+          </a:p>
+        </p:txBody>
+      </p:sp>
+    </p:spTree>
+    <p:extLst>
+      <p:ext uri="{BB962C8B-B14F-4D97-AF65-F5344CB8AC3E}">
+        <p14:creationId xmlns:p14="http://schemas.microsoft.com/office/powerpoint/2010/main" val="1798889115"/>
+      </p:ext>
+    </p:extLst>
+  </p:cSld>
+  <p:clrMap bg1="lt1" tx1="dk1" bg2="lt2" tx2="dk2" accent1="accent1" accent2="accent2" accent3="accent3" accent4="accent4" accent5="accent5" accent6="accent6" hlink="hlink" folHlink="folHlink"/>
+  <p:notesStyle>
+    <a:lvl1pPr marL="0" algn="l" defTabSz="914400" rtl="0" eaLnBrk="1" latinLnBrk="0" hangingPunct="1">
+      <a:defRPr sz="1200" kern="1200">
+        <a:solidFill>
+          <a:schemeClr val="tx1"/>
+        </a:solidFill>
+        <a:latin typeface="+mn-lt"/>
+        <a:ea typeface="+mn-ea"/>
+        <a:cs typeface="+mn-cs"/>
+      </a:defRPr>
+    </a:lvl1pPr>
+    <a:lvl2pPr marL="457200" algn="l" defTabSz="914400" rtl="0" eaLnBrk="1" latinLnBrk="0" hangingPunct="1">
+      <a:defRPr sz="1200" kern="1200">
+        <a:solidFill>
+          <a:schemeClr val="tx1"/>
+        </a:solidFill>
+        <a:latin typeface="+mn-lt"/>
+        <a:ea typeface="+mn-ea"/>
+        <a:cs typeface="+mn-cs"/>
+      </a:defRPr>
+    </a:lvl2pPr>
+    <a:lvl3pPr marL="914400" algn="l" defTabSz="914400" rtl="0" eaLnBrk="1" latinLnBrk="0" hangingPunct="1">
+      <a:defRPr sz="1200" kern="1200">
+        <a:solidFill>
+          <a:schemeClr val="tx1"/>
+        </a:solidFill>
+        <a:latin typeface="+mn-lt"/>
+        <a:ea typeface="+mn-ea"/>
+        <a:cs typeface="+mn-cs"/>
+      </a:defRPr>
+    </a:lvl3pPr>
+    <a:lvl4pPr marL="1371600" algn="l" defTabSz="914400" rtl="0" eaLnBrk="1" latinLnBrk="0" hangingPunct="1">
+      <a:defRPr sz="1200" kern="1200">
+        <a:solidFill>
+          <a:schemeClr val="tx1"/>
+        </a:solidFill>
+        <a:latin typeface="+mn-lt"/>
+        <a:ea typeface="+mn-ea"/>
+        <a:cs typeface="+mn-cs"/>
+      </a:defRPr>
+    </a:lvl4pPr>
+    <a:lvl5pPr marL="1828800" algn="l" defTabSz="914400" rtl="0" eaLnBrk="1" latinLnBrk="0" hangingPunct="1">
+      <a:defRPr sz="1200" kern="1200">
+        <a:solidFill>
+          <a:schemeClr val="tx1"/>
+        </a:solidFill>
+        <a:latin typeface="+mn-lt"/>
+        <a:ea typeface="+mn-ea"/>
+        <a:cs typeface="+mn-cs"/>
+      </a:defRPr>
+    </a:lvl5pPr>
+    <a:lvl6pPr marL="2286000" algn="l" defTabSz="914400" rtl="0" eaLnBrk="1" latinLnBrk="0" hangingPunct="1">
+      <a:defRPr sz="1200" kern="1200">
+        <a:solidFill>
+          <a:schemeClr val="tx1"/>
+        </a:solidFill>
+        <a:latin typeface="+mn-lt"/>
+        <a:ea typeface="+mn-ea"/>
+        <a:cs typeface="+mn-cs"/>
+      </a:defRPr>
+    </a:lvl6pPr>
+    <a:lvl7pPr marL="2743200" algn="l" defTabSz="914400" rtl="0" eaLnBrk="1" latinLnBrk="0" hangingPunct="1">
+      <a:defRPr sz="1200" kern="1200">
+        <a:solidFill>
+          <a:schemeClr val="tx1"/>
+        </a:solidFill>
+        <a:latin typeface="+mn-lt"/>
+        <a:ea typeface="+mn-ea"/>
+        <a:cs typeface="+mn-cs"/>
+      </a:defRPr>
+    </a:lvl7pPr>
+    <a:lvl8pPr marL="3200400" algn="l" defTabSz="914400" rtl="0" eaLnBrk="1" latinLnBrk="0" hangingPunct="1">
+      <a:defRPr sz="1200" kern="1200">
+        <a:solidFill>
+          <a:schemeClr val="tx1"/>
+        </a:solidFill>
+        <a:latin typeface="+mn-lt"/>
+        <a:ea typeface="+mn-ea"/>
+        <a:cs typeface="+mn-cs"/>
+      </a:defRPr>
+    </a:lvl8pPr>
+    <a:lvl9pPr marL="3657600" algn="l" defTabSz="914400" rtl="0" eaLnBrk="1" latinLnBrk="0" hangingPunct="1">
+      <a:defRPr sz="1200" kern="1200">
+        <a:solidFill>
+          <a:schemeClr val="tx1"/>
+        </a:solidFill>
+        <a:latin typeface="+mn-lt"/>
+        <a:ea typeface="+mn-ea"/>
+        <a:cs typeface="+mn-cs"/>
+      </a:defRPr>
+    </a:lvl9pPr>
+  </p:notesStyle>
+</p:notesMaster>
+</file>
+
+<file path=ppt/notesSlides/notesSlide1.xml><?xml version="1.0" encoding="utf-8"?>
+<p:notes xmlns:a="http://schemas.openxmlformats.org/drawingml/2006/main" xmlns:r="http://schemas.openxmlformats.org/officeDocument/2006/relationships" xmlns:p="http://schemas.openxmlformats.org/presentationml/2006/main">
+  <p:cSld>
+    <p:spTree>
+      <p:nvGrpSpPr>
+        <p:cNvPr id="1" name=""/>
+        <p:cNvGrpSpPr/>
+        <p:nvPr/>
+      </p:nvGrpSpPr>
+      <p:grpSpPr>
+        <a:xfrm>
+          <a:off x="0" y="0"/>
+          <a:ext cx="0" cy="0"/>
+          <a:chOff x="0" y="0"/>
+          <a:chExt cx="0" cy="0"/>
+        </a:xfrm>
+      </p:grpSpPr>
+      <p:sp>
+        <p:nvSpPr>
+          <p:cNvPr id="2" name="Header Placeholder 1"/>
+          <p:cNvSpPr>
+            <a:spLocks noGrp="1"/>
+          </p:cNvSpPr>
+          <p:nvPr>
+            <p:ph type="hdr" sz="quarter"/>
+          </p:nvPr>
+        </p:nvSpPr>
+        <p:spPr>
+          <a:xfrm>
+            <a:off x="0" y="0"/>
+            <a:ext cx="3962400" cy="342900"/>
+          </a:xfrm>
+          <a:prstGeom prst="rect">
+            <a:avLst/>
+          </a:prstGeom>
+        </p:spPr>
+        <p:txBody>
+          <a:bodyPr vert="horz" lIns="91440" tIns="45720" rIns="91440" bIns="45720" rtlCol="0"/>
+          <a:lstStyle>
+            <a:lvl1pPr algn="l">
+              <a:defRPr sz="1200"/>
+            </a:lvl1pPr>
+          </a:lstStyle>
+          <a:p>
+            <a:endParaRPr/>
+          </a:p>
+        </p:txBody>
+      </p:sp>
+      <p:sp>
+        <p:nvSpPr>
+          <p:cNvPr id="3" name="Date Placeholder 2"/>
+          <p:cNvSpPr>
+            <a:spLocks noGrp="1"/>
+          </p:cNvSpPr>
+          <p:nvPr>
+            <p:ph type="dt" idx="1"/>
+          </p:nvPr>
+        </p:nvSpPr>
+        <p:spPr>
+          <a:xfrm>
+            <a:off x="5180013" y="0"/>
+            <a:ext cx="3962400" cy="342900"/>
+          </a:xfrm>
+          <a:prstGeom prst="rect">
+            <a:avLst/>
+          </a:prstGeom>
+        </p:spPr>
+        <p:txBody>
+          <a:bodyPr vert="horz" lIns="91440" tIns="45720" rIns="91440" bIns="45720" rtlCol="0"/>
+          <a:lstStyle>
+            <a:lvl1pPr algn="r">
+              <a:defRPr sz="1200"/>
+            </a:lvl1pPr>
+          </a:lstStyle>
+          <a:p>
+            <a:r>
+              <a:rPr lang="cs-CZ"/>
+              <a:t>1.7.2013</a:t>
+            </a:r>
+          </a:p>
+        </p:txBody>
+      </p:sp>
+      <p:sp>
+        <p:nvSpPr>
+          <p:cNvPr id="4" name="Slide Image Placeholder 3"/>
+          <p:cNvSpPr>
+            <a:spLocks noGrp="1" noRot="1" noChangeAspect="1"/>
+          </p:cNvSpPr>
+          <p:nvPr>
+            <p:ph type="sldImg" idx="2"/>
+          </p:nvPr>
+        </p:nvSpPr>
+        <p:spPr>
+          <a:xfrm>
+            <a:off x="2290763" y="512763"/>
+            <a:ext cx="4562475" cy="2566987"/>
+          </a:xfrm>
+          <a:prstGeom prst="rect">
+            <a:avLst/>
+          </a:prstGeom>
+          <a:noFill/>
+          <a:ln w="12700">
+            <a:solidFill>
+              <a:prstClr val="black"/>
+            </a:solidFill>
+          </a:ln>
+        </p:spPr>
+        <p:txBody>
+          <a:bodyPr vert="horz" lIns="91440" tIns="45720" rIns="91440" bIns="45720" rtlCol="0" anchor="ctr"/>
+          <a:lstStyle/>
+          <a:p>
+            <a:endParaRPr/>
+          </a:p>
+        </p:txBody>
+      </p:sp>
+      <p:sp>
+        <p:nvSpPr>
+          <p:cNvPr id="5" name="Notes Placeholder 4"/>
+          <p:cNvSpPr>
+            <a:spLocks noGrp="1"/>
+          </p:cNvSpPr>
+          <p:nvPr>
+            <p:ph type="body" sz="quarter" idx="3"/>
+          </p:nvPr>
+        </p:nvSpPr>
+        <p:spPr>
+          <a:xfrm>
+            <a:off x="914400" y="3251200"/>
+            <a:ext cx="7315200" cy="3081338"/>
+          </a:xfrm>
+          <a:prstGeom prst="rect">
+            <a:avLst/>
+          </a:prstGeom>
+        </p:spPr>
+        <p:txBody>
+          <a:bodyPr vert="horz" lIns="91440" tIns="45720" rIns="91440" bIns="45720" rtlCol="0"/>
+          <a:lstStyle/>
+          <a:p>
+            <a:r>
+              <a:rPr lang="en-US"/>
+              <a:t>‹#›</a:t>
+            </a:r>
+          </a:p>
+        </p:txBody>
+      </p:sp>
+      <p:sp>
+        <p:nvSpPr>
+          <p:cNvPr id="6" name="Footer Placeholder 5"/>
+          <p:cNvSpPr>
+            <a:spLocks noGrp="1"/>
+          </p:cNvSpPr>
+          <p:nvPr>
+            <p:ph type="ftr" sz="quarter" idx="4"/>
+          </p:nvPr>
+        </p:nvSpPr>
+        <p:spPr>
+          <a:xfrm>
+            <a:off x="0" y="6502400"/>
+            <a:ext cx="3962400" cy="341313"/>
+          </a:xfrm>
+          <a:prstGeom prst="rect">
+            <a:avLst/>
+          </a:prstGeom>
+        </p:spPr>
+        <p:txBody>
+          <a:bodyPr vert="horz" lIns="91440" tIns="45720" rIns="91440" bIns="45720" rtlCol="0" anchor="b"/>
+          <a:lstStyle>
+            <a:lvl1pPr algn="l">
+              <a:defRPr sz="1200"/>
+            </a:lvl1pPr>
+          </a:lstStyle>
+          <a:p>
+            <a:endParaRPr/>
+          </a:p>
+        </p:txBody>
+      </p:sp>
+      <p:sp>
+        <p:nvSpPr>
+          <p:cNvPr id="7" name="Slide Number Placeholder 6"/>
+          <p:cNvSpPr>
+            <a:spLocks noGrp="1"/>
+          </p:cNvSpPr>
+          <p:nvPr>
+            <p:ph type="sldNum" sz="quarter" idx="5"/>
+          </p:nvPr>
+        </p:nvSpPr>
+        <p:spPr>
+          <a:xfrm>
+            <a:off x="5180013" y="6502400"/>
+            <a:ext cx="3962400" cy="341313"/>
+          </a:xfrm>
+          <a:prstGeom prst="rect">
+            <a:avLst/>
+          </a:prstGeom>
+        </p:spPr>
+        <p:txBody>
+          <a:bodyPr vert="horz" lIns="91440" tIns="45720" rIns="91440" bIns="45720" rtlCol="0" anchor="b"/>
+          <a:lstStyle>
+            <a:lvl1pPr algn="r">
+              <a:defRPr sz="1200"/>
+            </a:lvl1pPr>
+          </a:lstStyle>
+          <a:p>
+            <a:r>
+              <a:rPr lang="cs-CZ"/>
+              <a:t>‹#›</a:t>
+            </a:r>
+          </a:p>
+        </p:txBody>
+      </p:sp>
+    </p:spTree>
+  </p:cSld>
+  <p:clrMapOvr>
+    <a:masterClrMapping/>
+  </p:clrMapOvr>
+</p:notes>
 </file>
 
 <file path=ppt/slideLayouts/slideLayout1.xml><?xml version="1.0" encoding="utf-8"?>
@@ -3074,11 +3657,11 @@
           <p:nvPr/>
         </p:nvGrpSpPr>
         <p:grpSpPr>
-          <a:xfrm>
-            <a:off x="0" y="0"/>
-            <a:ext cx="5213490" cy="10287000"/>
+          <a:xfrm rot="5400000">
+            <a:off x="8846963" y="845963"/>
+            <a:ext cx="594065" cy="18288000"/>
             <a:chOff x="0" y="0"/>
-            <a:chExt cx="1373100" cy="2709333"/>
+            <a:chExt cx="792086" cy="24384000"/>
           </a:xfrm>
         </p:grpSpPr>
         <p:sp>
@@ -3090,7 +3673,7 @@
           <p:spPr>
             <a:xfrm>
               <a:off x="0" y="0"/>
-              <a:ext cx="1373100" cy="2709333"/>
+              <a:ext cx="792099" cy="24384000"/>
             </a:xfrm>
             <a:custGeom>
               <a:avLst/>
@@ -3099,18 +3682,18 @@
               <a:cxnLst/>
               <a:rect l="l" t="t" r="r" b="b"/>
               <a:pathLst>
-                <a:path w="1373100" h="2709333">
+                <a:path w="792099" h="24384000">
                   <a:moveTo>
                     <a:pt x="0" y="0"/>
                   </a:moveTo>
                   <a:lnTo>
-                    <a:pt x="1373100" y="0"/>
+                    <a:pt x="792099" y="0"/>
                   </a:lnTo>
                   <a:lnTo>
-                    <a:pt x="1373100" y="2709333"/>
+                    <a:pt x="792099" y="24384000"/>
                   </a:lnTo>
                   <a:lnTo>
-                    <a:pt x="0" y="2709333"/>
+                    <a:pt x="0" y="24384000"/>
                   </a:lnTo>
                   <a:close/>
                 </a:path>
@@ -3120,86 +3703,77 @@
               <a:srgbClr val="174564"/>
             </a:solidFill>
           </p:spPr>
+          <p:txBody>
+            <a:bodyPr/>
+            <a:p/>
+          </p:txBody>
         </p:sp>
+      </p:grpSp>
+      <p:grpSp>
+        <p:nvGrpSpPr>
+          <p:cNvPr id="4" name="Group 4"/>
+          <p:cNvGrpSpPr/>
+          <p:nvPr/>
+        </p:nvGrpSpPr>
+        <p:grpSpPr>
+          <a:xfrm>
+            <a:off x="269662" y="9835115"/>
+            <a:ext cx="1559433" cy="309705"/>
+            <a:chOff x="0" y="0"/>
+            <a:chExt cx="2079244" cy="412940"/>
+          </a:xfrm>
+        </p:grpSpPr>
         <p:sp>
           <p:nvSpPr>
-            <p:cNvPr id="4" name="TextBox 4"/>
-            <p:cNvSpPr txBox="1"/>
+            <p:cNvPr id="5" name="Freeform 5"/>
+            <p:cNvSpPr/>
             <p:nvPr/>
           </p:nvSpPr>
           <p:spPr>
             <a:xfrm>
-              <a:off x="0" y="-38100"/>
-              <a:ext cx="1373100" cy="2747433"/>
+              <a:off x="0" y="0"/>
+              <a:ext cx="2079244" cy="412877"/>
             </a:xfrm>
-            <a:prstGeom prst="rect">
+            <a:custGeom>
               <a:avLst/>
-            </a:prstGeom>
+              <a:gdLst/>
+              <a:ahLst/>
+              <a:cxnLst/>
+              <a:rect l="l" t="t" r="r" b="b"/>
+              <a:pathLst>
+                <a:path w="2079244" h="412877">
+                  <a:moveTo>
+                    <a:pt x="0" y="0"/>
+                  </a:moveTo>
+                  <a:lnTo>
+                    <a:pt x="2079244" y="0"/>
+                  </a:lnTo>
+                  <a:lnTo>
+                    <a:pt x="2079244" y="412877"/>
+                  </a:lnTo>
+                  <a:lnTo>
+                    <a:pt x="0" y="412877"/>
+                  </a:lnTo>
+                  <a:lnTo>
+                    <a:pt x="0" y="0"/>
+                  </a:lnTo>
+                  <a:close/>
+                </a:path>
+              </a:pathLst>
+            </a:custGeom>
+            <a:blipFill>
+              <a:blip r:embed="rId3"/>
+              <a:stretch>
+                <a:fillRect b="-719"/>
+              </a:stretch>
+            </a:blipFill>
           </p:spPr>
           <p:txBody>
-            <a:bodyPr lIns="50800" tIns="50800" rIns="50800" bIns="50800" rtlCol="0" anchor="ctr"/>
-            <a:lstStyle/>
-            <a:p>
-              <a:pPr algn="ctr">
-                <a:lnSpc>
-                  <a:spcPts val="3047"/>
-                </a:lnSpc>
-              </a:pPr>
-              <a:endParaRPr/>
-            </a:p>
+            <a:bodyPr/>
+            <a:p/>
           </p:txBody>
         </p:sp>
       </p:grpSp>
-      <p:sp>
-        <p:nvSpPr>
-          <p:cNvPr id="5" name="Freeform 5"/>
-          <p:cNvSpPr/>
-          <p:nvPr/>
-        </p:nvSpPr>
-        <p:spPr>
-          <a:xfrm>
-            <a:off x="696860" y="398160"/>
-            <a:ext cx="3175352" cy="630540"/>
-          </a:xfrm>
-          <a:custGeom>
-            <a:avLst/>
-            <a:gdLst/>
-            <a:ahLst/>
-            <a:cxnLst/>
-            <a:rect l="l" t="t" r="r" b="b"/>
-            <a:pathLst>
-              <a:path w="3175352" h="630540">
-                <a:moveTo>
-                  <a:pt x="0" y="0"/>
-                </a:moveTo>
-                <a:lnTo>
-                  <a:pt x="3175352" y="0"/>
-                </a:lnTo>
-                <a:lnTo>
-                  <a:pt x="3175352" y="630540"/>
-                </a:lnTo>
-                <a:lnTo>
-                  <a:pt x="0" y="630540"/>
-                </a:lnTo>
-                <a:lnTo>
-                  <a:pt x="0" y="0"/>
-                </a:lnTo>
-                <a:close/>
-              </a:path>
-            </a:pathLst>
-          </a:custGeom>
-          <a:blipFill>
-            <a:blip r:embed="rId2"/>
-            <a:stretch>
-              <a:fillRect t="-350" b="-446"/>
-            </a:stretch>
-          </a:blipFill>
-        </p:spPr>
-        <p:txBody>
-          <a:bodyPr/>
-          <a:p/>
-        </p:txBody>
-      </p:sp>
       <p:grpSp>
         <p:nvGrpSpPr>
           <p:cNvPr id="6" name="Group 6"/>
@@ -3208,10 +3782,10 @@
         </p:nvGrpSpPr>
         <p:grpSpPr>
           <a:xfrm>
-            <a:off x="1085817" y="1314776"/>
-            <a:ext cx="3041855" cy="2754260"/>
+            <a:off x="1217085" y="1493387"/>
+            <a:ext cx="833123" cy="106680"/>
             <a:chOff x="0" y="0"/>
-            <a:chExt cx="801147" cy="725402"/>
+            <a:chExt cx="1110831" cy="142240"/>
           </a:xfrm>
         </p:grpSpPr>
         <p:sp>
@@ -3223,7 +3797,7 @@
           <p:spPr>
             <a:xfrm>
               <a:off x="0" y="0"/>
-              <a:ext cx="801147" cy="725402"/>
+              <a:ext cx="1110869" cy="142240"/>
             </a:xfrm>
             <a:custGeom>
               <a:avLst/>
@@ -3232,67 +3806,1377 @@
               <a:cxnLst/>
               <a:rect l="l" t="t" r="r" b="b"/>
               <a:pathLst>
-                <a:path w="801147" h="725402">
+                <a:path w="1110869" h="142240">
                   <a:moveTo>
                     <a:pt x="0" y="0"/>
                   </a:moveTo>
                   <a:lnTo>
-                    <a:pt x="801147" y="0"/>
+                    <a:pt x="1110869" y="0"/>
                   </a:lnTo>
                   <a:lnTo>
-                    <a:pt x="801147" y="725402"/>
+                    <a:pt x="1110869" y="142240"/>
                   </a:lnTo>
                   <a:lnTo>
-                    <a:pt x="0" y="725402"/>
+                    <a:pt x="0" y="142240"/>
                   </a:lnTo>
                   <a:close/>
                 </a:path>
               </a:pathLst>
             </a:custGeom>
             <a:solidFill>
-              <a:srgbClr val="FFFFFF"/>
+              <a:srgbClr val="174564"/>
             </a:solidFill>
           </p:spPr>
+          <p:txBody>
+            <a:bodyPr/>
+            <a:p/>
+          </p:txBody>
+        </p:sp>
+      </p:grpSp>
+      <p:sp>
+        <p:nvSpPr>
+          <p:cNvPr id="8" name="Freeform 8"/>
+          <p:cNvSpPr/>
+          <p:nvPr/>
+        </p:nvSpPr>
+        <p:spPr>
+          <a:xfrm>
+            <a:off x="-4877" y="-9525"/>
+            <a:ext cx="4049420" cy="9740132"/>
+          </a:xfrm>
+          <a:custGeom>
+            <a:avLst/>
+            <a:gdLst/>
+            <a:ahLst/>
+            <a:cxnLst/>
+            <a:rect l="l" t="t" r="r" b="b"/>
+            <a:pathLst>
+              <a:path w="4049420" h="9740132">
+                <a:moveTo>
+                  <a:pt x="0" y="0"/>
+                </a:moveTo>
+                <a:lnTo>
+                  <a:pt x="4049421" y="0"/>
+                </a:lnTo>
+                <a:lnTo>
+                  <a:pt x="4049421" y="9740132"/>
+                </a:lnTo>
+                <a:lnTo>
+                  <a:pt x="0" y="9740132"/>
+                </a:lnTo>
+                <a:lnTo>
+                  <a:pt x="0" y="0"/>
+                </a:lnTo>
+                <a:close/>
+              </a:path>
+            </a:pathLst>
+          </a:custGeom>
+          <a:blipFill>
+            <a:blip r:embed="rId4">
+              <a:extLst>
+                <a:ext uri="{96DAC541-7B7A-43D3-8B79-37D633B846F1}">
+                  <asvg:svgBlip xmlns:asvg="http://schemas.microsoft.com/office/drawing/2016/SVG/main" r:embed="rId5"/>
+                </a:ext>
+              </a:extLst>
+            </a:blip>
+            <a:stretch>
+              <a:fillRect/>
+            </a:stretch>
+          </a:blipFill>
+        </p:spPr>
+        <p:txBody>
+          <a:bodyPr/>
+          <a:p/>
+        </p:txBody>
+      </p:sp>
+      <p:sp>
+        <p:nvSpPr>
+          <p:cNvPr id="9" name="Freeform 9"/>
+          <p:cNvSpPr/>
+          <p:nvPr/>
+        </p:nvSpPr>
+        <p:spPr>
+          <a:xfrm>
+            <a:off x="4179056" y="144066"/>
+            <a:ext cx="12683033" cy="663702"/>
+          </a:xfrm>
+          <a:custGeom>
+            <a:avLst/>
+            <a:gdLst/>
+            <a:ahLst/>
+            <a:cxnLst/>
+            <a:rect l="l" t="t" r="r" b="b"/>
+            <a:pathLst>
+              <a:path w="12683033" h="663702">
+                <a:moveTo>
+                  <a:pt x="0" y="0"/>
+                </a:moveTo>
+                <a:lnTo>
+                  <a:pt x="12683032" y="0"/>
+                </a:lnTo>
+                <a:lnTo>
+                  <a:pt x="12683032" y="663702"/>
+                </a:lnTo>
+                <a:lnTo>
+                  <a:pt x="0" y="663702"/>
+                </a:lnTo>
+                <a:lnTo>
+                  <a:pt x="0" y="0"/>
+                </a:lnTo>
+                <a:close/>
+              </a:path>
+            </a:pathLst>
+          </a:custGeom>
+          <a:blipFill>
+            <a:blip r:embed="rId6">
+              <a:extLst>
+                <a:ext uri="{96DAC541-7B7A-43D3-8B79-37D633B846F1}">
+                  <asvg:svgBlip xmlns:asvg="http://schemas.microsoft.com/office/drawing/2016/SVG/main" r:embed="rId7"/>
+                </a:ext>
+              </a:extLst>
+            </a:blip>
+            <a:stretch>
+              <a:fillRect/>
+            </a:stretch>
+          </a:blipFill>
+        </p:spPr>
+        <p:txBody>
+          <a:bodyPr/>
+          <a:p/>
+        </p:txBody>
+      </p:sp>
+      <p:grpSp>
+        <p:nvGrpSpPr>
+          <p:cNvPr id="10" name="Group 10"/>
+          <p:cNvGrpSpPr/>
+          <p:nvPr/>
+        </p:nvGrpSpPr>
+        <p:grpSpPr>
+          <a:xfrm>
+            <a:off x="734044" y="527399"/>
+            <a:ext cx="2384412" cy="408851"/>
+            <a:chOff x="0" y="0"/>
+            <a:chExt cx="3179216" cy="545135"/>
+          </a:xfrm>
+        </p:grpSpPr>
+        <p:sp>
+          <p:nvSpPr>
+            <p:cNvPr id="11" name="Freeform 11"/>
+            <p:cNvSpPr/>
+            <p:nvPr/>
+          </p:nvSpPr>
+          <p:spPr>
+            <a:xfrm>
+              <a:off x="0" y="0"/>
+              <a:ext cx="3179191" cy="545084"/>
+            </a:xfrm>
+            <a:custGeom>
+              <a:avLst/>
+              <a:gdLst/>
+              <a:ahLst/>
+              <a:cxnLst/>
+              <a:rect l="l" t="t" r="r" b="b"/>
+              <a:pathLst>
+                <a:path w="3179191" h="545084">
+                  <a:moveTo>
+                    <a:pt x="0" y="0"/>
+                  </a:moveTo>
+                  <a:lnTo>
+                    <a:pt x="3179191" y="0"/>
+                  </a:lnTo>
+                  <a:lnTo>
+                    <a:pt x="3179191" y="545084"/>
+                  </a:lnTo>
+                  <a:lnTo>
+                    <a:pt x="0" y="545084"/>
+                  </a:lnTo>
+                  <a:lnTo>
+                    <a:pt x="0" y="0"/>
+                  </a:lnTo>
+                  <a:close/>
+                </a:path>
+              </a:pathLst>
+            </a:custGeom>
+            <a:blipFill>
+              <a:blip r:embed="rId8"/>
+              <a:stretch>
+                <a:fillRect b="-9"/>
+              </a:stretch>
+            </a:blipFill>
+          </p:spPr>
+          <p:txBody>
+            <a:bodyPr/>
+            <a:p/>
+          </p:txBody>
+        </p:sp>
+      </p:grpSp>
+      <p:grpSp>
+        <p:nvGrpSpPr>
+          <p:cNvPr id="12" name="Group 12"/>
+          <p:cNvGrpSpPr/>
+          <p:nvPr/>
+        </p:nvGrpSpPr>
+        <p:grpSpPr>
+          <a:xfrm>
+            <a:off x="545125" y="2549138"/>
+            <a:ext cx="1390650" cy="73914"/>
+            <a:chOff x="0" y="0"/>
+            <a:chExt cx="1854200" cy="98552"/>
+          </a:xfrm>
+        </p:grpSpPr>
+        <p:sp>
+          <p:nvSpPr>
+            <p:cNvPr id="13" name="Freeform 13"/>
+            <p:cNvSpPr/>
+            <p:nvPr/>
+          </p:nvSpPr>
+          <p:spPr>
+            <a:xfrm>
+              <a:off x="0" y="0"/>
+              <a:ext cx="1854200" cy="98552"/>
+            </a:xfrm>
+            <a:custGeom>
+              <a:avLst/>
+              <a:gdLst/>
+              <a:ahLst/>
+              <a:cxnLst/>
+              <a:rect l="l" t="t" r="r" b="b"/>
+              <a:pathLst>
+                <a:path w="1854200" h="98552">
+                  <a:moveTo>
+                    <a:pt x="0" y="0"/>
+                  </a:moveTo>
+                  <a:lnTo>
+                    <a:pt x="1854200" y="0"/>
+                  </a:lnTo>
+                  <a:lnTo>
+                    <a:pt x="1854200" y="98552"/>
+                  </a:lnTo>
+                  <a:lnTo>
+                    <a:pt x="0" y="98552"/>
+                  </a:lnTo>
+                  <a:close/>
+                </a:path>
+              </a:pathLst>
+            </a:custGeom>
+            <a:solidFill>
+              <a:srgbClr val="C8215A"/>
+            </a:solidFill>
+            <a:ln w="19050" cap="sq">
+              <a:solidFill>
+                <a:srgbClr val="C8215A"/>
+              </a:solidFill>
+              <a:prstDash val="solid"/>
+              <a:miter/>
+            </a:ln>
+          </p:spPr>
+          <p:txBody>
+            <a:bodyPr/>
+            <a:p/>
+          </p:txBody>
+        </p:sp>
+      </p:grpSp>
+      <p:grpSp>
+        <p:nvGrpSpPr>
+          <p:cNvPr id="14" name="Group 14"/>
+          <p:cNvGrpSpPr/>
+          <p:nvPr/>
+        </p:nvGrpSpPr>
+        <p:grpSpPr>
+          <a:xfrm>
+            <a:off x="5090103" y="6292139"/>
+            <a:ext cx="2625366" cy="446856"/>
+            <a:chOff x="0" y="0"/>
+            <a:chExt cx="3500488" cy="595808"/>
+          </a:xfrm>
+        </p:grpSpPr>
+        <p:sp>
+          <p:nvSpPr>
+            <p:cNvPr id="15" name="Freeform 15"/>
+            <p:cNvSpPr/>
+            <p:nvPr/>
+          </p:nvSpPr>
+          <p:spPr>
+            <a:xfrm>
+              <a:off x="0" y="0"/>
+              <a:ext cx="3500501" cy="595757"/>
+            </a:xfrm>
+            <a:custGeom>
+              <a:avLst/>
+              <a:gdLst/>
+              <a:ahLst/>
+              <a:cxnLst/>
+              <a:rect l="l" t="t" r="r" b="b"/>
+              <a:pathLst>
+                <a:path w="3500501" h="595757">
+                  <a:moveTo>
+                    <a:pt x="0" y="0"/>
+                  </a:moveTo>
+                  <a:lnTo>
+                    <a:pt x="3500501" y="0"/>
+                  </a:lnTo>
+                  <a:lnTo>
+                    <a:pt x="3500501" y="595757"/>
+                  </a:lnTo>
+                  <a:lnTo>
+                    <a:pt x="0" y="595757"/>
+                  </a:lnTo>
+                  <a:close/>
+                </a:path>
+              </a:pathLst>
+            </a:custGeom>
+            <a:solidFill>
+              <a:srgbClr val="1B3A5C"/>
+            </a:solidFill>
+            <a:ln w="19050" cap="sq">
+              <a:solidFill>
+                <a:srgbClr val="1B3A5C"/>
+              </a:solidFill>
+              <a:prstDash val="solid"/>
+              <a:miter/>
+            </a:ln>
+          </p:spPr>
+          <p:txBody>
+            <a:bodyPr/>
+            <a:p/>
+          </p:txBody>
         </p:sp>
         <p:sp>
           <p:nvSpPr>
-            <p:cNvPr id="8" name="TextBox 8"/>
+            <p:cNvPr id="16" name="TextBox 16"/>
             <p:cNvSpPr txBox="1"/>
             <p:nvPr/>
           </p:nvSpPr>
           <p:spPr>
             <a:xfrm>
-              <a:off x="0" y="-104775"/>
-              <a:ext cx="801147" cy="830177"/>
+              <a:off x="0" y="-47625"/>
+              <a:ext cx="3500488" cy="643433"/>
             </a:xfrm>
             <a:prstGeom prst="rect">
               <a:avLst/>
             </a:prstGeom>
           </p:spPr>
           <p:txBody>
-            <a:bodyPr lIns="50800" tIns="50800" rIns="50800" bIns="50800" rtlCol="0" anchor="ctr"/>
+            <a:bodyPr lIns="50800" tIns="50800" rIns="50800" bIns="50800" rtlCol="0" anchor="t"/>
             <a:lstStyle/>
             <a:p>
               <a:pPr algn="ctr">
                 <a:lnSpc>
-                  <a:spcPts val="3627"/>
+                  <a:spcPts val="2520"/>
                 </a:lnSpc>
               </a:pPr>
-              <a:endParaRPr/>
+              <a:r>
+                <a:rPr lang="en-US" sz="2100" b="1">
+                  <a:solidFill>
+                    <a:srgbClr val="FFFFFF"/>
+                  </a:solidFill>
+                  <a:latin typeface="Calibri (MS) Bold"/>
+                  <a:ea typeface="Calibri (MS) Bold"/>
+                  <a:cs typeface="Calibri (MS) Bold"/>
+                  <a:sym typeface="Calibri (MS) Bold"/>
+                </a:rPr>
+                <a:t>TECHNICAL SKILLS</a:t>
+              </a:r>
             </a:p>
           </p:txBody>
         </p:sp>
       </p:grpSp>
-      <p:sp>
-        <p:nvSpPr>
-          <p:cNvPr id="9" name="TextBox 9"/>
+      <p:grpSp>
+        <p:nvGrpSpPr>
+          <p:cNvPr id="17" name="Group 17"/>
+          <p:cNvGrpSpPr/>
+          <p:nvPr/>
+        </p:nvGrpSpPr>
+        <p:grpSpPr>
+          <a:xfrm>
+            <a:off x="5090103" y="6706229"/>
+            <a:ext cx="2625366" cy="51921"/>
+            <a:chOff x="0" y="0"/>
+            <a:chExt cx="3500488" cy="69228"/>
+          </a:xfrm>
+        </p:grpSpPr>
+        <p:sp>
+          <p:nvSpPr>
+            <p:cNvPr id="18" name="Freeform 18"/>
+            <p:cNvSpPr/>
+            <p:nvPr/>
+          </p:nvSpPr>
+          <p:spPr>
+            <a:xfrm>
+              <a:off x="0" y="0"/>
+              <a:ext cx="3500501" cy="69215"/>
+            </a:xfrm>
+            <a:custGeom>
+              <a:avLst/>
+              <a:gdLst/>
+              <a:ahLst/>
+              <a:cxnLst/>
+              <a:rect l="l" t="t" r="r" b="b"/>
+              <a:pathLst>
+                <a:path w="3500501" h="69215">
+                  <a:moveTo>
+                    <a:pt x="0" y="0"/>
+                  </a:moveTo>
+                  <a:lnTo>
+                    <a:pt x="3500501" y="0"/>
+                  </a:lnTo>
+                  <a:lnTo>
+                    <a:pt x="3500501" y="69215"/>
+                  </a:lnTo>
+                  <a:lnTo>
+                    <a:pt x="0" y="69215"/>
+                  </a:lnTo>
+                  <a:close/>
+                </a:path>
+              </a:pathLst>
+            </a:custGeom>
+            <a:solidFill>
+              <a:srgbClr val="C8215A"/>
+            </a:solidFill>
+            <a:ln w="19050" cap="sq">
+              <a:solidFill>
+                <a:srgbClr val="C8215A"/>
+              </a:solidFill>
+              <a:prstDash val="solid"/>
+              <a:miter/>
+            </a:ln>
+          </p:spPr>
+          <p:txBody>
+            <a:bodyPr/>
+            <a:p/>
+          </p:txBody>
+        </p:sp>
+      </p:grpSp>
+      <p:grpSp>
+        <p:nvGrpSpPr>
+          <p:cNvPr id="19" name="Group 19"/>
+          <p:cNvGrpSpPr/>
+          <p:nvPr/>
+        </p:nvGrpSpPr>
+        <p:grpSpPr>
+          <a:xfrm>
+            <a:off x="9915144" y="6292139"/>
+            <a:ext cx="2625385" cy="446722"/>
+            <a:chOff x="0" y="0"/>
+            <a:chExt cx="3500514" cy="595630"/>
+          </a:xfrm>
+        </p:grpSpPr>
+        <p:sp>
+          <p:nvSpPr>
+            <p:cNvPr id="20" name="Freeform 20"/>
+            <p:cNvSpPr/>
+            <p:nvPr/>
+          </p:nvSpPr>
+          <p:spPr>
+            <a:xfrm>
+              <a:off x="0" y="0"/>
+              <a:ext cx="3500501" cy="595630"/>
+            </a:xfrm>
+            <a:custGeom>
+              <a:avLst/>
+              <a:gdLst/>
+              <a:ahLst/>
+              <a:cxnLst/>
+              <a:rect l="l" t="t" r="r" b="b"/>
+              <a:pathLst>
+                <a:path w="3500501" h="595630">
+                  <a:moveTo>
+                    <a:pt x="0" y="0"/>
+                  </a:moveTo>
+                  <a:lnTo>
+                    <a:pt x="3500501" y="0"/>
+                  </a:lnTo>
+                  <a:lnTo>
+                    <a:pt x="3500501" y="595630"/>
+                  </a:lnTo>
+                  <a:lnTo>
+                    <a:pt x="0" y="595630"/>
+                  </a:lnTo>
+                  <a:close/>
+                </a:path>
+              </a:pathLst>
+            </a:custGeom>
+            <a:solidFill>
+              <a:srgbClr val="1B3A5C"/>
+            </a:solidFill>
+            <a:ln w="19050" cap="sq">
+              <a:solidFill>
+                <a:srgbClr val="1B3A5C"/>
+              </a:solidFill>
+              <a:prstDash val="solid"/>
+              <a:miter/>
+            </a:ln>
+          </p:spPr>
+          <p:txBody>
+            <a:bodyPr/>
+            <a:p/>
+          </p:txBody>
+        </p:sp>
+        <p:sp>
+          <p:nvSpPr>
+            <p:cNvPr id="21" name="TextBox 21"/>
+            <p:cNvSpPr txBox="1"/>
+            <p:nvPr/>
+          </p:nvSpPr>
+          <p:spPr>
+            <a:xfrm>
+              <a:off x="0" y="-47625"/>
+              <a:ext cx="3500514" cy="643255"/>
+            </a:xfrm>
+            <a:prstGeom prst="rect">
+              <a:avLst/>
+            </a:prstGeom>
+          </p:spPr>
+          <p:txBody>
+            <a:bodyPr lIns="50800" tIns="50800" rIns="50800" bIns="50800" rtlCol="0" anchor="t"/>
+            <a:lstStyle/>
+            <a:p>
+              <a:pPr algn="ctr">
+                <a:lnSpc>
+                  <a:spcPts val="2520"/>
+                </a:lnSpc>
+              </a:pPr>
+              <a:r>
+                <a:rPr lang="en-US" sz="2100" b="1">
+                  <a:solidFill>
+                    <a:srgbClr val="FFFFFF"/>
+                  </a:solidFill>
+                  <a:latin typeface="Calibri (MS) Bold"/>
+                  <a:ea typeface="Calibri (MS) Bold"/>
+                  <a:cs typeface="Calibri (MS) Bold"/>
+                  <a:sym typeface="Calibri (MS) Bold"/>
+                </a:rPr>
+                <a:t>SOFT SKILLS</a:t>
+              </a:r>
+            </a:p>
+          </p:txBody>
+        </p:sp>
+      </p:grpSp>
+      <p:grpSp>
+        <p:nvGrpSpPr>
+          <p:cNvPr id="22" name="Group 22"/>
+          <p:cNvGrpSpPr/>
+          <p:nvPr/>
+        </p:nvGrpSpPr>
+        <p:grpSpPr>
+          <a:xfrm>
+            <a:off x="9915144" y="6706229"/>
+            <a:ext cx="2625385" cy="51892"/>
+            <a:chOff x="0" y="0"/>
+            <a:chExt cx="3500514" cy="69190"/>
+          </a:xfrm>
+        </p:grpSpPr>
+        <p:sp>
+          <p:nvSpPr>
+            <p:cNvPr id="23" name="Freeform 23"/>
+            <p:cNvSpPr/>
+            <p:nvPr/>
+          </p:nvSpPr>
+          <p:spPr>
+            <a:xfrm>
+              <a:off x="0" y="0"/>
+              <a:ext cx="3500501" cy="69215"/>
+            </a:xfrm>
+            <a:custGeom>
+              <a:avLst/>
+              <a:gdLst/>
+              <a:ahLst/>
+              <a:cxnLst/>
+              <a:rect l="l" t="t" r="r" b="b"/>
+              <a:pathLst>
+                <a:path w="3500501" h="69215">
+                  <a:moveTo>
+                    <a:pt x="0" y="0"/>
+                  </a:moveTo>
+                  <a:lnTo>
+                    <a:pt x="3500501" y="0"/>
+                  </a:lnTo>
+                  <a:lnTo>
+                    <a:pt x="3500501" y="69215"/>
+                  </a:lnTo>
+                  <a:lnTo>
+                    <a:pt x="0" y="69215"/>
+                  </a:lnTo>
+                  <a:close/>
+                </a:path>
+              </a:pathLst>
+            </a:custGeom>
+            <a:solidFill>
+              <a:srgbClr val="C8215A"/>
+            </a:solidFill>
+            <a:ln w="19050" cap="sq">
+              <a:solidFill>
+                <a:srgbClr val="C8215A"/>
+              </a:solidFill>
+              <a:prstDash val="solid"/>
+              <a:miter/>
+            </a:ln>
+          </p:spPr>
+          <p:txBody>
+            <a:bodyPr/>
+            <a:p/>
+          </p:txBody>
+        </p:sp>
+      </p:grpSp>
+      <p:grpSp>
+        <p:nvGrpSpPr>
+          <p:cNvPr id="24" name="Group 24"/>
+          <p:cNvGrpSpPr/>
+          <p:nvPr/>
+        </p:nvGrpSpPr>
+        <p:grpSpPr>
+          <a:xfrm>
+            <a:off x="4280021" y="1342234"/>
+            <a:ext cx="14032354" cy="4878000"/>
+            <a:chOff x="0" y="0"/>
+            <a:chExt cx="18709805" cy="6504000"/>
+          </a:xfrm>
+        </p:grpSpPr>
+        <p:sp>
+          <p:nvSpPr>
+            <p:cNvPr id="25" name="Freeform 25"/>
+            <p:cNvSpPr/>
+            <p:nvPr/>
+          </p:nvSpPr>
+          <p:spPr>
+            <a:xfrm>
+              <a:off x="0" y="0"/>
+              <a:ext cx="18709801" cy="6504000"/>
+            </a:xfrm>
+            <a:custGeom>
+              <a:avLst/>
+              <a:gdLst/>
+              <a:ahLst/>
+              <a:cxnLst/>
+              <a:rect l="l" t="t" r="r" b="b"/>
+              <a:pathLst>
+                <a:path w="18709801" h="6504000">
+                  <a:moveTo>
+                    <a:pt x="0" y="0"/>
+                  </a:moveTo>
+                  <a:lnTo>
+                    <a:pt x="18709801" y="0"/>
+                  </a:lnTo>
+                  <a:lnTo>
+                    <a:pt x="18709801" y="6504000"/>
+                  </a:lnTo>
+                  <a:lnTo>
+                    <a:pt x="0" y="6504000"/>
+                  </a:lnTo>
+                  <a:close/>
+                </a:path>
+              </a:pathLst>
+            </a:custGeom>
+            <a:blipFill>
+              <a:blip r:embed="rId9">
+                <a:alphaModFix amt="0"/>
+              </a:blip>
+              <a:stretch>
+                <a:fillRect t="-6051" b="-6051"/>
+              </a:stretch>
+            </a:blipFill>
+          </p:spPr>
+          <p:txBody>
+            <a:bodyPr/>
+            <a:p/>
+          </p:txBody>
+        </p:sp>
+        <p:sp>
+          <p:nvSpPr>
+            <p:cNvPr id="26" name="TextBox 26"/>
+            <p:cNvSpPr txBox="1"/>
+            <p:nvPr/>
+          </p:nvSpPr>
+          <p:spPr>
+            <a:xfrm>
+              <a:off x="0" y="-47625"/>
+              <a:ext cx="18709805" cy="6551625"/>
+            </a:xfrm>
+            <a:prstGeom prst="rect">
+              <a:avLst/>
+            </a:prstGeom>
+          </p:spPr>
+          <p:txBody>
+            <a:bodyPr lIns="0" tIns="0" rIns="0" bIns="0" rtlCol="0" anchor="ctr" wrap="square">
+              <a:normAutofit/>
+            </a:bodyPr>
+            <a:lstStyle/>
+            <a:p>
+              <a:pPr marL="591026" lvl="1" indent="-295513" algn="l">
+                <a:lnSpc>
+                  <a:spcPts val="2690"/>
+                </a:lnSpc>
+                <a:buFont typeface="Arial"/>
+                <a:buChar char="•"/>
+              </a:pPr>
+            </a:p>
+            <a:p>
+              <a:pPr>
+                <a:defRPr sz="1400" b="1">
+                  <a:solidFill>
+                    <a:srgbClr val="003366"/>
+                  </a:solidFill>
+                  <a:latin typeface="Arial"/>
+                </a:defRPr>
+              </a:pPr>
+              <a:r>
+                <a:t>Maintenance &amp; Systèmes Automatisés</a:t>
+              </a:r>
+            </a:p>
+            <a:p>
+              <a:pPr>
+                <a:defRPr sz="1200" b="1">
+                  <a:solidFill>
+                    <a:srgbClr val="000000"/>
+                  </a:solidFill>
+                  <a:latin typeface="Arial"/>
+                </a:defRPr>
+              </a:pPr>
+              <a:r>
+                <a:t>Étude approfondie du système de traitement des bagages (BHS) via l'architecture SCADA/IHM et supervision de l'infrastructure électrique critique (HT/BT, ASI). Aides à la Navigation : Immersion technique dans le fonctionnement des systèmes de radionavigation (ILS Cat II, VOR-DME, ADS-B) et des équipements de sûreté par rayons X (EDS/ETD).</a:t>
+              </a:r>
+            </a:p>
+            <a:p>
+              <a:pPr>
+                <a:defRPr sz="600"/>
+              </a:pPr>
+            </a:p>
+            <a:p>
+              <a:pPr>
+                <a:defRPr sz="1400" b="1">
+                  <a:solidFill>
+                    <a:srgbClr val="003366"/>
+                  </a:solidFill>
+                  <a:latin typeface="Arial"/>
+                </a:defRPr>
+              </a:pPr>
+              <a:r>
+                <a:t>TIPE en Étude et optimisation du système de freinage</a:t>
+              </a:r>
+            </a:p>
+            <a:p>
+              <a:pPr>
+                <a:defRPr sz="1200" b="1">
+                  <a:solidFill>
+                    <a:srgbClr val="000000"/>
+                  </a:solidFill>
+                  <a:latin typeface="Arial"/>
+                </a:defRPr>
+              </a:pPr>
+              <a:r>
+                <a:t>Étude complète du système de freinage : modélisation, dimensionnement et choix des matériaux. Simulation des performances à l'aide de Python.</a:t>
+              </a:r>
+            </a:p>
+            <a:p>
+              <a:pPr>
+                <a:defRPr sz="600"/>
+              </a:pPr>
+            </a:p>
+            <a:p>
+              <a:pPr>
+                <a:defRPr sz="1400" b="1">
+                  <a:solidFill>
+                    <a:srgbClr val="003366"/>
+                  </a:solidFill>
+                  <a:latin typeface="Arial"/>
+                </a:defRPr>
+              </a:pPr>
+              <a:r>
+                <a:t>Quadrupède à deux axes (Hackathon SRG Agadir)</a:t>
+              </a:r>
+            </a:p>
+            <a:p>
+              <a:pPr>
+                <a:defRPr sz="1200" b="1">
+                  <a:solidFill>
+                    <a:srgbClr val="000000"/>
+                  </a:solidFill>
+                  <a:latin typeface="Arial"/>
+                </a:defRPr>
+              </a:pPr>
+              <a:r>
+                <a:t>Conception d'un robot quadrupède autonome (ESP32, PCA9685, cinématique, BMS 3S) intégrant un système de vision temps réel (OpenCV, ESP32-CAM) et une communication multi-protocoles (Bluetooth, HTTP, TCP/IP).</a:t>
+              </a:r>
+            </a:p>
+            <a:p>
+              <a:pPr>
+                <a:defRPr sz="600"/>
+              </a:pPr>
+            </a:p>
+            <a:p>
+              <a:pPr>
+                <a:defRPr sz="1400" b="1">
+                  <a:solidFill>
+                    <a:srgbClr val="003366"/>
+                  </a:solidFill>
+                  <a:latin typeface="Arial"/>
+                </a:defRPr>
+              </a:pPr>
+              <a:r>
+                <a:t>Voiture ADAS</a:t>
+              </a:r>
+            </a:p>
+            <a:p>
+              <a:pPr>
+                <a:defRPr sz="1200" b="1">
+                  <a:solidFill>
+                    <a:srgbClr val="000000"/>
+                  </a:solidFill>
+                  <a:latin typeface="Arial"/>
+                </a:defRPr>
+              </a:pPr>
+              <a:r>
+                <a:t>Architecture hybride Raspberry Pi/Arduino avec détection d'obstacles temps réel (YOLO) et liaison inter-processeurs optimisée via protocole UART.</a:t>
+              </a:r>
+            </a:p>
+            <a:p>
+              <a:pPr>
+                <a:defRPr sz="600"/>
+              </a:pPr>
+            </a:p>
+            <a:p>
+              <a:pPr>
+                <a:defRPr sz="1400" b="1">
+                  <a:solidFill>
+                    <a:srgbClr val="003366"/>
+                  </a:solidFill>
+                  <a:latin typeface="Arial"/>
+                </a:defRPr>
+              </a:pPr>
+              <a:r>
+                <a:t>Projet B.O.L.T. (Pet-Bot Collaboratif)</a:t>
+              </a:r>
+            </a:p>
+            <a:p>
+              <a:pPr>
+                <a:defRPr sz="1200" b="1">
+                  <a:solidFill>
+                    <a:srgbClr val="000000"/>
+                  </a:solidFill>
+                  <a:latin typeface="Arial"/>
+                </a:defRPr>
+              </a:pPr>
+              <a:r>
+                <a:t>Traitement IA local (K210), suivi dynamique AprilTag (&lt; 200 ms) et interaction homme-machine (voix bidirectionnelle, écran OLED).</a:t>
+              </a:r>
+            </a:p>
+            <a:p>
+              <a:pPr>
+                <a:defRPr sz="600"/>
+              </a:pPr>
+            </a:p>
+            <a:p>
+              <a:pPr>
+                <a:defRPr sz="1400" b="1">
+                  <a:solidFill>
+                    <a:srgbClr val="003366"/>
+                  </a:solidFill>
+                  <a:latin typeface="Arial"/>
+                </a:defRPr>
+              </a:pPr>
+              <a:r>
+                <a:t>Technobots (1er prix en compétition)</a:t>
+              </a:r>
+            </a:p>
+            <a:p>
+              <a:pPr>
+                <a:defRPr sz="1200" b="1">
+                  <a:solidFill>
+                    <a:srgbClr val="000000"/>
+                  </a:solidFill>
+                  <a:latin typeface="Arial"/>
+                </a:defRPr>
+              </a:pPr>
+              <a:r>
+                <a:t>Conception et fabrication d'une voiture télécommandée avec capteurs : assemblage mécanique, programmation Arduino.</a:t>
+              </a:r>
+            </a:p>
+          </p:txBody>
+        </p:sp>
+      </p:grpSp>
+      <p:grpSp>
+        <p:nvGrpSpPr>
+          <p:cNvPr id="27" name="Group 27"/>
+          <p:cNvGrpSpPr/>
+          <p:nvPr/>
+        </p:nvGrpSpPr>
+        <p:grpSpPr>
+          <a:xfrm rot="5400000">
+            <a:off x="8528790" y="7882785"/>
+            <a:ext cx="1390650" cy="73952"/>
+            <a:chOff x="0" y="0"/>
+            <a:chExt cx="1854200" cy="98603"/>
+          </a:xfrm>
+        </p:grpSpPr>
+        <p:sp>
+          <p:nvSpPr>
+            <p:cNvPr id="28" name="Freeform 28"/>
+            <p:cNvSpPr/>
+            <p:nvPr/>
+          </p:nvSpPr>
+          <p:spPr>
+            <a:xfrm>
+              <a:off x="0" y="0"/>
+              <a:ext cx="1854200" cy="98552"/>
+            </a:xfrm>
+            <a:custGeom>
+              <a:avLst/>
+              <a:gdLst/>
+              <a:ahLst/>
+              <a:cxnLst/>
+              <a:rect l="l" t="t" r="r" b="b"/>
+              <a:pathLst>
+                <a:path w="1854200" h="98552">
+                  <a:moveTo>
+                    <a:pt x="0" y="0"/>
+                  </a:moveTo>
+                  <a:lnTo>
+                    <a:pt x="1854200" y="0"/>
+                  </a:lnTo>
+                  <a:lnTo>
+                    <a:pt x="1854200" y="98552"/>
+                  </a:lnTo>
+                  <a:lnTo>
+                    <a:pt x="0" y="98552"/>
+                  </a:lnTo>
+                  <a:close/>
+                </a:path>
+              </a:pathLst>
+            </a:custGeom>
+            <a:solidFill>
+              <a:srgbClr val="C8215A"/>
+            </a:solidFill>
+            <a:ln w="19050" cap="sq">
+              <a:solidFill>
+                <a:srgbClr val="C8215A"/>
+              </a:solidFill>
+              <a:prstDash val="solid"/>
+              <a:miter/>
+            </a:ln>
+          </p:spPr>
+          <p:txBody>
+            <a:bodyPr/>
+            <a:p/>
+          </p:txBody>
+        </p:sp>
+      </p:grpSp>
+      <p:grpSp>
+        <p:nvGrpSpPr>
+          <p:cNvPr id="29" name="Group 29"/>
+          <p:cNvGrpSpPr/>
+          <p:nvPr/>
+        </p:nvGrpSpPr>
+        <p:grpSpPr>
+          <a:xfrm>
+            <a:off x="14465246" y="6292139"/>
+            <a:ext cx="2625385" cy="446722"/>
+            <a:chOff x="0" y="0"/>
+            <a:chExt cx="3500514" cy="595630"/>
+          </a:xfrm>
+        </p:grpSpPr>
+        <p:sp>
+          <p:nvSpPr>
+            <p:cNvPr id="30" name="Freeform 30"/>
+            <p:cNvSpPr/>
+            <p:nvPr/>
+          </p:nvSpPr>
+          <p:spPr>
+            <a:xfrm>
+              <a:off x="0" y="0"/>
+              <a:ext cx="3500501" cy="595630"/>
+            </a:xfrm>
+            <a:custGeom>
+              <a:avLst/>
+              <a:gdLst/>
+              <a:ahLst/>
+              <a:cxnLst/>
+              <a:rect l="l" t="t" r="r" b="b"/>
+              <a:pathLst>
+                <a:path w="3500501" h="595630">
+                  <a:moveTo>
+                    <a:pt x="0" y="0"/>
+                  </a:moveTo>
+                  <a:lnTo>
+                    <a:pt x="3500501" y="0"/>
+                  </a:lnTo>
+                  <a:lnTo>
+                    <a:pt x="3500501" y="595630"/>
+                  </a:lnTo>
+                  <a:lnTo>
+                    <a:pt x="0" y="595630"/>
+                  </a:lnTo>
+                  <a:close/>
+                </a:path>
+              </a:pathLst>
+            </a:custGeom>
+            <a:solidFill>
+              <a:srgbClr val="1B3A5C"/>
+            </a:solidFill>
+            <a:ln w="19050" cap="sq">
+              <a:solidFill>
+                <a:srgbClr val="1B3A5C"/>
+              </a:solidFill>
+              <a:prstDash val="solid"/>
+              <a:miter/>
+            </a:ln>
+          </p:spPr>
+          <p:txBody>
+            <a:bodyPr/>
+            <a:p/>
+          </p:txBody>
+        </p:sp>
+        <p:sp>
+          <p:nvSpPr>
+            <p:cNvPr id="31" name="TextBox 31"/>
+            <p:cNvSpPr txBox="1"/>
+            <p:nvPr/>
+          </p:nvSpPr>
+          <p:spPr>
+            <a:xfrm>
+              <a:off x="0" y="-47625"/>
+              <a:ext cx="3500514" cy="643255"/>
+            </a:xfrm>
+            <a:prstGeom prst="rect">
+              <a:avLst/>
+            </a:prstGeom>
+          </p:spPr>
+          <p:txBody>
+            <a:bodyPr lIns="50800" tIns="50800" rIns="50800" bIns="50800" rtlCol="0" anchor="t"/>
+            <a:lstStyle/>
+            <a:p>
+              <a:pPr algn="ctr">
+                <a:lnSpc>
+                  <a:spcPts val="2520"/>
+                </a:lnSpc>
+              </a:pPr>
+              <a:r>
+                <a:rPr lang="en-US" sz="2100" b="1">
+                  <a:solidFill>
+                    <a:srgbClr val="FFFFFF"/>
+                  </a:solidFill>
+                  <a:latin typeface="Calibri (MS) Bold"/>
+                  <a:ea typeface="Calibri (MS) Bold"/>
+                  <a:cs typeface="Calibri (MS) Bold"/>
+                  <a:sym typeface="Calibri (MS) Bold"/>
+                </a:rPr>
+                <a:t>TOOLS</a:t>
+              </a:r>
+            </a:p>
+          </p:txBody>
+        </p:sp>
+      </p:grpSp>
+      <p:grpSp>
+        <p:nvGrpSpPr>
+          <p:cNvPr id="32" name="Group 32"/>
+          <p:cNvGrpSpPr/>
+          <p:nvPr/>
+        </p:nvGrpSpPr>
+        <p:grpSpPr>
+          <a:xfrm>
+            <a:off x="14465246" y="6706229"/>
+            <a:ext cx="2625385" cy="51892"/>
+            <a:chOff x="0" y="0"/>
+            <a:chExt cx="3500514" cy="69190"/>
+          </a:xfrm>
+        </p:grpSpPr>
+        <p:sp>
+          <p:nvSpPr>
+            <p:cNvPr id="33" name="Freeform 33"/>
+            <p:cNvSpPr/>
+            <p:nvPr/>
+          </p:nvSpPr>
+          <p:spPr>
+            <a:xfrm>
+              <a:off x="0" y="0"/>
+              <a:ext cx="3500501" cy="69215"/>
+            </a:xfrm>
+            <a:custGeom>
+              <a:avLst/>
+              <a:gdLst/>
+              <a:ahLst/>
+              <a:cxnLst/>
+              <a:rect l="l" t="t" r="r" b="b"/>
+              <a:pathLst>
+                <a:path w="3500501" h="69215">
+                  <a:moveTo>
+                    <a:pt x="0" y="0"/>
+                  </a:moveTo>
+                  <a:lnTo>
+                    <a:pt x="3500501" y="0"/>
+                  </a:lnTo>
+                  <a:lnTo>
+                    <a:pt x="3500501" y="69215"/>
+                  </a:lnTo>
+                  <a:lnTo>
+                    <a:pt x="0" y="69215"/>
+                  </a:lnTo>
+                  <a:close/>
+                </a:path>
+              </a:pathLst>
+            </a:custGeom>
+            <a:solidFill>
+              <a:srgbClr val="C8215A"/>
+            </a:solidFill>
+            <a:ln w="19050" cap="sq">
+              <a:solidFill>
+                <a:srgbClr val="C8215A"/>
+              </a:solidFill>
+              <a:prstDash val="solid"/>
+              <a:miter/>
+            </a:ln>
+          </p:spPr>
+          <p:txBody>
+            <a:bodyPr/>
+            <a:p/>
+          </p:txBody>
+        </p:sp>
+      </p:grpSp>
+      <p:grpSp>
+        <p:nvGrpSpPr>
+          <p:cNvPr id="34" name="Group 34"/>
+          <p:cNvGrpSpPr/>
+          <p:nvPr/>
+        </p:nvGrpSpPr>
+        <p:grpSpPr>
+          <a:xfrm rot="5400000">
+            <a:off x="13148586" y="7882785"/>
+            <a:ext cx="1390650" cy="73952"/>
+            <a:chOff x="0" y="0"/>
+            <a:chExt cx="1854200" cy="98603"/>
+          </a:xfrm>
+        </p:grpSpPr>
+        <p:sp>
+          <p:nvSpPr>
+            <p:cNvPr id="35" name="Freeform 35"/>
+            <p:cNvSpPr/>
+            <p:nvPr/>
+          </p:nvSpPr>
+          <p:spPr>
+            <a:xfrm>
+              <a:off x="0" y="0"/>
+              <a:ext cx="1854200" cy="98552"/>
+            </a:xfrm>
+            <a:custGeom>
+              <a:avLst/>
+              <a:gdLst/>
+              <a:ahLst/>
+              <a:cxnLst/>
+              <a:rect l="l" t="t" r="r" b="b"/>
+              <a:pathLst>
+                <a:path w="1854200" h="98552">
+                  <a:moveTo>
+                    <a:pt x="0" y="0"/>
+                  </a:moveTo>
+                  <a:lnTo>
+                    <a:pt x="1854200" y="0"/>
+                  </a:lnTo>
+                  <a:lnTo>
+                    <a:pt x="1854200" y="98552"/>
+                  </a:lnTo>
+                  <a:lnTo>
+                    <a:pt x="0" y="98552"/>
+                  </a:lnTo>
+                  <a:close/>
+                </a:path>
+              </a:pathLst>
+            </a:custGeom>
+            <a:solidFill>
+              <a:srgbClr val="C8215A"/>
+            </a:solidFill>
+            <a:ln w="19050" cap="sq">
+              <a:solidFill>
+                <a:srgbClr val="C8215A"/>
+              </a:solidFill>
+              <a:prstDash val="solid"/>
+              <a:miter/>
+            </a:ln>
+          </p:spPr>
+          <p:txBody>
+            <a:bodyPr/>
+            <a:p/>
+          </p:txBody>
+        </p:sp>
+      </p:grpSp>
+      <p:grpSp>
+        <p:nvGrpSpPr>
+          <p:cNvPr id="36" name="Group 36"/>
+          <p:cNvGrpSpPr/>
+          <p:nvPr/>
+        </p:nvGrpSpPr>
+        <p:grpSpPr>
+          <a:xfrm>
+            <a:off x="456619" y="6070892"/>
+            <a:ext cx="2939291" cy="442978"/>
+            <a:chOff x="0" y="0"/>
+            <a:chExt cx="3919055" cy="590637"/>
+          </a:xfrm>
+        </p:grpSpPr>
+        <p:sp>
+          <p:nvSpPr>
+            <p:cNvPr id="37" name="Freeform 37"/>
+            <p:cNvSpPr/>
+            <p:nvPr/>
+          </p:nvSpPr>
+          <p:spPr>
+            <a:xfrm>
+              <a:off x="0" y="0"/>
+              <a:ext cx="3919093" cy="590570"/>
+            </a:xfrm>
+            <a:custGeom>
+              <a:avLst/>
+              <a:gdLst/>
+              <a:ahLst/>
+              <a:cxnLst/>
+              <a:rect l="l" t="t" r="r" b="b"/>
+              <a:pathLst>
+                <a:path w="3919093" h="590570">
+                  <a:moveTo>
+                    <a:pt x="0" y="0"/>
+                  </a:moveTo>
+                  <a:lnTo>
+                    <a:pt x="3919093" y="0"/>
+                  </a:lnTo>
+                  <a:lnTo>
+                    <a:pt x="3919093" y="590570"/>
+                  </a:lnTo>
+                  <a:lnTo>
+                    <a:pt x="0" y="590570"/>
+                  </a:lnTo>
+                  <a:close/>
+                </a:path>
+              </a:pathLst>
+            </a:custGeom>
+            <a:solidFill>
+              <a:srgbClr val="E7E6E6"/>
+            </a:solidFill>
+            <a:ln w="14288" cap="sq">
+              <a:solidFill>
+                <a:srgbClr val="174564"/>
+              </a:solidFill>
+              <a:prstDash val="solid"/>
+              <a:miter/>
+            </a:ln>
+          </p:spPr>
+          <p:txBody>
+            <a:bodyPr/>
+            <a:p/>
+          </p:txBody>
+        </p:sp>
+        <p:sp>
+          <p:nvSpPr>
+            <p:cNvPr id="38" name="TextBox 38"/>
+            <p:cNvSpPr txBox="1"/>
+            <p:nvPr/>
+          </p:nvSpPr>
+          <p:spPr>
+            <a:xfrm>
+              <a:off x="0" y="-19050"/>
+              <a:ext cx="3919055" cy="609687"/>
+            </a:xfrm>
+            <a:prstGeom prst="rect">
+              <a:avLst/>
+            </a:prstGeom>
+          </p:spPr>
+          <p:txBody>
+            <a:bodyPr lIns="50800" tIns="50800" rIns="50800" bIns="50800" rtlCol="0" anchor="ctr" wrap="square"/>
+            <a:lstStyle/>
+            <a:p>
+              <a:pPr algn="ctr">
+                <a:lnSpc>
+                  <a:spcPts val="1980"/>
+                </a:lnSpc>
+              </a:pPr>
+              <a:r>
+                <a:rPr lang="en-US" sz="1650" b="1">
+                  <a:solidFill>
+                    <a:srgbClr val="000000"/>
+                  </a:solidFill>
+                  <a:latin typeface="Arial Bold"/>
+                  <a:ea typeface="Arial Bold"/>
+                  <a:cs typeface="Arial Bold"/>
+                  <a:sym typeface="Arial Bold"/>
+                </a:rPr>
+                <a:t>Disponibilité : immédiate</a:t>
+              </a:r>
+            </a:p>
+          </p:txBody>
+        </p:sp>
+      </p:grpSp>
+      <p:grpSp>
+        <p:nvGrpSpPr>
+          <p:cNvPr id="39" name="Group 39"/>
+          <p:cNvGrpSpPr/>
+          <p:nvPr/>
+        </p:nvGrpSpPr>
+        <p:grpSpPr>
+          <a:xfrm>
+            <a:off x="615504" y="2732215"/>
+            <a:ext cx="2621471" cy="3275143"/>
+            <a:chOff x="0" y="0"/>
+            <a:chExt cx="3495294" cy="4366857"/>
+          </a:xfrm>
+        </p:grpSpPr>
+        <p:sp>
+          <p:nvSpPr>
+            <p:cNvPr id="40" name="Freeform 40"/>
+            <p:cNvSpPr/>
+            <p:nvPr/>
+          </p:nvSpPr>
+          <p:spPr>
+            <a:xfrm>
+              <a:off x="0" y="0"/>
+              <a:ext cx="3495294" cy="4366895"/>
+            </a:xfrm>
+            <a:custGeom>
+              <a:avLst/>
+              <a:gdLst/>
+              <a:ahLst/>
+              <a:cxnLst/>
+              <a:rect l="l" t="t" r="r" b="b"/>
+              <a:pathLst>
+                <a:path w="3495294" h="4366895">
+                  <a:moveTo>
+                    <a:pt x="0" y="0"/>
+                  </a:moveTo>
+                  <a:lnTo>
+                    <a:pt x="3495294" y="0"/>
+                  </a:lnTo>
+                  <a:lnTo>
+                    <a:pt x="3495294" y="4366895"/>
+                  </a:lnTo>
+                  <a:lnTo>
+                    <a:pt x="0" y="4366895"/>
+                  </a:lnTo>
+                  <a:lnTo>
+                    <a:pt x="0" y="0"/>
+                  </a:lnTo>
+                  <a:close/>
+                </a:path>
+              </a:pathLst>
+            </a:custGeom>
+            <a:blipFill>
+              <a:blip r:embed="rId10"/>
+              <a:stretch>
+                <a:fillRect l="-56251" t="-76223" r="-56251"/>
+              </a:stretch>
+            </a:blipFill>
+          </p:spPr>
+          <p:txBody>
+            <a:bodyPr/>
+            <a:p/>
+          </p:txBody>
+        </p:sp>
+      </p:grpSp>
+      <p:sp>
+        <p:nvSpPr>
+          <p:cNvPr id="41" name="TextBox 41"/>
           <p:cNvSpPr txBox="1"/>
           <p:nvPr/>
         </p:nvSpPr>
         <p:spPr>
           <a:xfrm>
-            <a:off x="6028428" y="280770"/>
-            <a:ext cx="5709336" cy="1034005"/>
+            <a:off x="14878669" y="9886826"/>
+            <a:ext cx="3211668" cy="191805"/>
           </a:xfrm>
           <a:prstGeom prst="rect">
             <a:avLst/>
@@ -3304,317 +5188,768 @@
           </a:bodyPr>
           <a:lstStyle/>
           <a:p>
-            <a:pPr algn="l">
+            <a:pPr algn="r">
               <a:lnSpc>
-                <a:spcPts val="3907"/>
+                <a:spcPts val="1260"/>
               </a:lnSpc>
             </a:pPr>
             <a:r>
-              <a:rPr lang="en-US" sz="2791" b="1">
+              <a:rPr lang="en-US" sz="1050">
                 <a:solidFill>
-                  <a:srgbClr val="174564"/>
+                  <a:srgbClr val="FFFFFF"/>
                 </a:solidFill>
-                <a:latin typeface="Arial MT Pro Bold"/>
-                <a:ea typeface="Arial MT Pro Bold"/>
-                <a:cs typeface="Arial MT Pro Bold"/>
-                <a:sym typeface="Arial MT Pro Bold"/>
+                <a:latin typeface="Arial"/>
+                <a:ea typeface="Arial"/>
+                <a:cs typeface="Arial"/>
+                <a:sym typeface="Arial"/>
               </a:rPr>
-              <a:t>PROJETS</a:t>
-            </a:r>
-          </a:p>
-          <a:p>
-            <a:pPr algn="l">
-              <a:lnSpc>
-                <a:spcPts val="3907"/>
-              </a:lnSpc>
-            </a:pPr>
-            <a:endParaRPr lang="en-US" sz="2791" b="1">
-              <a:solidFill>
-                <a:srgbClr val="174564"/>
-              </a:solidFill>
-              <a:latin typeface="Arial MT Pro Bold"/>
-              <a:ea typeface="Arial MT Pro Bold"/>
-              <a:cs typeface="Arial MT Pro Bold"/>
-              <a:sym typeface="Arial MT Pro Bold"/>
-            </a:endParaRPr>
-          </a:p>
-        </p:txBody>
-      </p:sp>
-      <p:sp>
-        <p:nvSpPr>
-          <p:cNvPr id="10" name="TextBox 10"/>
+              <a:t>© SEGULA Technologies – Tous droits réservés</a:t>
+            </a:r>
+          </a:p>
+        </p:txBody>
+      </p:sp>
+      <p:sp>
+        <p:nvSpPr>
+          <p:cNvPr id="42" name="TextBox 42"/>
           <p:cNvSpPr txBox="1"/>
           <p:nvPr/>
         </p:nvSpPr>
         <p:spPr>
           <a:xfrm>
-            <a:off x="6028428" y="5293360"/>
-            <a:ext cx="5709336" cy="1034005"/>
+            <a:off x="4280021" y="93326"/>
+            <a:ext cx="12331579" cy="709874"/>
           </a:xfrm>
           <a:prstGeom prst="rect">
             <a:avLst/>
           </a:prstGeom>
         </p:spPr>
         <p:txBody>
-          <a:bodyPr lIns="0" tIns="0" rIns="0" bIns="0" rtlCol="0" anchor="t">
+          <a:bodyPr wrap="square" lIns="0" tIns="0" rIns="0" bIns="0" rtlCol="0" anchor="t">
             <a:spAutoFit/>
           </a:bodyPr>
           <a:lstStyle/>
           <a:p>
+            <a:pPr algn="just">
+              <a:lnSpc>
+                <a:spcPts val="1979"/>
+              </a:lnSpc>
+            </a:pPr>
+            <a:endParaRPr dirty="0"/>
+          </a:p>
+          <a:p>
+            <a:pPr algn="just">
+              <a:lnSpc>
+                <a:spcPts val="1584"/>
+              </a:lnSpc>
+            </a:pPr>
+            <a:r>
+              <a:rPr lang="en-US" sz="1200" dirty="0">
+                <a:solidFill>
+                  <a:srgbClr val="FFFFFF"/>
+                </a:solidFill>
+                <a:latin typeface="Arial"/>
+                <a:ea typeface="Arial"/>
+                <a:cs typeface="Arial"/>
+                <a:sym typeface="Arial"/>
+              </a:rPr>
+              <a:t>EXPERIENCES</a:t>
+            </a:r>
+            <a:r>
+              <a:rPr lang="en-US" sz="1200" b="1" dirty="0">
+                <a:solidFill>
+                  <a:srgbClr val="FFFFFF"/>
+                </a:solidFill>
+                <a:latin typeface="Arial Bold"/>
+                <a:ea typeface="Arial Bold"/>
+                <a:cs typeface="Arial Bold"/>
+                <a:sym typeface="Arial Bold"/>
+              </a:rPr>
+              <a:t> </a:t>
+            </a:r>
+          </a:p>
+          <a:p>
             <a:pPr algn="l">
               <a:lnSpc>
-                <a:spcPts val="3907"/>
+                <a:spcPts val="1980"/>
               </a:lnSpc>
             </a:pPr>
             <a:r>
-              <a:rPr lang="en-US" sz="2791" b="1">
+              <a:rPr lang="en-US" sz="1650" b="1" dirty="0">
                 <a:solidFill>
-                  <a:srgbClr val="174564"/>
+                  <a:srgbClr val="FFFFFF"/>
                 </a:solidFill>
-                <a:latin typeface="Arial MT Pro Bold"/>
-                <a:ea typeface="Arial MT Pro Bold"/>
-                <a:cs typeface="Arial MT Pro Bold"/>
-                <a:sym typeface="Arial MT Pro Bold"/>
+                <a:latin typeface="Calibri (MS) Bold"/>
+                <a:ea typeface="Calibri (MS) Bold"/>
+                <a:cs typeface="Calibri (MS) Bold"/>
+                <a:sym typeface="Calibri (MS) Bold"/>
               </a:rPr>
-              <a:t>Hard Skills</a:t>
-            </a:r>
-          </a:p>
-          <a:p>
-            <a:pPr algn="l">
-              <a:lnSpc>
-                <a:spcPts val="3907"/>
-              </a:lnSpc>
-            </a:pPr>
-            <a:endParaRPr lang="en-US" sz="2791" b="1">
-              <a:solidFill>
-                <a:srgbClr val="174564"/>
-              </a:solidFill>
-              <a:latin typeface="Arial MT Pro Bold"/>
-              <a:ea typeface="Arial MT Pro Bold"/>
-              <a:cs typeface="Arial MT Pro Bold"/>
-              <a:sym typeface="Arial MT Pro Bold"/>
-            </a:endParaRPr>
-          </a:p>
-        </p:txBody>
-      </p:sp>
-      <p:sp>
-        <p:nvSpPr>
-          <p:cNvPr id="11" name="TextBox 11"/>
+              <a:t/>
+            </a:r>
+          </a:p>
+        </p:txBody>
+      </p:sp>
+      <p:sp>
+        <p:nvSpPr>
+          <p:cNvPr id="43" name="TextBox 43"/>
           <p:cNvSpPr txBox="1"/>
           <p:nvPr/>
         </p:nvSpPr>
         <p:spPr>
           <a:xfrm>
-            <a:off x="9941686" y="5293360"/>
-            <a:ext cx="5709336" cy="1034005"/>
+            <a:off x="149047" y="1021785"/>
+            <a:ext cx="3554397" cy="1266825"/>
           </a:xfrm>
           <a:prstGeom prst="rect">
             <a:avLst/>
           </a:prstGeom>
         </p:spPr>
         <p:txBody>
-          <a:bodyPr lIns="0" tIns="0" rIns="0" bIns="0" rtlCol="0" anchor="t">
+          <a:bodyPr lIns="0" tIns="0" rIns="0" bIns="0" rtlCol="0" anchor="t" wrap="square">
             <a:spAutoFit/>
           </a:bodyPr>
           <a:lstStyle/>
           <a:p>
-            <a:pPr algn="l">
+            <a:pPr algn="ctr">
               <a:lnSpc>
-                <a:spcPts val="3907"/>
+                <a:spcPts val="2520"/>
               </a:lnSpc>
             </a:pPr>
             <a:r>
-              <a:rPr lang="en-US" sz="2791" b="1">
+              <a:rPr lang="en-US" sz="2100">
                 <a:solidFill>
-                  <a:srgbClr val="174564"/>
+                  <a:srgbClr val="FFFFFF"/>
                 </a:solidFill>
-                <a:latin typeface="Arial MT Pro Bold"/>
-                <a:ea typeface="Arial MT Pro Bold"/>
-                <a:cs typeface="Arial MT Pro Bold"/>
-                <a:sym typeface="Arial MT Pro Bold"/>
+                <a:latin typeface="Arial"/>
+                <a:ea typeface="Arial"/>
+                <a:cs typeface="Arial"/>
+                <a:sym typeface="Arial"/>
               </a:rPr>
-              <a:t>Soft Skills</a:t>
-            </a:r>
-          </a:p>
-          <a:p>
-            <a:pPr algn="l">
+              <a:t>Salah Eddine TALEB</a:t>
+            </a:r>
+          </a:p>
+          <a:p>
+            <a:pPr algn="ctr">
               <a:lnSpc>
-                <a:spcPts val="3907"/>
+                <a:spcPts val="2520"/>
               </a:lnSpc>
             </a:pPr>
-            <a:endParaRPr lang="en-US" sz="2791" b="1">
+            <a:endParaRPr lang="en-US" sz="2100">
               <a:solidFill>
-                <a:srgbClr val="174564"/>
+                <a:srgbClr val="FFFFFF"/>
               </a:solidFill>
-              <a:latin typeface="Arial MT Pro Bold"/>
-              <a:ea typeface="Arial MT Pro Bold"/>
-              <a:cs typeface="Arial MT Pro Bold"/>
-              <a:sym typeface="Arial MT Pro Bold"/>
+              <a:latin typeface="Arial"/>
+              <a:ea typeface="Arial"/>
+              <a:cs typeface="Arial"/>
+              <a:sym typeface="Arial"/>
             </a:endParaRPr>
           </a:p>
-        </p:txBody>
-      </p:sp>
-      <p:sp>
-        <p:nvSpPr>
-          <p:cNvPr id="12" name="TextBox 12"/>
+          <a:p>
+            <a:pPr algn="ctr">
+              <a:lnSpc>
+                <a:spcPts val="2520"/>
+              </a:lnSpc>
+            </a:pPr>
+            <a:r>
+              <a:rPr lang="en-US" sz="2100">
+                <a:solidFill>
+                  <a:srgbClr val="FFFFFF"/>
+                </a:solidFill>
+                <a:latin typeface="Arial"/>
+                <a:ea typeface="Arial"/>
+                <a:cs typeface="Arial"/>
+                <a:sym typeface="Arial"/>
+              </a:rPr>
+              <a:t>Ingénieur en Aéronautique</a:t>
+            </a:r>
+          </a:p>
+          <a:p>
+            <a:pPr algn="ctr">
+              <a:lnSpc>
+                <a:spcPts val="2520"/>
+              </a:lnSpc>
+            </a:pPr>
+            <a:endParaRPr lang="en-US" sz="2100">
+              <a:solidFill>
+                <a:srgbClr val="FFFFFF"/>
+              </a:solidFill>
+              <a:latin typeface="Arial"/>
+              <a:ea typeface="Arial"/>
+              <a:cs typeface="Arial"/>
+              <a:sym typeface="Arial"/>
+            </a:endParaRPr>
+          </a:p>
+        </p:txBody>
+      </p:sp>
+      <p:sp>
+        <p:nvSpPr>
+          <p:cNvPr id="44" name="TextBox 44"/>
           <p:cNvSpPr txBox="1"/>
           <p:nvPr/>
         </p:nvSpPr>
         <p:spPr>
           <a:xfrm>
-            <a:off x="13655839" y="5293360"/>
-            <a:ext cx="5709336" cy="1034005"/>
+            <a:off x="179041" y="7038775"/>
+            <a:ext cx="3764547" cy="2628925"/>
           </a:xfrm>
           <a:prstGeom prst="rect">
             <a:avLst/>
           </a:prstGeom>
         </p:spPr>
         <p:txBody>
-          <a:bodyPr lIns="0" tIns="0" rIns="0" bIns="0" rtlCol="0" anchor="t">
+          <a:bodyPr lIns="0" tIns="0" rIns="0" bIns="0" rtlCol="0" anchor="t" wrap="square">
             <a:spAutoFit/>
           </a:bodyPr>
           <a:lstStyle/>
           <a:p>
             <a:pPr algn="l">
               <a:lnSpc>
-                <a:spcPts val="3907"/>
+                <a:spcPts val="1800"/>
               </a:lnSpc>
             </a:pPr>
             <a:r>
-              <a:rPr lang="en-US" sz="2791" b="1">
+              <a:rPr lang="en-US" sz="1500" b="1" dirty="0">
                 <a:solidFill>
-                  <a:srgbClr val="174564"/>
+                  <a:srgbClr val="FFFFFF"/>
                 </a:solidFill>
-                <a:latin typeface="Arial MT Pro Bold"/>
-                <a:ea typeface="Arial MT Pro Bold"/>
-                <a:cs typeface="Arial MT Pro Bold"/>
-                <a:sym typeface="Arial MT Pro Bold"/>
+                <a:latin typeface="Arial Bold"/>
+                <a:ea typeface="Arial Bold"/>
+                <a:cs typeface="Arial Bold"/>
+                <a:sym typeface="Arial Bold"/>
               </a:rPr>
-              <a:t>Outils &amp; Technologies</a:t>
+              <a:t>Languages: </a:t>
             </a:r>
           </a:p>
           <a:p>
             <a:pPr algn="l">
               <a:lnSpc>
-                <a:spcPts val="3907"/>
+                <a:spcPts val="2520"/>
               </a:lnSpc>
             </a:pPr>
-            <a:endParaRPr lang="en-US" sz="2791" b="1">
+            <a:endParaRPr lang="en-US" sz="1500" b="1" dirty="0">
               <a:solidFill>
-                <a:srgbClr val="174564"/>
+                <a:srgbClr val="FFFFFF"/>
               </a:solidFill>
-              <a:latin typeface="Arial MT Pro Bold"/>
-              <a:ea typeface="Arial MT Pro Bold"/>
-              <a:cs typeface="Arial MT Pro Bold"/>
-              <a:sym typeface="Arial MT Pro Bold"/>
+              <a:latin typeface="Arial Bold"/>
+              <a:ea typeface="Arial Bold"/>
+              <a:cs typeface="Arial Bold"/>
+              <a:sym typeface="Arial Bold"/>
             </a:endParaRPr>
           </a:p>
-        </p:txBody>
-      </p:sp>
-      <p:sp>
-        <p:nvSpPr>
-          <p:cNvPr id="13" name="TextBox 13"/>
+          <a:p>
+            <a:pPr marL="519112" lvl="1" indent="-259556" algn="l">
+              <a:lnSpc>
+                <a:spcPts val="1800"/>
+              </a:lnSpc>
+              <a:buFont typeface="Arial"/>
+              <a:buChar char="•"/>
+            </a:pPr>
+            <a:r>
+              <a:rPr lang="en-US" sz="1500" b="1" dirty="0">
+                <a:solidFill>
+                  <a:srgbClr val="FFFFFF"/>
+                </a:solidFill>
+                <a:latin typeface="Arial Bold"/>
+                <a:ea typeface="Arial Bold"/>
+                <a:cs typeface="Arial Bold"/>
+                <a:sym typeface="Arial Bold"/>
+              </a:rPr>
+              <a:t>Arabe
+Français(C1)
+Anglais (C1)</a:t>
+            </a:r>
+          </a:p>
+          <a:p>
+            <a:pPr marL="519112" lvl="1" indent="-259556" algn="l">
+              <a:lnSpc>
+                <a:spcPts val="1800"/>
+              </a:lnSpc>
+              <a:buFont typeface="Arial"/>
+              <a:buChar char="•"/>
+            </a:pPr>
+            <a:endParaRPr lang="en-US" sz="1500" b="1" dirty="0">
+              <a:solidFill>
+                <a:srgbClr val="FFFFFF"/>
+              </a:solidFill>
+              <a:latin typeface="Arial Bold"/>
+              <a:ea typeface="Arial Bold"/>
+              <a:cs typeface="Arial Bold"/>
+              <a:sym typeface="Arial Bold"/>
+            </a:endParaRPr>
+          </a:p>
+          <a:p>
+            <a:pPr marL="519112" lvl="1" indent="-259556" algn="l">
+              <a:lnSpc>
+                <a:spcPts val="1800"/>
+              </a:lnSpc>
+              <a:buFont typeface="Arial"/>
+              <a:buChar char="•"/>
+            </a:pPr>
+            <a:endParaRPr lang="en-US" sz="1500" b="1" dirty="0">
+              <a:solidFill>
+                <a:srgbClr val="FFFFFF"/>
+              </a:solidFill>
+              <a:latin typeface="Arial Bold"/>
+              <a:ea typeface="Arial Bold"/>
+              <a:cs typeface="Arial Bold"/>
+              <a:sym typeface="Arial Bold"/>
+            </a:endParaRPr>
+          </a:p>
+          <a:p>
+            <a:pPr marL="519112" lvl="1" indent="-259556" algn="l">
+              <a:lnSpc>
+                <a:spcPts val="1800"/>
+              </a:lnSpc>
+              <a:buFont typeface="Arial"/>
+              <a:buChar char="•"/>
+            </a:pPr>
+            <a:endParaRPr lang="en-US" sz="1500" b="1" dirty="0">
+              <a:solidFill>
+                <a:srgbClr val="FFFFFF"/>
+              </a:solidFill>
+              <a:latin typeface="Arial Bold"/>
+              <a:ea typeface="Arial Bold"/>
+              <a:cs typeface="Arial Bold"/>
+              <a:sym typeface="Arial Bold"/>
+            </a:endParaRPr>
+          </a:p>
+          <a:p>
+            <a:pPr marL="519112" lvl="1" indent="-259556" algn="l">
+              <a:lnSpc>
+                <a:spcPts val="1800"/>
+              </a:lnSpc>
+              <a:buFont typeface="Arial"/>
+              <a:buChar char="•"/>
+            </a:pPr>
+            <a:endParaRPr lang="en-US" sz="1500" b="1" dirty="0">
+              <a:solidFill>
+                <a:srgbClr val="FFFFFF"/>
+              </a:solidFill>
+              <a:latin typeface="Arial Bold"/>
+              <a:ea typeface="Arial Bold"/>
+              <a:cs typeface="Arial Bold"/>
+              <a:sym typeface="Arial Bold"/>
+            </a:endParaRPr>
+          </a:p>
+          <a:p>
+            <a:pPr marL="519112" lvl="1" indent="-259556" algn="l">
+              <a:lnSpc>
+                <a:spcPts val="1800"/>
+              </a:lnSpc>
+              <a:buFont typeface="Arial"/>
+              <a:buChar char="•"/>
+            </a:pPr>
+            <a:endParaRPr lang="en-US" sz="1500" b="1" dirty="0">
+              <a:solidFill>
+                <a:srgbClr val="FFFFFF"/>
+              </a:solidFill>
+              <a:latin typeface="Arial Bold"/>
+              <a:ea typeface="Arial Bold"/>
+              <a:cs typeface="Arial Bold"/>
+              <a:sym typeface="Arial Bold"/>
+            </a:endParaRPr>
+          </a:p>
+          <a:p>
+            <a:pPr marL="519112" lvl="1" indent="-259556" algn="l">
+              <a:lnSpc>
+                <a:spcPts val="1800"/>
+              </a:lnSpc>
+              <a:buFont typeface="Arial"/>
+              <a:buChar char="•"/>
+            </a:pPr>
+            <a:endParaRPr lang="en-US" sz="1500" b="1">
+              <a:solidFill>
+                <a:srgbClr val="FFFFFF"/>
+              </a:solidFill>
+              <a:latin typeface="Arial Bold"/>
+              <a:ea typeface="Arial Bold"/>
+              <a:cs typeface="Arial Bold"/>
+              <a:sym typeface="Arial Bold"/>
+            </a:endParaRPr>
+          </a:p>
+          <a:p>
+            <a:pPr marL="519112" lvl="1" indent="-259556" algn="l">
+              <a:lnSpc>
+                <a:spcPts val="1800"/>
+              </a:lnSpc>
+              <a:buFont typeface="Arial"/>
+              <a:buChar char="•"/>
+            </a:pPr>
+            <a:endParaRPr lang="en-US" sz="1500" b="1">
+              <a:solidFill>
+                <a:srgbClr val="FFFFFF"/>
+              </a:solidFill>
+              <a:latin typeface="Arial Bold"/>
+              <a:ea typeface="Arial Bold"/>
+              <a:cs typeface="Arial Bold"/>
+              <a:sym typeface="Arial Bold"/>
+            </a:endParaRPr>
+          </a:p>
+          <a:p>
+            <a:pPr algn="l">
+              <a:lnSpc>
+                <a:spcPts val="1800"/>
+              </a:lnSpc>
+            </a:pPr>
+            <a:endParaRPr lang="en-US" sz="1500" b="1" dirty="0">
+              <a:solidFill>
+                <a:srgbClr val="FFFFFF"/>
+              </a:solidFill>
+              <a:latin typeface="Arial Bold"/>
+              <a:ea typeface="Arial Bold"/>
+              <a:cs typeface="Arial Bold"/>
+              <a:sym typeface="Arial Bold"/>
+            </a:endParaRPr>
+          </a:p>
+        </p:txBody>
+      </p:sp>
+      <p:sp>
+        <p:nvSpPr>
+          <p:cNvPr id="45" name="TextBox 45"/>
           <p:cNvSpPr txBox="1"/>
           <p:nvPr/>
         </p:nvSpPr>
         <p:spPr>
           <a:xfrm>
-            <a:off x="319092" y="5762738"/>
-            <a:ext cx="4849850" cy="437299"/>
+            <a:off x="4425829" y="7019725"/>
+            <a:ext cx="4580401" cy="2507097"/>
           </a:xfrm>
           <a:prstGeom prst="rect">
             <a:avLst/>
           </a:prstGeom>
         </p:spPr>
         <p:txBody>
-          <a:bodyPr wrap="square" lIns="0" tIns="0" rIns="0" bIns="0" rtlCol="0" anchor="t">
+          <a:bodyPr lIns="0" tIns="0" rIns="0" bIns="0" rtlCol="0" anchor="t" wrap="square">
             <a:spAutoFit/>
           </a:bodyPr>
           <a:lstStyle/>
           <a:p>
-            <a:pPr algn="l">
+            <a:pPr marL="554355" lvl="1" indent="-277177" algn="l">
               <a:lnSpc>
-                <a:spcPts val="3627"/>
+                <a:spcPts val="2160"/>
+              </a:lnSpc>
+              <a:buFont typeface="Arial"/>
+              <a:buChar char="•"/>
+            </a:pPr>
+            <a:r>
+              <a:rPr lang="en-US" sz="1400" dirty="0">
+                <a:solidFill>
+                  <a:srgbClr val="2E2D2C"/>
+                </a:solidFill>
+                <a:latin typeface="Calibri (MS)"/>
+                <a:ea typeface="Calibri (MS)"/>
+                <a:cs typeface="Calibri (MS)"/>
+                <a:sym typeface="Calibri (MS)"/>
+              </a:rPr>
+              <a:t>ESP32, Automate, Ladder, Python, C, C++, Assembly, VHDL, STM32</a:t>
+            </a:r>
+          </a:p>
+          <a:p>
+            <a:pPr marL="646747" lvl="1" indent="-323374" algn="l">
+              <a:lnSpc>
+                <a:spcPts val="2520"/>
               </a:lnSpc>
             </a:pPr>
-            <a:r>
-              <a:rPr lang="en-US" sz="2400" b="1" dirty="0">
-                <a:solidFill>
-                  <a:srgbClr val="FF52BA"/>
-                </a:solidFill>
-                <a:latin typeface="Arial MT Pro Bold"/>
-                <a:ea typeface="Arial MT Pro Bold"/>
-                <a:cs typeface="Arial MT Pro Bold"/>
-                <a:sym typeface="Arial MT Pro Bold"/>
-              </a:rPr>
-              <a:t>DISPONIBILITÉ : </a:t>
-            </a:r>
-            <a:r>
-              <a:rPr lang="en-US" sz="2400" b="1" dirty="0">
-                <a:solidFill>
-                  <a:srgbClr val="FFFFFF"/>
-                </a:solidFill>
-                <a:latin typeface="Arial MT Pro Bold"/>
-                <a:ea typeface="Arial MT Pro Bold"/>
-                <a:cs typeface="Arial MT Pro Bold"/>
-                <a:sym typeface="Arial MT Pro Bold"/>
-              </a:rPr>
-              <a:t>immédiate</a:t>
-            </a:r>
-          </a:p>
-        </p:txBody>
-      </p:sp>
-      <p:sp>
-        <p:nvSpPr>
-          <p:cNvPr id="14" name="TextBox 14"/>
+            <a:endParaRPr lang="en-US" sz="1800" dirty="0">
+              <a:solidFill>
+                <a:srgbClr val="2E2D2C"/>
+              </a:solidFill>
+              <a:latin typeface="Calibri (MS)"/>
+              <a:ea typeface="Calibri (MS)"/>
+              <a:cs typeface="Calibri (MS)"/>
+              <a:sym typeface="Calibri (MS)"/>
+            </a:endParaRPr>
+          </a:p>
+          <a:p>
+            <a:pPr marL="646747" lvl="1" indent="-323374" algn="l">
+              <a:lnSpc>
+                <a:spcPts val="2520"/>
+              </a:lnSpc>
+            </a:pPr>
+            <a:endParaRPr lang="en-US" dirty="0">
+              <a:solidFill>
+                <a:srgbClr val="2E2D2C"/>
+              </a:solidFill>
+              <a:latin typeface="Calibri (MS)"/>
+              <a:ea typeface="Calibri (MS)"/>
+              <a:cs typeface="Calibri (MS)"/>
+              <a:sym typeface="Calibri (MS)"/>
+            </a:endParaRPr>
+          </a:p>
+          <a:p>
+            <a:pPr marL="646747" lvl="1" indent="-323374" algn="l">
+              <a:lnSpc>
+                <a:spcPts val="2520"/>
+              </a:lnSpc>
+            </a:pPr>
+            <a:endParaRPr lang="en-US" sz="1800" dirty="0">
+              <a:solidFill>
+                <a:srgbClr val="2E2D2C"/>
+              </a:solidFill>
+              <a:latin typeface="Calibri (MS)"/>
+              <a:ea typeface="Calibri (MS)"/>
+              <a:cs typeface="Calibri (MS)"/>
+              <a:sym typeface="Calibri (MS)"/>
+            </a:endParaRPr>
+          </a:p>
+          <a:p>
+            <a:pPr marL="646747" lvl="1" indent="-323374" algn="l">
+              <a:lnSpc>
+                <a:spcPts val="2520"/>
+              </a:lnSpc>
+            </a:pPr>
+            <a:endParaRPr lang="en-US" dirty="0">
+              <a:solidFill>
+                <a:srgbClr val="2E2D2C"/>
+              </a:solidFill>
+              <a:latin typeface="Calibri (MS)"/>
+              <a:ea typeface="Calibri (MS)"/>
+              <a:cs typeface="Calibri (MS)"/>
+              <a:sym typeface="Calibri (MS)"/>
+            </a:endParaRPr>
+          </a:p>
+          <a:p>
+            <a:pPr marL="646747" lvl="1" indent="-323374" algn="l">
+              <a:lnSpc>
+                <a:spcPts val="2520"/>
+              </a:lnSpc>
+            </a:pPr>
+            <a:endParaRPr lang="en-US" sz="1800" dirty="0">
+              <a:solidFill>
+                <a:srgbClr val="2E2D2C"/>
+              </a:solidFill>
+              <a:latin typeface="Calibri (MS)"/>
+              <a:ea typeface="Calibri (MS)"/>
+              <a:cs typeface="Calibri (MS)"/>
+              <a:sym typeface="Calibri (MS)"/>
+            </a:endParaRPr>
+          </a:p>
+          <a:p>
+            <a:pPr marL="646747" lvl="1" indent="-323374" algn="l">
+              <a:lnSpc>
+                <a:spcPts val="2520"/>
+              </a:lnSpc>
+            </a:pPr>
+            <a:endParaRPr lang="en-US" dirty="0">
+              <a:solidFill>
+                <a:srgbClr val="2E2D2C"/>
+              </a:solidFill>
+              <a:latin typeface="Calibri (MS)"/>
+              <a:ea typeface="Calibri (MS)"/>
+              <a:cs typeface="Calibri (MS)"/>
+              <a:sym typeface="Calibri (MS)"/>
+            </a:endParaRPr>
+          </a:p>
+          <a:p>
+            <a:pPr marL="646747" lvl="1" indent="-323374" algn="l">
+              <a:lnSpc>
+                <a:spcPts val="2520"/>
+              </a:lnSpc>
+            </a:pPr>
+            <a:endParaRPr lang="en-US" sz="1800" dirty="0">
+              <a:solidFill>
+                <a:srgbClr val="2E2D2C"/>
+              </a:solidFill>
+              <a:latin typeface="Calibri (MS)"/>
+              <a:ea typeface="Calibri (MS)"/>
+              <a:cs typeface="Calibri (MS)"/>
+              <a:sym typeface="Calibri (MS)"/>
+            </a:endParaRPr>
+          </a:p>
+        </p:txBody>
+      </p:sp>
+      <p:sp>
+        <p:nvSpPr>
+          <p:cNvPr id="46" name="TextBox 46"/>
           <p:cNvSpPr txBox="1"/>
           <p:nvPr/>
         </p:nvSpPr>
         <p:spPr>
           <a:xfrm>
-            <a:off x="319092" y="6797004"/>
-            <a:ext cx="5709336" cy="430567"/>
+            <a:off x="9488443" y="6941906"/>
+            <a:ext cx="4291498" cy="2558393"/>
           </a:xfrm>
           <a:prstGeom prst="rect">
             <a:avLst/>
           </a:prstGeom>
         </p:spPr>
         <p:txBody>
-          <a:bodyPr lIns="0" tIns="0" rIns="0" bIns="0" rtlCol="0" anchor="t">
+          <a:bodyPr lIns="0" tIns="0" rIns="0" bIns="0" rtlCol="0" anchor="t" wrap="square">
             <a:spAutoFit/>
           </a:bodyPr>
           <a:lstStyle/>
           <a:p>
-            <a:pPr algn="l">
+            <a:pPr marL="554355" lvl="1" indent="-277177" algn="l">
               <a:lnSpc>
-                <a:spcPts val="3627"/>
+                <a:spcPts val="2160"/>
+              </a:lnSpc>
+              <a:buFont typeface="Arial"/>
+              <a:buChar char="•"/>
+            </a:pPr>
+            <a:r>
+              <a:rPr lang="en-US" sz="1400" dirty="0">
+                <a:solidFill>
+                  <a:srgbClr val="2E2D2C"/>
+                </a:solidFill>
+                <a:latin typeface="Calibri (MS)"/>
+                <a:ea typeface="Calibri (MS)"/>
+                <a:cs typeface="Calibri (MS)"/>
+                <a:sym typeface="Calibri (MS)"/>
+              </a:rPr>
+              <a:t>Communication, Adaptabilité, Travail d'équipe, Esprit d'initiative</a:t>
+            </a:r>
+          </a:p>
+          <a:p>
+            <a:pPr marL="554355" lvl="1" indent="-277177" algn="l">
+              <a:lnSpc>
+                <a:spcPts val="2160"/>
+              </a:lnSpc>
+              <a:buFont typeface="Arial"/>
+              <a:buChar char="•"/>
+            </a:pPr>
+            <a:endParaRPr lang="en-US" dirty="0">
+              <a:solidFill>
+                <a:srgbClr val="2E2D2C"/>
+              </a:solidFill>
+              <a:latin typeface="Calibri (MS)"/>
+              <a:ea typeface="Calibri (MS)"/>
+              <a:cs typeface="Calibri (MS)"/>
+              <a:sym typeface="Calibri (MS)"/>
+            </a:endParaRPr>
+          </a:p>
+          <a:p>
+            <a:pPr marL="554355" lvl="1" indent="-277177" algn="l">
+              <a:lnSpc>
+                <a:spcPts val="2160"/>
+              </a:lnSpc>
+              <a:buFont typeface="Arial"/>
+              <a:buChar char="•"/>
+            </a:pPr>
+            <a:endParaRPr lang="en-US" sz="1800" dirty="0">
+              <a:solidFill>
+                <a:srgbClr val="2E2D2C"/>
+              </a:solidFill>
+              <a:latin typeface="Calibri (MS)"/>
+              <a:ea typeface="Calibri (MS)"/>
+              <a:cs typeface="Calibri (MS)"/>
+              <a:sym typeface="Calibri (MS)"/>
+            </a:endParaRPr>
+          </a:p>
+          <a:p>
+            <a:pPr marL="554355" lvl="1" indent="-277177" algn="l">
+              <a:lnSpc>
+                <a:spcPts val="2160"/>
+              </a:lnSpc>
+              <a:buFont typeface="Arial"/>
+              <a:buChar char="•"/>
+            </a:pPr>
+            <a:endParaRPr lang="en-US" dirty="0">
+              <a:solidFill>
+                <a:srgbClr val="2E2D2C"/>
+              </a:solidFill>
+              <a:latin typeface="Calibri (MS)"/>
+              <a:ea typeface="Calibri (MS)"/>
+              <a:cs typeface="Calibri (MS)"/>
+              <a:sym typeface="Calibri (MS)"/>
+            </a:endParaRPr>
+          </a:p>
+          <a:p>
+            <a:pPr marL="554355" lvl="1" indent="-277177" algn="l">
+              <a:lnSpc>
+                <a:spcPts val="2160"/>
+              </a:lnSpc>
+              <a:buFont typeface="Arial"/>
+              <a:buChar char="•"/>
+            </a:pPr>
+            <a:endParaRPr lang="en-US" sz="1800" dirty="0">
+              <a:solidFill>
+                <a:srgbClr val="2E2D2C"/>
+              </a:solidFill>
+              <a:latin typeface="Calibri (MS)"/>
+              <a:ea typeface="Calibri (MS)"/>
+              <a:cs typeface="Calibri (MS)"/>
+              <a:sym typeface="Calibri (MS)"/>
+            </a:endParaRPr>
+          </a:p>
+          <a:p>
+            <a:pPr marL="277178" lvl="1" algn="l">
+              <a:lnSpc>
+                <a:spcPts val="2160"/>
               </a:lnSpc>
             </a:pPr>
-            <a:r>
-              <a:rPr lang="en-US" sz="2400" b="1" dirty="0">
-                <a:solidFill>
-                  <a:srgbClr val="FF52BA"/>
-                </a:solidFill>
-                <a:latin typeface="Arial MT Pro Bold"/>
-                <a:ea typeface="Arial MT Pro Bold"/>
-                <a:cs typeface="Arial MT Pro Bold"/>
-                <a:sym typeface="Arial MT Pro Bold"/>
-              </a:rPr>
-              <a:t>LANGUES:</a:t>
-            </a:r>
-          </a:p>
-        </p:txBody>
-      </p:sp>
-      <p:sp>
-        <p:nvSpPr>
-          <p:cNvPr id="15" name="TextBox 15"/>
+            <a:endParaRPr lang="en-US" sz="1800" dirty="0">
+              <a:solidFill>
+                <a:srgbClr val="2E2D2C"/>
+              </a:solidFill>
+              <a:latin typeface="Calibri (MS)"/>
+              <a:ea typeface="Calibri (MS)"/>
+              <a:cs typeface="Calibri (MS)"/>
+              <a:sym typeface="Calibri (MS)"/>
+            </a:endParaRPr>
+          </a:p>
+          <a:p>
+            <a:pPr marL="554355" lvl="1" indent="-277177" algn="l">
+              <a:lnSpc>
+                <a:spcPts val="2160"/>
+              </a:lnSpc>
+              <a:buFont typeface="Arial"/>
+              <a:buChar char="•"/>
+            </a:pPr>
+            <a:endParaRPr lang="en-US" dirty="0">
+              <a:solidFill>
+                <a:srgbClr val="2E2D2C"/>
+              </a:solidFill>
+              <a:latin typeface="Calibri (MS)"/>
+              <a:ea typeface="Calibri (MS)"/>
+              <a:cs typeface="Calibri (MS)"/>
+              <a:sym typeface="Calibri (MS)"/>
+            </a:endParaRPr>
+          </a:p>
+          <a:p>
+            <a:pPr marL="554355" lvl="1" indent="-277177" algn="l">
+              <a:lnSpc>
+                <a:spcPts val="2160"/>
+              </a:lnSpc>
+              <a:buFont typeface="Arial"/>
+              <a:buChar char="•"/>
+            </a:pPr>
+            <a:endParaRPr lang="en-US" sz="1800" dirty="0">
+              <a:solidFill>
+                <a:srgbClr val="2E2D2C"/>
+              </a:solidFill>
+              <a:latin typeface="Calibri (MS)"/>
+              <a:ea typeface="Calibri (MS)"/>
+              <a:cs typeface="Calibri (MS)"/>
+              <a:sym typeface="Calibri (MS)"/>
+            </a:endParaRPr>
+          </a:p>
+          <a:p>
+            <a:pPr marL="646747" lvl="1" indent="-323374" algn="l">
+              <a:lnSpc>
+                <a:spcPts val="2520"/>
+              </a:lnSpc>
+            </a:pPr>
+            <a:endParaRPr lang="en-US" sz="1800" dirty="0">
+              <a:solidFill>
+                <a:srgbClr val="2E2D2C"/>
+              </a:solidFill>
+              <a:latin typeface="Calibri (MS)"/>
+              <a:ea typeface="Calibri (MS)"/>
+              <a:cs typeface="Calibri (MS)"/>
+              <a:sym typeface="Calibri (MS)"/>
+            </a:endParaRPr>
+          </a:p>
+        </p:txBody>
+      </p:sp>
+      <p:sp>
+        <p:nvSpPr>
+          <p:cNvPr id="47" name="TextBox 47"/>
           <p:cNvSpPr txBox="1"/>
           <p:nvPr/>
         </p:nvSpPr>
         <p:spPr>
           <a:xfrm>
-            <a:off x="1085817" y="4250010"/>
-            <a:ext cx="3041855" cy="496160"/>
+            <a:off x="14347050" y="6941896"/>
+            <a:ext cx="3873903" cy="2558393"/>
           </a:xfrm>
           <a:prstGeom prst="rect">
             <a:avLst/>
@@ -3626,966 +5961,188 @@
           </a:bodyPr>
           <a:lstStyle/>
           <a:p>
-            <a:pPr algn="ctr">
+            <a:pPr marL="388620" lvl="1" indent="-194310" algn="l">
               <a:lnSpc>
-                <a:spcPts val="3627"/>
+                <a:spcPts val="2160"/>
               </a:lnSpc>
-              <a:spcBef>
-                <a:spcPct val="0"/>
-              </a:spcBef>
+              <a:buFont typeface="Arial"/>
+              <a:buChar char="•"/>
             </a:pPr>
             <a:r>
-              <a:rPr lang="en-US" sz="2591" b="1" dirty="0">
+              <a:rPr lang="en-US" sz="1400" dirty="0">
                 <a:solidFill>
-                  <a:srgbClr val="FFFFFF"/>
+                  <a:srgbClr val="2E2D2C"/>
                 </a:solidFill>
-                <a:latin typeface="Arial MT Pro Bold"/>
-                <a:ea typeface="Arial MT Pro Bold"/>
-                <a:cs typeface="Arial MT Pro Bold"/>
-                <a:sym typeface="Arial MT Pro Bold"/>
+                <a:latin typeface="Calibri (MS)"/>
+                <a:ea typeface="Calibri (MS)"/>
+                <a:cs typeface="Calibri (MS)"/>
+                <a:sym typeface="Calibri (MS)"/>
               </a:rPr>
-              <a:t>Mouaki Maryam</a:t>
-            </a:r>
-          </a:p>
-        </p:txBody>
-      </p:sp>
-      <p:sp>
-        <p:nvSpPr>
-          <p:cNvPr id="16" name="TextBox 16"/>
-          <p:cNvSpPr txBox="1"/>
-          <p:nvPr/>
-        </p:nvSpPr>
-        <p:spPr>
-          <a:xfrm>
-            <a:off x="807859" y="7188389"/>
-            <a:ext cx="3751544" cy="2324960"/>
-          </a:xfrm>
-          <a:prstGeom prst="rect">
-            <a:avLst/>
-          </a:prstGeom>
-        </p:spPr>
-        <p:txBody>
-          <a:bodyPr lIns="0" tIns="0" rIns="0" bIns="0" rtlCol="0" anchor="t" wrap="square">
-            <a:spAutoFit/>
-          </a:bodyPr>
-          <a:lstStyle/>
-          <a:p>
-            <a:pPr marL="0" lvl="0" indent="0" algn="l">
+              <a:t>ANSYS Fluent, Solidworks, STM32CubeIDE, TIA PORTAL, VISUAL STUDIO</a:t>
+            </a:r>
+          </a:p>
+          <a:p>
+            <a:pPr marL="388620" lvl="1" indent="-194310" algn="l">
               <a:lnSpc>
-                <a:spcPts val="3627"/>
+                <a:spcPts val="2160"/>
               </a:lnSpc>
-              <a:spcBef>
-                <a:spcPct val="0"/>
-              </a:spcBef>
+              <a:buFont typeface="Arial"/>
+              <a:buChar char="•"/>
             </a:pPr>
-            <a:r>
-              <a:rPr lang="en-US" b="1" u="none" strike="noStrike" dirty="0">
-                <a:solidFill>
-                  <a:srgbClr val="FFFFFF"/>
-                </a:solidFill>
-                <a:latin typeface="Arial MT Pro Bold"/>
-                <a:ea typeface="Arial MT Pro Bold"/>
-                <a:cs typeface="Arial MT Pro Bold"/>
-                <a:sym typeface="Arial MT Pro Bold"/>
-              </a:rPr>
-              <a:t>arabe — Langue maternelle
-anglais — C1 (Rosetta Stone)
-français — B2 (Rosetta Stone)
-espagnol — A1 (Rosetta Stone)</a:t>
-            </a:r>
-          </a:p>
-          <a:p>
-            <a:pPr marL="0" lvl="0" indent="0" algn="l">
+            <a:endParaRPr lang="en-US" dirty="0">
+              <a:solidFill>
+                <a:srgbClr val="2E2D2C"/>
+              </a:solidFill>
+              <a:latin typeface="Calibri (MS)"/>
+              <a:ea typeface="Calibri (MS)"/>
+              <a:cs typeface="Calibri (MS)"/>
+              <a:sym typeface="Calibri (MS)"/>
+            </a:endParaRPr>
+          </a:p>
+          <a:p>
+            <a:pPr marL="388620" lvl="1" indent="-194310" algn="l">
               <a:lnSpc>
-                <a:spcPts val="3627"/>
+                <a:spcPts val="2160"/>
               </a:lnSpc>
-              <a:spcBef>
-                <a:spcPct val="0"/>
-              </a:spcBef>
+              <a:buFont typeface="Arial"/>
+              <a:buChar char="•"/>
             </a:pPr>
-            <a:endParaRPr lang="en-US" b="1" u="none" strike="noStrike" dirty="0">
+            <a:endParaRPr lang="en-US" sz="1800" dirty="0">
               <a:solidFill>
-                <a:srgbClr val="FFFFFF"/>
+                <a:srgbClr val="2E2D2C"/>
               </a:solidFill>
-              <a:latin typeface="Arial MT Pro Bold"/>
-              <a:ea typeface="Arial MT Pro Bold"/>
-              <a:cs typeface="Arial MT Pro Bold"/>
-              <a:sym typeface="Arial MT Pro Bold"/>
+              <a:latin typeface="Calibri (MS)"/>
+              <a:ea typeface="Calibri (MS)"/>
+              <a:cs typeface="Calibri (MS)"/>
+              <a:sym typeface="Calibri (MS)"/>
             </a:endParaRPr>
           </a:p>
           <a:p>
-            <a:pPr marL="0" lvl="0" indent="0" algn="l">
+            <a:pPr marL="388620" lvl="1" indent="-194310" algn="l">
               <a:lnSpc>
-                <a:spcPts val="3627"/>
+                <a:spcPts val="2160"/>
               </a:lnSpc>
-              <a:spcBef>
-                <a:spcPct val="0"/>
-              </a:spcBef>
+              <a:buFont typeface="Arial"/>
+              <a:buChar char="•"/>
             </a:pPr>
-            <a:endParaRPr lang="en-US" b="1" u="none" strike="noStrike" dirty="0">
+            <a:endParaRPr lang="en-US" dirty="0">
               <a:solidFill>
-                <a:srgbClr val="FFFFFF"/>
+                <a:srgbClr val="2E2D2C"/>
               </a:solidFill>
-              <a:latin typeface="Arial MT Pro Bold"/>
-              <a:ea typeface="Arial MT Pro Bold"/>
-              <a:cs typeface="Arial MT Pro Bold"/>
-              <a:sym typeface="Arial MT Pro Bold"/>
+              <a:latin typeface="Calibri (MS)"/>
+              <a:ea typeface="Calibri (MS)"/>
+              <a:cs typeface="Calibri (MS)"/>
+              <a:sym typeface="Calibri (MS)"/>
             </a:endParaRPr>
           </a:p>
           <a:p>
-            <a:pPr marL="0" lvl="0" indent="0" algn="l">
+            <a:pPr marL="388620" lvl="1" indent="-194310" algn="l">
               <a:lnSpc>
-                <a:spcPts val="3627"/>
+                <a:spcPts val="2160"/>
               </a:lnSpc>
-              <a:spcBef>
-                <a:spcPct val="0"/>
-              </a:spcBef>
+              <a:buFont typeface="Arial"/>
+              <a:buChar char="•"/>
             </a:pPr>
-            <a:endParaRPr lang="en-US" b="1" u="none" strike="noStrike" dirty="0">
+            <a:endParaRPr lang="en-US" sz="1800" dirty="0">
               <a:solidFill>
-                <a:srgbClr val="FFFFFF"/>
+                <a:srgbClr val="2E2D2C"/>
               </a:solidFill>
-              <a:latin typeface="Arial MT Pro Bold"/>
-              <a:ea typeface="Arial MT Pro Bold"/>
-              <a:cs typeface="Arial MT Pro Bold"/>
-              <a:sym typeface="Arial MT Pro Bold"/>
+              <a:latin typeface="Calibri (MS)"/>
+              <a:ea typeface="Calibri (MS)"/>
+              <a:cs typeface="Calibri (MS)"/>
+              <a:sym typeface="Calibri (MS)"/>
             </a:endParaRPr>
           </a:p>
           <a:p>
-            <a:pPr marL="0" lvl="0" indent="0" algn="l">
+            <a:pPr marL="388620" lvl="1" indent="-194310" algn="l">
               <a:lnSpc>
-                <a:spcPts val="3627"/>
+                <a:spcPts val="2160"/>
               </a:lnSpc>
-              <a:spcBef>
-                <a:spcPct val="0"/>
-              </a:spcBef>
+              <a:buFont typeface="Arial"/>
+              <a:buChar char="•"/>
             </a:pPr>
-            <a:endParaRPr lang="en-US" b="1" u="none" strike="noStrike" dirty="0">
+            <a:endParaRPr lang="en-US" dirty="0">
               <a:solidFill>
-                <a:srgbClr val="FFFFFF"/>
+                <a:srgbClr val="2E2D2C"/>
               </a:solidFill>
-              <a:latin typeface="Arial MT Pro Bold"/>
-              <a:ea typeface="Arial MT Pro Bold"/>
-              <a:cs typeface="Arial MT Pro Bold"/>
-              <a:sym typeface="Arial MT Pro Bold"/>
+              <a:latin typeface="Calibri (MS)"/>
+              <a:ea typeface="Calibri (MS)"/>
+              <a:cs typeface="Calibri (MS)"/>
+              <a:sym typeface="Calibri (MS)"/>
             </a:endParaRPr>
           </a:p>
-        </p:txBody>
-      </p:sp>
-      <p:sp>
-        <p:nvSpPr>
-          <p:cNvPr id="17" name="TextBox 17"/>
-          <p:cNvSpPr txBox="1"/>
-          <p:nvPr/>
-        </p:nvSpPr>
-        <p:spPr>
-          <a:xfrm>
-            <a:off x="6185963" y="933450"/>
-            <a:ext cx="11583532" cy="4225515"/>
-          </a:xfrm>
-          <a:prstGeom prst="rect">
-            <a:avLst/>
-          </a:prstGeom>
-        </p:spPr>
-        <p:txBody>
-          <a:bodyPr lIns="0" tIns="0" rIns="0" bIns="0" rtlCol="0" anchor="t" wrap="square">
-            <a:normAutofit/>
-          </a:bodyPr>
-          <a:lstStyle/>
-          <a:p>
-            <a:pPr algn="ctr">
+          <a:p>
+            <a:pPr marL="388620" lvl="1" indent="-194310" algn="l">
               <a:lnSpc>
-                <a:spcPts val="3347"/>
+                <a:spcPts val="2160"/>
               </a:lnSpc>
-              <a:spcBef>
-                <a:spcPct val="0"/>
-              </a:spcBef>
+              <a:buFont typeface="Arial"/>
+              <a:buChar char="•"/>
             </a:pPr>
-          </a:p>
-          <a:p>
-            <a:pPr>
-              <a:defRPr sz="1600" b="1">
-                <a:solidFill>
-                  <a:srgbClr val="FF69B4"/>
-                </a:solidFill>
-                <a:latin typeface="Arial MT Pro Bold"/>
-              </a:defRPr>
+            <a:endParaRPr lang="en-US" sz="1800" dirty="0">
+              <a:solidFill>
+                <a:srgbClr val="2E2D2C"/>
+              </a:solidFill>
+              <a:latin typeface="Calibri (MS)"/>
+              <a:ea typeface="Calibri (MS)"/>
+              <a:cs typeface="Calibri (MS)"/>
+              <a:sym typeface="Calibri (MS)"/>
+            </a:endParaRPr>
+          </a:p>
+          <a:p>
+            <a:pPr marL="388620" lvl="1" indent="-194310" algn="l">
+              <a:lnSpc>
+                <a:spcPts val="2160"/>
+              </a:lnSpc>
+              <a:buFont typeface="Arial"/>
+              <a:buChar char="•"/>
             </a:pPr>
-            <a:r>
-              <a:t>Plateforme de Collecte et Gestion d’Appels d’Offres Publics</a:t>
-            </a:r>
-          </a:p>
-          <a:p>
-            <a:pPr>
-              <a:defRPr sz="1300" b="1">
-                <a:solidFill>
-                  <a:srgbClr val="000000"/>
-                </a:solidFill>
-                <a:latin typeface="Arial MT Pro Bold"/>
-              </a:defRPr>
+            <a:endParaRPr lang="en-US" sz="1800" dirty="0">
+              <a:solidFill>
+                <a:srgbClr val="2E2D2C"/>
+              </a:solidFill>
+              <a:latin typeface="Calibri (MS)"/>
+              <a:ea typeface="Calibri (MS)"/>
+              <a:cs typeface="Calibri (MS)"/>
+              <a:sym typeface="Calibri (MS)"/>
+            </a:endParaRPr>
+          </a:p>
+          <a:p>
+            <a:pPr marL="702310" lvl="1" indent="-351155" algn="l">
+              <a:lnSpc>
+                <a:spcPts val="2520"/>
+              </a:lnSpc>
             </a:pPr>
-            <a:r>
-              <a:t>Developpement d’une plateforme backend pour la collecte, le stockage et la gestion d’appels d’offres publics via web scraping et API REST. Utilisation de FastAPI, MongoDB, Docker, Docker Compose, Python, Pandas.</a:t>
-            </a:r>
-          </a:p>
-          <a:p>
-            <a:pPr>
-              <a:defRPr sz="800"/>
-            </a:pPr>
-          </a:p>
-          <a:p>
-            <a:pPr>
-              <a:defRPr sz="1600" b="1">
-                <a:solidFill>
-                  <a:srgbClr val="FF69B4"/>
-                </a:solidFill>
-                <a:latin typeface="Arial MT Pro Bold"/>
-              </a:defRPr>
-            </a:pPr>
-            <a:r>
-              <a:t>Système de Collecte et Recherche de Données Sanctionnées</a:t>
-            </a:r>
-          </a:p>
-          <a:p>
-            <a:pPr>
-              <a:defRPr sz="1300" b="1">
-                <a:solidFill>
-                  <a:srgbClr val="000000"/>
-                </a:solidFill>
-                <a:latin typeface="Arial MT Pro Bold"/>
-              </a:defRPr>
-            </a:pPr>
-            <a:r>
-              <a:t>Conception d’un système utilisant Prefect pour l'orchestration, Elasticsearch pour l'indexation, et FastAPI pour une API de recherche. Utilisation de Python, Prefect, Elasticsearch, FastAPI, Levenshtein, APScheduler, Pandas, Plotly.</a:t>
-            </a:r>
-          </a:p>
-          <a:p>
-            <a:pPr>
-              <a:defRPr sz="800"/>
-            </a:pPr>
-          </a:p>
-          <a:p>
-            <a:pPr>
-              <a:defRPr sz="1600" b="1">
-                <a:solidFill>
-                  <a:srgbClr val="FF69B4"/>
-                </a:solidFill>
-                <a:latin typeface="Arial MT Pro Bold"/>
-              </a:defRPr>
-            </a:pPr>
-            <a:r>
-              <a:t>Modèle Prédiction de Quantité d’Importation de Produits</a:t>
-            </a:r>
-          </a:p>
-          <a:p>
-            <a:pPr>
-              <a:defRPr sz="1300" b="1">
-                <a:solidFill>
-                  <a:srgbClr val="000000"/>
-                </a:solidFill>
-                <a:latin typeface="Arial MT Pro Bold"/>
-              </a:defRPr>
-            </a:pPr>
-            <a:r>
-              <a:t>Developpement d’un modèle de machine learning basé sur XGBoost pour prédire la quantité à importer de chaque produit identifié par un CODE SH, en exploitant des données économiques et douanières. Utilisation de Python, Pandas, Scikit-learn, Matplotlib, Seaborn.</a:t>
-            </a:r>
-          </a:p>
-          <a:p>
-            <a:pPr>
-              <a:defRPr sz="800"/>
-            </a:pPr>
-          </a:p>
-          <a:p>
-            <a:pPr>
-              <a:defRPr sz="1600" b="1">
-                <a:solidFill>
-                  <a:srgbClr val="FF69B4"/>
-                </a:solidFill>
-                <a:latin typeface="Arial MT Pro Bold"/>
-              </a:defRPr>
-            </a:pPr>
-            <a:r>
-              <a:t>RedGuard (Hackathon AI Coding Tech 2025)</a:t>
-            </a:r>
-          </a:p>
-          <a:p>
-            <a:pPr>
-              <a:defRPr sz="1300" b="1">
-                <a:solidFill>
-                  <a:srgbClr val="000000"/>
-                </a:solidFill>
-                <a:latin typeface="Arial MT Pro Bold"/>
-              </a:defRPr>
-            </a:pPr>
-            <a:r>
-              <a:t>Developpement d’un agent de sécurité IA pour détecter et classifier les intrusions. Utilisation de Python, Scikit-learn , Pandas, NumPy, Streamlit.</a:t>
-            </a:r>
-          </a:p>
-        </p:txBody>
-      </p:sp>
-      <p:sp>
-        <p:nvSpPr>
-          <p:cNvPr id="18" name="TextBox 18"/>
-          <p:cNvSpPr txBox="1"/>
-          <p:nvPr/>
-        </p:nvSpPr>
-        <p:spPr>
-          <a:xfrm>
-            <a:off x="6028428" y="5805283"/>
-            <a:ext cx="3115572" cy="4225515"/>
-          </a:xfrm>
-          <a:prstGeom prst="rect">
-            <a:avLst/>
-          </a:prstGeom>
-        </p:spPr>
-        <p:txBody>
-          <a:bodyPr lIns="0" tIns="0" rIns="0" bIns="0" rtlCol="0" anchor="t" wrap="square">
-            <a:spAutoFit/>
-          </a:bodyPr>
-          <a:lstStyle/>
-          <a:p>
-            <a:pPr marL="0" lvl="0" indent="0" algn="ctr">
-              <a:lnSpc>
-                <a:spcPts val="3347"/>
-              </a:lnSpc>
-              <a:spcBef>
-                <a:spcPct val="0"/>
-              </a:spcBef>
-            </a:pPr>
-            <a:r>
-              <a:rPr lang="en-US" sz="1400" b="1" u="none" strike="noStrike" dirty="0">
-                <a:solidFill>
-                  <a:srgbClr val="000000"/>
-                </a:solidFill>
-                <a:latin typeface="Arial MT Pro Bold"/>
-                <a:ea typeface="Arial MT Pro Bold"/>
-                <a:cs typeface="Arial MT Pro Bold"/>
-                <a:sym typeface="Arial MT Pro Bold"/>
-              </a:rPr>
-              <a:t>Python, Java, C, SQL, PL/SQL, FastAPI, Pandas, NumPy, Streamlit, Matplotlib, Prefect, APScheduler, XGBoost, Seaborn</a:t>
-            </a:r>
-          </a:p>
-          <a:p>
-            <a:pPr marL="0" lvl="0" indent="0" algn="ctr">
-              <a:lnSpc>
-                <a:spcPts val="3347"/>
-              </a:lnSpc>
-              <a:spcBef>
-                <a:spcPct val="0"/>
-              </a:spcBef>
-            </a:pPr>
-            <a:endParaRPr lang="en-US" sz="2391" b="1" u="none" strike="noStrike" dirty="0">
+            <a:endParaRPr lang="en-US" sz="1800" dirty="0">
               <a:solidFill>
-                <a:srgbClr val="000000"/>
+                <a:srgbClr val="2E2D2C"/>
               </a:solidFill>
-              <a:latin typeface="Arial MT Pro Bold"/>
-              <a:ea typeface="Arial MT Pro Bold"/>
-              <a:cs typeface="Arial MT Pro Bold"/>
-              <a:sym typeface="Arial MT Pro Bold"/>
-            </a:endParaRPr>
-          </a:p>
-          <a:p>
-            <a:pPr marL="0" lvl="0" indent="0" algn="ctr">
-              <a:lnSpc>
-                <a:spcPts val="3347"/>
-              </a:lnSpc>
-              <a:spcBef>
-                <a:spcPct val="0"/>
-              </a:spcBef>
-            </a:pPr>
-            <a:endParaRPr lang="en-US" sz="2391" b="1" u="none" strike="noStrike" dirty="0">
-              <a:solidFill>
-                <a:srgbClr val="000000"/>
-              </a:solidFill>
-              <a:latin typeface="Arial MT Pro Bold"/>
-              <a:ea typeface="Arial MT Pro Bold"/>
-              <a:cs typeface="Arial MT Pro Bold"/>
-              <a:sym typeface="Arial MT Pro Bold"/>
-            </a:endParaRPr>
-          </a:p>
-          <a:p>
-            <a:pPr marL="0" lvl="0" indent="0" algn="ctr">
-              <a:lnSpc>
-                <a:spcPts val="3347"/>
-              </a:lnSpc>
-              <a:spcBef>
-                <a:spcPct val="0"/>
-              </a:spcBef>
-            </a:pPr>
-            <a:endParaRPr lang="en-US" sz="2391" b="1" u="none" strike="noStrike" dirty="0">
-              <a:solidFill>
-                <a:srgbClr val="000000"/>
-              </a:solidFill>
-              <a:latin typeface="Arial MT Pro Bold"/>
-              <a:ea typeface="Arial MT Pro Bold"/>
-              <a:cs typeface="Arial MT Pro Bold"/>
-              <a:sym typeface="Arial MT Pro Bold"/>
-            </a:endParaRPr>
-          </a:p>
-          <a:p>
-            <a:pPr marL="0" lvl="0" indent="0" algn="ctr">
-              <a:lnSpc>
-                <a:spcPts val="3347"/>
-              </a:lnSpc>
-              <a:spcBef>
-                <a:spcPct val="0"/>
-              </a:spcBef>
-            </a:pPr>
-            <a:endParaRPr lang="en-US" sz="2391" b="1" u="none" strike="noStrike" dirty="0">
-              <a:solidFill>
-                <a:srgbClr val="000000"/>
-              </a:solidFill>
-              <a:latin typeface="Arial MT Pro Bold"/>
-              <a:ea typeface="Arial MT Pro Bold"/>
-              <a:cs typeface="Arial MT Pro Bold"/>
-              <a:sym typeface="Arial MT Pro Bold"/>
-            </a:endParaRPr>
-          </a:p>
-          <a:p>
-            <a:pPr marL="0" lvl="0" indent="0" algn="ctr">
-              <a:lnSpc>
-                <a:spcPts val="3347"/>
-              </a:lnSpc>
-              <a:spcBef>
-                <a:spcPct val="0"/>
-              </a:spcBef>
-            </a:pPr>
-            <a:endParaRPr lang="en-US" sz="2391" b="1" u="none" strike="noStrike" dirty="0">
-              <a:solidFill>
-                <a:srgbClr val="000000"/>
-              </a:solidFill>
-              <a:latin typeface="Arial MT Pro Bold"/>
-              <a:ea typeface="Arial MT Pro Bold"/>
-              <a:cs typeface="Arial MT Pro Bold"/>
-              <a:sym typeface="Arial MT Pro Bold"/>
-            </a:endParaRPr>
-          </a:p>
-          <a:p>
-            <a:pPr marL="0" lvl="0" indent="0" algn="ctr">
-              <a:lnSpc>
-                <a:spcPts val="3347"/>
-              </a:lnSpc>
-              <a:spcBef>
-                <a:spcPct val="0"/>
-              </a:spcBef>
-            </a:pPr>
-            <a:endParaRPr lang="en-US" sz="2391" b="1" u="none" strike="noStrike" dirty="0">
-              <a:solidFill>
-                <a:srgbClr val="000000"/>
-              </a:solidFill>
-              <a:latin typeface="Arial MT Pro Bold"/>
-              <a:ea typeface="Arial MT Pro Bold"/>
-              <a:cs typeface="Arial MT Pro Bold"/>
-              <a:sym typeface="Arial MT Pro Bold"/>
-            </a:endParaRPr>
-          </a:p>
-          <a:p>
-            <a:pPr marL="0" lvl="0" indent="0" algn="ctr">
-              <a:lnSpc>
-                <a:spcPts val="3347"/>
-              </a:lnSpc>
-              <a:spcBef>
-                <a:spcPct val="0"/>
-              </a:spcBef>
-            </a:pPr>
-            <a:endParaRPr lang="en-US" sz="2391" b="1" u="none" strike="noStrike" dirty="0">
-              <a:solidFill>
-                <a:srgbClr val="000000"/>
-              </a:solidFill>
-              <a:latin typeface="Arial MT Pro Bold"/>
-              <a:ea typeface="Arial MT Pro Bold"/>
-              <a:cs typeface="Arial MT Pro Bold"/>
-              <a:sym typeface="Arial MT Pro Bold"/>
-            </a:endParaRPr>
-          </a:p>
-          <a:p>
-            <a:pPr marL="0" lvl="0" indent="0" algn="ctr">
-              <a:lnSpc>
-                <a:spcPts val="3347"/>
-              </a:lnSpc>
-              <a:spcBef>
-                <a:spcPct val="0"/>
-              </a:spcBef>
-            </a:pPr>
-            <a:endParaRPr lang="en-US" sz="2391" b="1" u="none" strike="noStrike" dirty="0">
-              <a:solidFill>
-                <a:srgbClr val="000000"/>
-              </a:solidFill>
-              <a:latin typeface="Arial MT Pro Bold"/>
-              <a:ea typeface="Arial MT Pro Bold"/>
-              <a:cs typeface="Arial MT Pro Bold"/>
-              <a:sym typeface="Arial MT Pro Bold"/>
-            </a:endParaRPr>
-          </a:p>
-          <a:p>
-            <a:pPr marL="0" lvl="0" indent="0" algn="ctr">
-              <a:lnSpc>
-                <a:spcPts val="3347"/>
-              </a:lnSpc>
-              <a:spcBef>
-                <a:spcPct val="0"/>
-              </a:spcBef>
-            </a:pPr>
-            <a:endParaRPr lang="en-US" sz="2391" b="1" u="none" strike="noStrike" dirty="0">
-              <a:solidFill>
-                <a:srgbClr val="000000"/>
-              </a:solidFill>
-              <a:latin typeface="Arial MT Pro Bold"/>
-              <a:ea typeface="Arial MT Pro Bold"/>
-              <a:cs typeface="Arial MT Pro Bold"/>
-              <a:sym typeface="Arial MT Pro Bold"/>
-            </a:endParaRPr>
-          </a:p>
-        </p:txBody>
-      </p:sp>
-      <p:sp>
-        <p:nvSpPr>
-          <p:cNvPr id="19" name="TextBox 19"/>
-          <p:cNvSpPr txBox="1"/>
-          <p:nvPr/>
-        </p:nvSpPr>
-        <p:spPr>
-          <a:xfrm>
-            <a:off x="9530636" y="5805283"/>
-            <a:ext cx="3265717" cy="4225515"/>
-          </a:xfrm>
-          <a:prstGeom prst="rect">
-            <a:avLst/>
-          </a:prstGeom>
-        </p:spPr>
-        <p:txBody>
-          <a:bodyPr lIns="0" tIns="0" rIns="0" bIns="0" rtlCol="0" anchor="t" wrap="square">
-            <a:spAutoFit/>
-          </a:bodyPr>
-          <a:lstStyle/>
-          <a:p>
-            <a:pPr marL="0" lvl="0" indent="0" algn="ctr">
-              <a:lnSpc>
-                <a:spcPts val="3347"/>
-              </a:lnSpc>
-              <a:spcBef>
-                <a:spcPct val="0"/>
-              </a:spcBef>
-            </a:pPr>
-            <a:r>
-              <a:rPr lang="en-US" sz="1400" b="1" u="none" strike="noStrike" dirty="0">
-                <a:solidFill>
-                  <a:srgbClr val="000000"/>
-                </a:solidFill>
-                <a:latin typeface="Arial MT Pro Bold"/>
-                <a:ea typeface="Arial MT Pro Bold"/>
-                <a:cs typeface="Arial MT Pro Bold"/>
-                <a:sym typeface="Arial MT Pro Bold"/>
-              </a:rPr>
-              <a:t/>
-            </a:r>
-          </a:p>
-          <a:p>
-            <a:pPr marL="0" lvl="0" indent="0" algn="ctr">
-              <a:lnSpc>
-                <a:spcPts val="3347"/>
-              </a:lnSpc>
-              <a:spcBef>
-                <a:spcPct val="0"/>
-              </a:spcBef>
-            </a:pPr>
-            <a:endParaRPr lang="en-US" sz="2391" b="1" u="none" strike="noStrike" dirty="0">
-              <a:solidFill>
-                <a:srgbClr val="000000"/>
-              </a:solidFill>
-              <a:latin typeface="Arial MT Pro Bold"/>
-              <a:ea typeface="Arial MT Pro Bold"/>
-              <a:cs typeface="Arial MT Pro Bold"/>
-              <a:sym typeface="Arial MT Pro Bold"/>
-            </a:endParaRPr>
-          </a:p>
-          <a:p>
-            <a:pPr marL="0" lvl="0" indent="0" algn="ctr">
-              <a:lnSpc>
-                <a:spcPts val="3347"/>
-              </a:lnSpc>
-              <a:spcBef>
-                <a:spcPct val="0"/>
-              </a:spcBef>
-            </a:pPr>
-            <a:endParaRPr lang="en-US" sz="2391" b="1" u="none" strike="noStrike" dirty="0">
-              <a:solidFill>
-                <a:srgbClr val="000000"/>
-              </a:solidFill>
-              <a:latin typeface="Arial MT Pro Bold"/>
-              <a:ea typeface="Arial MT Pro Bold"/>
-              <a:cs typeface="Arial MT Pro Bold"/>
-              <a:sym typeface="Arial MT Pro Bold"/>
-            </a:endParaRPr>
-          </a:p>
-          <a:p>
-            <a:pPr marL="0" lvl="0" indent="0" algn="ctr">
-              <a:lnSpc>
-                <a:spcPts val="3347"/>
-              </a:lnSpc>
-              <a:spcBef>
-                <a:spcPct val="0"/>
-              </a:spcBef>
-            </a:pPr>
-            <a:endParaRPr lang="en-US" sz="2391" b="1" u="none" strike="noStrike" dirty="0">
-              <a:solidFill>
-                <a:srgbClr val="000000"/>
-              </a:solidFill>
-              <a:latin typeface="Arial MT Pro Bold"/>
-              <a:ea typeface="Arial MT Pro Bold"/>
-              <a:cs typeface="Arial MT Pro Bold"/>
-              <a:sym typeface="Arial MT Pro Bold"/>
-            </a:endParaRPr>
-          </a:p>
-          <a:p>
-            <a:pPr marL="0" lvl="0" indent="0" algn="ctr">
-              <a:lnSpc>
-                <a:spcPts val="3347"/>
-              </a:lnSpc>
-              <a:spcBef>
-                <a:spcPct val="0"/>
-              </a:spcBef>
-            </a:pPr>
-            <a:endParaRPr lang="en-US" sz="2391" b="1" u="none" strike="noStrike" dirty="0">
-              <a:solidFill>
-                <a:srgbClr val="000000"/>
-              </a:solidFill>
-              <a:latin typeface="Arial MT Pro Bold"/>
-              <a:ea typeface="Arial MT Pro Bold"/>
-              <a:cs typeface="Arial MT Pro Bold"/>
-              <a:sym typeface="Arial MT Pro Bold"/>
-            </a:endParaRPr>
-          </a:p>
-          <a:p>
-            <a:pPr marL="0" lvl="0" indent="0" algn="ctr">
-              <a:lnSpc>
-                <a:spcPts val="3347"/>
-              </a:lnSpc>
-              <a:spcBef>
-                <a:spcPct val="0"/>
-              </a:spcBef>
-            </a:pPr>
-            <a:endParaRPr lang="en-US" sz="2391" b="1" u="none" strike="noStrike" dirty="0">
-              <a:solidFill>
-                <a:srgbClr val="000000"/>
-              </a:solidFill>
-              <a:latin typeface="Arial MT Pro Bold"/>
-              <a:ea typeface="Arial MT Pro Bold"/>
-              <a:cs typeface="Arial MT Pro Bold"/>
-              <a:sym typeface="Arial MT Pro Bold"/>
-            </a:endParaRPr>
-          </a:p>
-          <a:p>
-            <a:pPr marL="0" lvl="0" indent="0" algn="ctr">
-              <a:lnSpc>
-                <a:spcPts val="3347"/>
-              </a:lnSpc>
-              <a:spcBef>
-                <a:spcPct val="0"/>
-              </a:spcBef>
-            </a:pPr>
-            <a:endParaRPr lang="en-US" sz="2391" b="1" u="none" strike="noStrike" dirty="0">
-              <a:solidFill>
-                <a:srgbClr val="000000"/>
-              </a:solidFill>
-              <a:latin typeface="Arial MT Pro Bold"/>
-              <a:ea typeface="Arial MT Pro Bold"/>
-              <a:cs typeface="Arial MT Pro Bold"/>
-              <a:sym typeface="Arial MT Pro Bold"/>
-            </a:endParaRPr>
-          </a:p>
-          <a:p>
-            <a:pPr marL="0" lvl="0" indent="0" algn="ctr">
-              <a:lnSpc>
-                <a:spcPts val="3347"/>
-              </a:lnSpc>
-              <a:spcBef>
-                <a:spcPct val="0"/>
-              </a:spcBef>
-            </a:pPr>
-            <a:endParaRPr lang="en-US" sz="2391" b="1" u="none" strike="noStrike" dirty="0">
-              <a:solidFill>
-                <a:srgbClr val="000000"/>
-              </a:solidFill>
-              <a:latin typeface="Arial MT Pro Bold"/>
-              <a:ea typeface="Arial MT Pro Bold"/>
-              <a:cs typeface="Arial MT Pro Bold"/>
-              <a:sym typeface="Arial MT Pro Bold"/>
-            </a:endParaRPr>
-          </a:p>
-          <a:p>
-            <a:pPr marL="0" lvl="0" indent="0" algn="ctr">
-              <a:lnSpc>
-                <a:spcPts val="3347"/>
-              </a:lnSpc>
-              <a:spcBef>
-                <a:spcPct val="0"/>
-              </a:spcBef>
-            </a:pPr>
-            <a:endParaRPr lang="en-US" sz="2391" b="1" u="none" strike="noStrike" dirty="0">
-              <a:solidFill>
-                <a:srgbClr val="000000"/>
-              </a:solidFill>
-              <a:latin typeface="Arial MT Pro Bold"/>
-              <a:ea typeface="Arial MT Pro Bold"/>
-              <a:cs typeface="Arial MT Pro Bold"/>
-              <a:sym typeface="Arial MT Pro Bold"/>
-            </a:endParaRPr>
-          </a:p>
-          <a:p>
-            <a:pPr marL="0" lvl="0" indent="0" algn="ctr">
-              <a:lnSpc>
-                <a:spcPts val="3347"/>
-              </a:lnSpc>
-              <a:spcBef>
-                <a:spcPct val="0"/>
-              </a:spcBef>
-            </a:pPr>
-            <a:endParaRPr lang="en-US" sz="2391" b="1" u="none" strike="noStrike" dirty="0">
-              <a:solidFill>
-                <a:srgbClr val="000000"/>
-              </a:solidFill>
-              <a:latin typeface="Arial MT Pro Bold"/>
-              <a:ea typeface="Arial MT Pro Bold"/>
-              <a:cs typeface="Arial MT Pro Bold"/>
-              <a:sym typeface="Arial MT Pro Bold"/>
-            </a:endParaRPr>
-          </a:p>
-        </p:txBody>
-      </p:sp>
-      <p:sp>
-        <p:nvSpPr>
-          <p:cNvPr id="20" name="TextBox 20"/>
-          <p:cNvSpPr txBox="1"/>
-          <p:nvPr/>
-        </p:nvSpPr>
-        <p:spPr>
-          <a:xfrm>
-            <a:off x="14223688" y="5805283"/>
-            <a:ext cx="3035612" cy="4225515"/>
-          </a:xfrm>
-          <a:prstGeom prst="rect">
-            <a:avLst/>
-          </a:prstGeom>
-        </p:spPr>
-        <p:txBody>
-          <a:bodyPr lIns="0" tIns="0" rIns="0" bIns="0" rtlCol="0" anchor="t" wrap="square">
-            <a:spAutoFit/>
-          </a:bodyPr>
-          <a:lstStyle/>
-          <a:p>
-            <a:pPr marL="0" lvl="0" indent="0" algn="ctr">
-              <a:lnSpc>
-                <a:spcPts val="3347"/>
-              </a:lnSpc>
-              <a:spcBef>
-                <a:spcPct val="0"/>
-              </a:spcBef>
-            </a:pPr>
-            <a:r>
-              <a:rPr lang="en-US" sz="1400" b="1" u="none" strike="noStrike" dirty="0">
-                <a:solidFill>
-                  <a:srgbClr val="000000"/>
-                </a:solidFill>
-                <a:latin typeface="Arial MT Pro Bold"/>
-                <a:ea typeface="Arial MT Pro Bold"/>
-                <a:cs typeface="Arial MT Pro Bold"/>
-                <a:sym typeface="Arial MT Pro Bold"/>
-              </a:rPr>
-              <a:t>FastAPI, MongoDB, Docker, Docker Compose, Elasticsearch, Oracle, PostgreSQL, MinIO, Hadoop, Kafka, Prefect, Power Bi, Git, GitHub, LaTeX, Matlab, Maple</a:t>
-            </a:r>
-          </a:p>
-          <a:p>
-            <a:pPr marL="0" lvl="0" indent="0" algn="ctr">
-              <a:lnSpc>
-                <a:spcPts val="3347"/>
-              </a:lnSpc>
-              <a:spcBef>
-                <a:spcPct val="0"/>
-              </a:spcBef>
-            </a:pPr>
-            <a:endParaRPr lang="en-US" sz="2391" b="1" u="none" strike="noStrike" dirty="0">
-              <a:solidFill>
-                <a:srgbClr val="000000"/>
-              </a:solidFill>
-              <a:latin typeface="Arial MT Pro Bold"/>
-              <a:ea typeface="Arial MT Pro Bold"/>
-              <a:cs typeface="Arial MT Pro Bold"/>
-              <a:sym typeface="Arial MT Pro Bold"/>
-            </a:endParaRPr>
-          </a:p>
-          <a:p>
-            <a:pPr marL="0" lvl="0" indent="0" algn="ctr">
-              <a:lnSpc>
-                <a:spcPts val="3347"/>
-              </a:lnSpc>
-              <a:spcBef>
-                <a:spcPct val="0"/>
-              </a:spcBef>
-            </a:pPr>
-            <a:endParaRPr lang="en-US" sz="2391" b="1" u="none" strike="noStrike" dirty="0">
-              <a:solidFill>
-                <a:srgbClr val="000000"/>
-              </a:solidFill>
-              <a:latin typeface="Arial MT Pro Bold"/>
-              <a:ea typeface="Arial MT Pro Bold"/>
-              <a:cs typeface="Arial MT Pro Bold"/>
-              <a:sym typeface="Arial MT Pro Bold"/>
-            </a:endParaRPr>
-          </a:p>
-          <a:p>
-            <a:pPr marL="0" lvl="0" indent="0" algn="ctr">
-              <a:lnSpc>
-                <a:spcPts val="3347"/>
-              </a:lnSpc>
-              <a:spcBef>
-                <a:spcPct val="0"/>
-              </a:spcBef>
-            </a:pPr>
-            <a:endParaRPr lang="en-US" sz="2391" b="1" u="none" strike="noStrike" dirty="0">
-              <a:solidFill>
-                <a:srgbClr val="000000"/>
-              </a:solidFill>
-              <a:latin typeface="Arial MT Pro Bold"/>
-              <a:ea typeface="Arial MT Pro Bold"/>
-              <a:cs typeface="Arial MT Pro Bold"/>
-              <a:sym typeface="Arial MT Pro Bold"/>
-            </a:endParaRPr>
-          </a:p>
-          <a:p>
-            <a:pPr marL="0" lvl="0" indent="0" algn="ctr">
-              <a:lnSpc>
-                <a:spcPts val="3347"/>
-              </a:lnSpc>
-              <a:spcBef>
-                <a:spcPct val="0"/>
-              </a:spcBef>
-            </a:pPr>
-            <a:endParaRPr lang="en-US" sz="2391" b="1" u="none" strike="noStrike" dirty="0">
-              <a:solidFill>
-                <a:srgbClr val="000000"/>
-              </a:solidFill>
-              <a:latin typeface="Arial MT Pro Bold"/>
-              <a:ea typeface="Arial MT Pro Bold"/>
-              <a:cs typeface="Arial MT Pro Bold"/>
-              <a:sym typeface="Arial MT Pro Bold"/>
-            </a:endParaRPr>
-          </a:p>
-          <a:p>
-            <a:pPr marL="0" lvl="0" indent="0" algn="ctr">
-              <a:lnSpc>
-                <a:spcPts val="3347"/>
-              </a:lnSpc>
-              <a:spcBef>
-                <a:spcPct val="0"/>
-              </a:spcBef>
-            </a:pPr>
-            <a:endParaRPr lang="en-US" sz="2391" b="1" u="none" strike="noStrike" dirty="0">
-              <a:solidFill>
-                <a:srgbClr val="000000"/>
-              </a:solidFill>
-              <a:latin typeface="Arial MT Pro Bold"/>
-              <a:ea typeface="Arial MT Pro Bold"/>
-              <a:cs typeface="Arial MT Pro Bold"/>
-              <a:sym typeface="Arial MT Pro Bold"/>
-            </a:endParaRPr>
-          </a:p>
-          <a:p>
-            <a:pPr marL="0" lvl="0" indent="0" algn="ctr">
-              <a:lnSpc>
-                <a:spcPts val="3347"/>
-              </a:lnSpc>
-              <a:spcBef>
-                <a:spcPct val="0"/>
-              </a:spcBef>
-            </a:pPr>
-            <a:endParaRPr lang="en-US" sz="2391" b="1" u="none" strike="noStrike" dirty="0">
-              <a:solidFill>
-                <a:srgbClr val="000000"/>
-              </a:solidFill>
-              <a:latin typeface="Arial MT Pro Bold"/>
-              <a:ea typeface="Arial MT Pro Bold"/>
-              <a:cs typeface="Arial MT Pro Bold"/>
-              <a:sym typeface="Arial MT Pro Bold"/>
-            </a:endParaRPr>
-          </a:p>
-          <a:p>
-            <a:pPr marL="0" lvl="0" indent="0" algn="ctr">
-              <a:lnSpc>
-                <a:spcPts val="3347"/>
-              </a:lnSpc>
-              <a:spcBef>
-                <a:spcPct val="0"/>
-              </a:spcBef>
-            </a:pPr>
-            <a:endParaRPr lang="en-US" sz="2391" b="1" u="none" strike="noStrike" dirty="0">
-              <a:solidFill>
-                <a:srgbClr val="000000"/>
-              </a:solidFill>
-              <a:latin typeface="Arial MT Pro Bold"/>
-              <a:ea typeface="Arial MT Pro Bold"/>
-              <a:cs typeface="Arial MT Pro Bold"/>
-              <a:sym typeface="Arial MT Pro Bold"/>
-            </a:endParaRPr>
-          </a:p>
-          <a:p>
-            <a:pPr marL="0" lvl="0" indent="0" algn="ctr">
-              <a:lnSpc>
-                <a:spcPts val="3347"/>
-              </a:lnSpc>
-              <a:spcBef>
-                <a:spcPct val="0"/>
-              </a:spcBef>
-            </a:pPr>
-            <a:endParaRPr lang="en-US" sz="2391" b="1" u="none" strike="noStrike" dirty="0">
-              <a:solidFill>
-                <a:srgbClr val="000000"/>
-              </a:solidFill>
-              <a:latin typeface="Arial MT Pro Bold"/>
-              <a:ea typeface="Arial MT Pro Bold"/>
-              <a:cs typeface="Arial MT Pro Bold"/>
-              <a:sym typeface="Arial MT Pro Bold"/>
-            </a:endParaRPr>
-          </a:p>
-          <a:p>
-            <a:pPr marL="0" lvl="0" indent="0" algn="ctr">
-              <a:lnSpc>
-                <a:spcPts val="3347"/>
-              </a:lnSpc>
-              <a:spcBef>
-                <a:spcPct val="0"/>
-              </a:spcBef>
-            </a:pPr>
-            <a:endParaRPr lang="en-US" sz="2391" b="1" u="none" strike="noStrike" dirty="0">
-              <a:solidFill>
-                <a:srgbClr val="000000"/>
-              </a:solidFill>
-              <a:latin typeface="Arial MT Pro Bold"/>
-              <a:ea typeface="Arial MT Pro Bold"/>
-              <a:cs typeface="Arial MT Pro Bold"/>
-              <a:sym typeface="Arial MT Pro Bold"/>
+              <a:latin typeface="Calibri (MS)"/>
+              <a:ea typeface="Calibri (MS)"/>
+              <a:cs typeface="Calibri (MS)"/>
+              <a:sym typeface="Calibri (MS)"/>
             </a:endParaRPr>
           </a:p>
         </p:txBody>
       </p:sp>
       <p:pic>
         <p:nvPicPr>
-          <p:cNvPr id="22" name="Picture 21" descr="temp_photo.png"/>
+          <p:cNvPr id="49" name="Picture 48" descr="temp_photo.png"/>
           <p:cNvPicPr>
             <a:picLocks noChangeAspect="1"/>
           </p:cNvPicPr>
           <p:nvPr/>
         </p:nvPicPr>
         <p:blipFill>
-          <a:blip r:embed="rId3"/>
+          <a:blip r:embed="rId11"/>
           <a:stretch>
             <a:fillRect/>
           </a:stretch>
         </p:blipFill>
         <p:spPr>
           <a:xfrm>
-            <a:off x="1085817" y="1357995"/>
-            <a:ext cx="3041855" cy="2549115"/>
+            <a:off x="602155" y="2688577"/>
+            <a:ext cx="2621471" cy="3432799"/>
           </a:xfrm>
           <a:prstGeom prst="rect">
             <a:avLst/>
@@ -4881,4 +6438,287 @@
   <a:objectDefaults/>
   <a:extraClrSchemeLst/>
 </a:theme>
+</file>
+
+<file path=ppt/theme/theme2.xml><?xml version="1.0" encoding="utf-8"?>
+<a:theme xmlns:a="http://schemas.openxmlformats.org/drawingml/2006/main" name="Office Theme">
+  <a:themeElements>
+    <a:clrScheme name="Office">
+      <a:dk1>
+        <a:sysClr val="windowText" lastClr="000000"/>
+      </a:dk1>
+      <a:lt1>
+        <a:sysClr val="window" lastClr="FFFFFF"/>
+      </a:lt1>
+      <a:dk2>
+        <a:srgbClr val="1F497D"/>
+      </a:dk2>
+      <a:lt2>
+        <a:srgbClr val="EEECE1"/>
+      </a:lt2>
+      <a:accent1>
+        <a:srgbClr val="4F81BD"/>
+      </a:accent1>
+      <a:accent2>
+        <a:srgbClr val="C0504D"/>
+      </a:accent2>
+      <a:accent3>
+        <a:srgbClr val="9BBB59"/>
+      </a:accent3>
+      <a:accent4>
+        <a:srgbClr val="8064A2"/>
+      </a:accent4>
+      <a:accent5>
+        <a:srgbClr val="4BACC6"/>
+      </a:accent5>
+      <a:accent6>
+        <a:srgbClr val="F79646"/>
+      </a:accent6>
+      <a:hlink>
+        <a:srgbClr val="0000FF"/>
+      </a:hlink>
+      <a:folHlink>
+        <a:srgbClr val="800080"/>
+      </a:folHlink>
+    </a:clrScheme>
+    <a:fontScheme name="Office">
+      <a:majorFont>
+        <a:latin typeface="Calibri"/>
+        <a:ea typeface=""/>
+        <a:cs typeface=""/>
+        <a:font script="Jpan" typeface="ＭＳ Ｐゴシック"/>
+        <a:font script="Hang" typeface="맑은 고딕"/>
+        <a:font script="Hans" typeface="宋体"/>
+        <a:font script="Hant" typeface="新細明體"/>
+        <a:font script="Arab" typeface="Times New Roman"/>
+        <a:font script="Hebr" typeface="Times New Roman"/>
+        <a:font script="Thai" typeface="Angsana New"/>
+        <a:font script="Ethi" typeface="Nyala"/>
+        <a:font script="Beng" typeface="Vrinda"/>
+        <a:font script="Gujr" typeface="Shruti"/>
+        <a:font script="Khmr" typeface="MoolBoran"/>
+        <a:font script="Knda" typeface="Tunga"/>
+        <a:font script="Guru" typeface="Raavi"/>
+        <a:font script="Cans" typeface="Euphemia"/>
+        <a:font script="Cher" typeface="Plantagenet Cherokee"/>
+        <a:font script="Yiii" typeface="Microsoft Yi Baiti"/>
+        <a:font script="Tibt" typeface="Microsoft Himalaya"/>
+        <a:font script="Thaa" typeface="MV Boli"/>
+        <a:font script="Deva" typeface="Mangal"/>
+        <a:font script="Telu" typeface="Gautami"/>
+        <a:font script="Taml" typeface="Latha"/>
+        <a:font script="Syrc" typeface="Estrangelo Edessa"/>
+        <a:font script="Orya" typeface="Kalinga"/>
+        <a:font script="Mlym" typeface="Kartika"/>
+        <a:font script="Laoo" typeface="DokChampa"/>
+        <a:font script="Sinh" typeface="Iskoola Pota"/>
+        <a:font script="Mong" typeface="Mongolian Baiti"/>
+        <a:font script="Viet" typeface="Times New Roman"/>
+        <a:font script="Uigh" typeface="Microsoft Uighur"/>
+      </a:majorFont>
+      <a:minorFont>
+        <a:latin typeface="Calibri"/>
+        <a:ea typeface=""/>
+        <a:cs typeface=""/>
+        <a:font script="Jpan" typeface="ＭＳ Ｐゴシック"/>
+        <a:font script="Hang" typeface="맑은 고딕"/>
+        <a:font script="Hans" typeface="宋体"/>
+        <a:font script="Hant" typeface="新細明體"/>
+        <a:font script="Arab" typeface="Arial"/>
+        <a:font script="Hebr" typeface="Arial"/>
+        <a:font script="Thai" typeface="Cordia New"/>
+        <a:font script="Ethi" typeface="Nyala"/>
+        <a:font script="Beng" typeface="Vrinda"/>
+        <a:font script="Gujr" typeface="Shruti"/>
+        <a:font script="Khmr" typeface="DaunPenh"/>
+        <a:font script="Knda" typeface="Tunga"/>
+        <a:font script="Guru" typeface="Raavi"/>
+        <a:font script="Cans" typeface="Euphemia"/>
+        <a:font script="Cher" typeface="Plantagenet Cherokee"/>
+        <a:font script="Yiii" typeface="Microsoft Yi Baiti"/>
+        <a:font script="Tibt" typeface="Microsoft Himalaya"/>
+        <a:font script="Thaa" typeface="MV Boli"/>
+        <a:font script="Deva" typeface="Mangal"/>
+        <a:font script="Telu" typeface="Gautami"/>
+        <a:font script="Taml" typeface="Latha"/>
+        <a:font script="Syrc" typeface="Estrangelo Edessa"/>
+        <a:font script="Orya" typeface="Kalinga"/>
+        <a:font script="Mlym" typeface="Kartika"/>
+        <a:font script="Laoo" typeface="DokChampa"/>
+        <a:font script="Sinh" typeface="Iskoola Pota"/>
+        <a:font script="Mong" typeface="Mongolian Baiti"/>
+        <a:font script="Viet" typeface="Arial"/>
+        <a:font script="Uigh" typeface="Microsoft Uighur"/>
+      </a:minorFont>
+    </a:fontScheme>
+    <a:fmtScheme name="Office">
+      <a:fillStyleLst>
+        <a:solidFill>
+          <a:schemeClr val="phClr"/>
+        </a:solidFill>
+        <a:gradFill rotWithShape="1">
+          <a:gsLst>
+            <a:gs pos="0">
+              <a:schemeClr val="phClr">
+                <a:tint val="50000"/>
+                <a:satMod val="300000"/>
+              </a:schemeClr>
+            </a:gs>
+            <a:gs pos="35000">
+              <a:schemeClr val="phClr">
+                <a:tint val="37000"/>
+                <a:satMod val="300000"/>
+              </a:schemeClr>
+            </a:gs>
+            <a:gs pos="100000">
+              <a:schemeClr val="phClr">
+                <a:tint val="15000"/>
+                <a:satMod val="350000"/>
+              </a:schemeClr>
+            </a:gs>
+          </a:gsLst>
+          <a:lin ang="16200000" scaled="1"/>
+        </a:gradFill>
+        <a:gradFill rotWithShape="1">
+          <a:gsLst>
+            <a:gs pos="0">
+              <a:schemeClr val="phClr">
+                <a:shade val="51000"/>
+                <a:satMod val="130000"/>
+              </a:schemeClr>
+            </a:gs>
+            <a:gs pos="80000">
+              <a:schemeClr val="phClr">
+                <a:shade val="93000"/>
+                <a:satMod val="130000"/>
+              </a:schemeClr>
+            </a:gs>
+            <a:gs pos="100000">
+              <a:schemeClr val="phClr">
+                <a:shade val="94000"/>
+                <a:satMod val="135000"/>
+              </a:schemeClr>
+            </a:gs>
+          </a:gsLst>
+          <a:lin ang="16200000" scaled="0"/>
+        </a:gradFill>
+      </a:fillStyleLst>
+      <a:lnStyleLst>
+        <a:ln w="9525" cap="flat" cmpd="sng" algn="ctr">
+          <a:solidFill>
+            <a:schemeClr val="phClr">
+              <a:shade val="95000"/>
+              <a:satMod val="105000"/>
+            </a:schemeClr>
+          </a:solidFill>
+          <a:prstDash val="solid"/>
+        </a:ln>
+        <a:ln w="25400" cap="flat" cmpd="sng" algn="ctr">
+          <a:solidFill>
+            <a:schemeClr val="phClr"/>
+          </a:solidFill>
+          <a:prstDash val="solid"/>
+        </a:ln>
+        <a:ln w="38100" cap="flat" cmpd="sng" algn="ctr">
+          <a:solidFill>
+            <a:schemeClr val="phClr"/>
+          </a:solidFill>
+          <a:prstDash val="solid"/>
+        </a:ln>
+      </a:lnStyleLst>
+      <a:effectStyleLst>
+        <a:effectStyle>
+          <a:effectLst>
+            <a:outerShdw blurRad="40000" dist="20000" dir="5400000" rotWithShape="0">
+              <a:srgbClr val="000000">
+                <a:alpha val="38000"/>
+              </a:srgbClr>
+            </a:outerShdw>
+          </a:effectLst>
+        </a:effectStyle>
+        <a:effectStyle>
+          <a:effectLst>
+            <a:outerShdw blurRad="40000" dist="23000" dir="5400000" rotWithShape="0">
+              <a:srgbClr val="000000">
+                <a:alpha val="35000"/>
+              </a:srgbClr>
+            </a:outerShdw>
+          </a:effectLst>
+        </a:effectStyle>
+        <a:effectStyle>
+          <a:effectLst>
+            <a:outerShdw blurRad="40000" dist="23000" dir="5400000" rotWithShape="0">
+              <a:srgbClr val="000000">
+                <a:alpha val="35000"/>
+              </a:srgbClr>
+            </a:outerShdw>
+          </a:effectLst>
+          <a:scene3d>
+            <a:camera prst="orthographicFront">
+              <a:rot lat="0" lon="0" rev="0"/>
+            </a:camera>
+            <a:lightRig rig="threePt" dir="t">
+              <a:rot lat="0" lon="0" rev="1200000"/>
+            </a:lightRig>
+          </a:scene3d>
+          <a:sp3d>
+            <a:bevelT w="63500" h="25400"/>
+          </a:sp3d>
+        </a:effectStyle>
+      </a:effectStyleLst>
+      <a:bgFillStyleLst>
+        <a:solidFill>
+          <a:schemeClr val="phClr"/>
+        </a:solidFill>
+        <a:gradFill rotWithShape="1">
+          <a:gsLst>
+            <a:gs pos="0">
+              <a:schemeClr val="phClr">
+                <a:tint val="40000"/>
+                <a:satMod val="350000"/>
+              </a:schemeClr>
+            </a:gs>
+            <a:gs pos="40000">
+              <a:schemeClr val="phClr">
+                <a:tint val="45000"/>
+                <a:shade val="99000"/>
+                <a:satMod val="350000"/>
+              </a:schemeClr>
+            </a:gs>
+            <a:gs pos="100000">
+              <a:schemeClr val="phClr">
+                <a:shade val="20000"/>
+                <a:satMod val="255000"/>
+              </a:schemeClr>
+            </a:gs>
+          </a:gsLst>
+          <a:path path="circle">
+            <a:fillToRect l="50000" t="-80000" r="50000" b="180000"/>
+          </a:path>
+        </a:gradFill>
+        <a:gradFill rotWithShape="1">
+          <a:gsLst>
+            <a:gs pos="0">
+              <a:schemeClr val="phClr">
+                <a:tint val="80000"/>
+                <a:satMod val="300000"/>
+              </a:schemeClr>
+            </a:gs>
+            <a:gs pos="100000">
+              <a:schemeClr val="phClr">
+                <a:shade val="30000"/>
+                <a:satMod val="200000"/>
+              </a:schemeClr>
+            </a:gs>
+          </a:gsLst>
+          <a:path path="circle">
+            <a:fillToRect l="50000" t="50000" r="50000" b="50000"/>
+          </a:path>
+        </a:gradFill>
+      </a:bgFillStyleLst>
+    </a:fmtScheme>
+  </a:themeElements>
+  <a:objectDefaults/>
+  <a:extraClrSchemeLst/>
+</a:theme>
 </file>
--- a/BioProfile_Generated.pptx
+++ b/BioProfile_Generated.pptx
@@ -4509,186 +4509,17 @@
                 <a:buFont typeface="Arial"/>
                 <a:buChar char="•"/>
               </a:pPr>
-            </a:p>
-            <a:p>
-              <a:pPr>
-                <a:defRPr sz="1400" b="1">
-                  <a:solidFill>
-                    <a:srgbClr val="003366"/>
-                  </a:solidFill>
-                  <a:latin typeface="Arial"/>
-                </a:defRPr>
-              </a:pPr>
               <a:r>
-                <a:t>Maintenance &amp; Systèmes Automatisés</a:t>
-              </a:r>
-            </a:p>
-            <a:p>
-              <a:pPr>
-                <a:defRPr sz="1200" b="1">
+                <a:rPr lang="en-US" sz="1950" dirty="0">
                   <a:solidFill>
                     <a:srgbClr val="000000"/>
                   </a:solidFill>
                   <a:latin typeface="Arial"/>
-                </a:defRPr>
-              </a:pPr>
-              <a:r>
-                <a:t>Étude approfondie du système de traitement des bagages (BHS) via l'architecture SCADA/IHM et supervision de l'infrastructure électrique critique (HT/BT, ASI). Aides à la Navigation : Immersion technique dans le fonctionnement des systèmes de radionavigation (ILS Cat II, VOR-DME, ADS-B) et des équipements de sûreté par rayons X (EDS/ETD).</a:t>
-              </a:r>
-            </a:p>
-            <a:p>
-              <a:pPr>
-                <a:defRPr sz="600"/>
-              </a:pPr>
-            </a:p>
-            <a:p>
-              <a:pPr>
-                <a:defRPr sz="1400" b="1">
-                  <a:solidFill>
-                    <a:srgbClr val="003366"/>
-                  </a:solidFill>
-                  <a:latin typeface="Arial"/>
-                </a:defRPr>
-              </a:pPr>
-              <a:r>
-                <a:t>TIPE en Étude et optimisation du système de freinage</a:t>
-              </a:r>
-            </a:p>
-            <a:p>
-              <a:pPr>
-                <a:defRPr sz="1200" b="1">
-                  <a:solidFill>
-                    <a:srgbClr val="000000"/>
-                  </a:solidFill>
-                  <a:latin typeface="Arial"/>
-                </a:defRPr>
-              </a:pPr>
-              <a:r>
-                <a:t>Étude complète du système de freinage : modélisation, dimensionnement et choix des matériaux. Simulation des performances à l'aide de Python.</a:t>
-              </a:r>
-            </a:p>
-            <a:p>
-              <a:pPr>
-                <a:defRPr sz="600"/>
-              </a:pPr>
-            </a:p>
-            <a:p>
-              <a:pPr>
-                <a:defRPr sz="1400" b="1">
-                  <a:solidFill>
-                    <a:srgbClr val="003366"/>
-                  </a:solidFill>
-                  <a:latin typeface="Arial"/>
-                </a:defRPr>
-              </a:pPr>
-              <a:r>
-                <a:t>Quadrupède à deux axes (Hackathon SRG Agadir)</a:t>
-              </a:r>
-            </a:p>
-            <a:p>
-              <a:pPr>
-                <a:defRPr sz="1200" b="1">
-                  <a:solidFill>
-                    <a:srgbClr val="000000"/>
-                  </a:solidFill>
-                  <a:latin typeface="Arial"/>
-                </a:defRPr>
-              </a:pPr>
-              <a:r>
-                <a:t>Conception d'un robot quadrupède autonome (ESP32, PCA9685, cinématique, BMS 3S) intégrant un système de vision temps réel (OpenCV, ESP32-CAM) et une communication multi-protocoles (Bluetooth, HTTP, TCP/IP).</a:t>
-              </a:r>
-            </a:p>
-            <a:p>
-              <a:pPr>
-                <a:defRPr sz="600"/>
-              </a:pPr>
-            </a:p>
-            <a:p>
-              <a:pPr>
-                <a:defRPr sz="1400" b="1">
-                  <a:solidFill>
-                    <a:srgbClr val="003366"/>
-                  </a:solidFill>
-                  <a:latin typeface="Arial"/>
-                </a:defRPr>
-              </a:pPr>
-              <a:r>
-                <a:t>Voiture ADAS</a:t>
-              </a:r>
-            </a:p>
-            <a:p>
-              <a:pPr>
-                <a:defRPr sz="1200" b="1">
-                  <a:solidFill>
-                    <a:srgbClr val="000000"/>
-                  </a:solidFill>
-                  <a:latin typeface="Arial"/>
-                </a:defRPr>
-              </a:pPr>
-              <a:r>
-                <a:t>Architecture hybride Raspberry Pi/Arduino avec détection d'obstacles temps réel (YOLO) et liaison inter-processeurs optimisée via protocole UART.</a:t>
-              </a:r>
-            </a:p>
-            <a:p>
-              <a:pPr>
-                <a:defRPr sz="600"/>
-              </a:pPr>
-            </a:p>
-            <a:p>
-              <a:pPr>
-                <a:defRPr sz="1400" b="1">
-                  <a:solidFill>
-                    <a:srgbClr val="003366"/>
-                  </a:solidFill>
-                  <a:latin typeface="Arial"/>
-                </a:defRPr>
-              </a:pPr>
-              <a:r>
-                <a:t>Projet B.O.L.T. (Pet-Bot Collaboratif)</a:t>
-              </a:r>
-            </a:p>
-            <a:p>
-              <a:pPr>
-                <a:defRPr sz="1200" b="1">
-                  <a:solidFill>
-                    <a:srgbClr val="000000"/>
-                  </a:solidFill>
-                  <a:latin typeface="Arial"/>
-                </a:defRPr>
-              </a:pPr>
-              <a:r>
-                <a:t>Traitement IA local (K210), suivi dynamique AprilTag (&lt; 200 ms) et interaction homme-machine (voix bidirectionnelle, écran OLED).</a:t>
-              </a:r>
-            </a:p>
-            <a:p>
-              <a:pPr>
-                <a:defRPr sz="600"/>
-              </a:pPr>
-            </a:p>
-            <a:p>
-              <a:pPr>
-                <a:defRPr sz="1400" b="1">
-                  <a:solidFill>
-                    <a:srgbClr val="003366"/>
-                  </a:solidFill>
-                  <a:latin typeface="Arial"/>
-                </a:defRPr>
-              </a:pPr>
-              <a:r>
-                <a:t>Technobots (1er prix en compétition)</a:t>
-              </a:r>
-            </a:p>
-            <a:p>
-              <a:pPr>
-                <a:defRPr sz="1200" b="1">
-                  <a:solidFill>
-                    <a:srgbClr val="000000"/>
-                  </a:solidFill>
-                  <a:latin typeface="Arial"/>
-                </a:defRPr>
-              </a:pPr>
-              <a:r>
-                <a:t>Conception et fabrication d'une voiture télécommandée avec capteurs : assemblage mécanique, programmation Arduino.</a:t>
+                  <a:ea typeface="Arial"/>
+                  <a:cs typeface="Arial"/>
+                  <a:sym typeface="Arial"/>
+                </a:rPr>
+                <a:t>Stage d'Initiation  ONDA : Aéroport international AgadirAl Massira, Maintenance &amp; Systèmes Automatisés : Étude approfondie du système de traitement des bagages (BHS) via l'architecture SCADA/IHM et supervision de l'infrastructure électrique critique (HT/BT, ASI). Aides à la Navigation : Immersion technique dans le fonctionnement des systèmes de radionavigation (ILS Cat II, VOR DME, ADSB) et des équipements de sûreté par rayons X (EDS/ETD).</a:t>
               </a:r>
             </a:p>
           </p:txBody>
@@ -5078,7 +4909,9 @@
             </a:prstGeom>
           </p:spPr>
           <p:txBody>
-            <a:bodyPr lIns="50800" tIns="50800" rIns="50800" bIns="50800" rtlCol="0" anchor="ctr" wrap="square"/>
+            <a:bodyPr lIns="50800" tIns="50800" rIns="50800" bIns="50800" rtlCol="0" anchor="ctr" wrap="square">
+              <a:normAutofit/>
+            </a:bodyPr>
             <a:lstStyle/>
             <a:p>
               <a:pPr algn="ctr">
@@ -5096,7 +4929,7 @@
                   <a:cs typeface="Arial Bold"/>
                   <a:sym typeface="Arial Bold"/>
                 </a:rPr>
-                <a:t>Disponibilité : immédiate</a:t>
+                <a:t>Disponibilité : Immédiate</a:t>
               </a:r>
             </a:p>
           </p:txBody>
@@ -5225,7 +5058,7 @@
         </p:spPr>
         <p:txBody>
           <a:bodyPr wrap="square" lIns="0" tIns="0" rIns="0" bIns="0" rtlCol="0" anchor="t">
-            <a:spAutoFit/>
+            <a:normAutofit/>
           </a:bodyPr>
           <a:lstStyle/>
           <a:p>
@@ -5267,25 +5100,6 @@
               <a:t> </a:t>
             </a:r>
           </a:p>
-          <a:p>
-            <a:pPr algn="l">
-              <a:lnSpc>
-                <a:spcPts val="1980"/>
-              </a:lnSpc>
-            </a:pPr>
-            <a:r>
-              <a:rPr lang="en-US" sz="1650" b="1" dirty="0">
-                <a:solidFill>
-                  <a:srgbClr val="FFFFFF"/>
-                </a:solidFill>
-                <a:latin typeface="Calibri (MS) Bold"/>
-                <a:ea typeface="Calibri (MS) Bold"/>
-                <a:cs typeface="Calibri (MS) Bold"/>
-                <a:sym typeface="Calibri (MS) Bold"/>
-              </a:rPr>
-              <a:t/>
-            </a:r>
-          </a:p>
         </p:txBody>
       </p:sp>
       <p:sp>
@@ -5305,7 +5119,7 @@
         </p:spPr>
         <p:txBody>
           <a:bodyPr lIns="0" tIns="0" rIns="0" bIns="0" rtlCol="0" anchor="t" wrap="square">
-            <a:spAutoFit/>
+            <a:normAutofit/>
           </a:bodyPr>
           <a:lstStyle/>
           <a:p>
@@ -5359,24 +5173,8 @@
                 <a:cs typeface="Arial"/>
                 <a:sym typeface="Arial"/>
               </a:rPr>
-              <a:t>Ingénieur en Aéronautique</a:t>
-            </a:r>
-          </a:p>
-          <a:p>
-            <a:pPr algn="ctr">
-              <a:lnSpc>
-                <a:spcPts val="2520"/>
-              </a:lnSpc>
-            </a:pPr>
-            <a:endParaRPr lang="en-US" sz="2100">
-              <a:solidFill>
-                <a:srgbClr val="FFFFFF"/>
-              </a:solidFill>
-              <a:latin typeface="Arial"/>
-              <a:ea typeface="Arial"/>
-              <a:cs typeface="Arial"/>
-              <a:sym typeface="Arial"/>
-            </a:endParaRPr>
+              <a:t>Etudiant en Ingénierie aéronautique</a:t>
+            </a:r>
           </a:p>
         </p:txBody>
       </p:sp>
@@ -5397,7 +5195,7 @@
         </p:spPr>
         <p:txBody>
           <a:bodyPr lIns="0" tIns="0" rIns="0" bIns="0" rtlCol="0" anchor="t" wrap="square">
-            <a:spAutoFit/>
+            <a:normAutofit/>
           </a:bodyPr>
           <a:lstStyle/>
           <a:p>
@@ -5453,9 +5251,7 @@
                 <a:cs typeface="Arial Bold"/>
                 <a:sym typeface="Arial Bold"/>
               </a:rPr>
-              <a:t>Arabe
-Français(C1)
-Anglais (C1)</a:t>
+              <a:t>Arabe</a:t>
             </a:r>
           </a:p>
           <a:p>
@@ -5466,15 +5262,10 @@
               <a:buFont typeface="Arial"/>
               <a:buChar char="•"/>
             </a:pPr>
-            <a:endParaRPr lang="en-US" sz="1500" b="1" dirty="0">
-              <a:solidFill>
-                <a:srgbClr val="FFFFFF"/>
-              </a:solidFill>
-              <a:latin typeface="Arial Bold"/>
-              <a:ea typeface="Arial Bold"/>
-              <a:cs typeface="Arial Bold"/>
-              <a:sym typeface="Arial Bold"/>
-            </a:endParaRPr>
+            <a:r>
+              <a:rPr sz="1500" b="1"/>
+              <a:t>Français(C1)</a:t>
+            </a:r>
           </a:p>
           <a:p>
             <a:pPr marL="519112" lvl="1" indent="-259556" algn="l">
@@ -5484,121 +5275,10 @@
               <a:buFont typeface="Arial"/>
               <a:buChar char="•"/>
             </a:pPr>
-            <a:endParaRPr lang="en-US" sz="1500" b="1" dirty="0">
-              <a:solidFill>
-                <a:srgbClr val="FFFFFF"/>
-              </a:solidFill>
-              <a:latin typeface="Arial Bold"/>
-              <a:ea typeface="Arial Bold"/>
-              <a:cs typeface="Arial Bold"/>
-              <a:sym typeface="Arial Bold"/>
-            </a:endParaRPr>
-          </a:p>
-          <a:p>
-            <a:pPr marL="519112" lvl="1" indent="-259556" algn="l">
-              <a:lnSpc>
-                <a:spcPts val="1800"/>
-              </a:lnSpc>
-              <a:buFont typeface="Arial"/>
-              <a:buChar char="•"/>
-            </a:pPr>
-            <a:endParaRPr lang="en-US" sz="1500" b="1" dirty="0">
-              <a:solidFill>
-                <a:srgbClr val="FFFFFF"/>
-              </a:solidFill>
-              <a:latin typeface="Arial Bold"/>
-              <a:ea typeface="Arial Bold"/>
-              <a:cs typeface="Arial Bold"/>
-              <a:sym typeface="Arial Bold"/>
-            </a:endParaRPr>
-          </a:p>
-          <a:p>
-            <a:pPr marL="519112" lvl="1" indent="-259556" algn="l">
-              <a:lnSpc>
-                <a:spcPts val="1800"/>
-              </a:lnSpc>
-              <a:buFont typeface="Arial"/>
-              <a:buChar char="•"/>
-            </a:pPr>
-            <a:endParaRPr lang="en-US" sz="1500" b="1" dirty="0">
-              <a:solidFill>
-                <a:srgbClr val="FFFFFF"/>
-              </a:solidFill>
-              <a:latin typeface="Arial Bold"/>
-              <a:ea typeface="Arial Bold"/>
-              <a:cs typeface="Arial Bold"/>
-              <a:sym typeface="Arial Bold"/>
-            </a:endParaRPr>
-          </a:p>
-          <a:p>
-            <a:pPr marL="519112" lvl="1" indent="-259556" algn="l">
-              <a:lnSpc>
-                <a:spcPts val="1800"/>
-              </a:lnSpc>
-              <a:buFont typeface="Arial"/>
-              <a:buChar char="•"/>
-            </a:pPr>
-            <a:endParaRPr lang="en-US" sz="1500" b="1" dirty="0">
-              <a:solidFill>
-                <a:srgbClr val="FFFFFF"/>
-              </a:solidFill>
-              <a:latin typeface="Arial Bold"/>
-              <a:ea typeface="Arial Bold"/>
-              <a:cs typeface="Arial Bold"/>
-              <a:sym typeface="Arial Bold"/>
-            </a:endParaRPr>
-          </a:p>
-          <a:p>
-            <a:pPr marL="519112" lvl="1" indent="-259556" algn="l">
-              <a:lnSpc>
-                <a:spcPts val="1800"/>
-              </a:lnSpc>
-              <a:buFont typeface="Arial"/>
-              <a:buChar char="•"/>
-            </a:pPr>
-            <a:endParaRPr lang="en-US" sz="1500" b="1">
-              <a:solidFill>
-                <a:srgbClr val="FFFFFF"/>
-              </a:solidFill>
-              <a:latin typeface="Arial Bold"/>
-              <a:ea typeface="Arial Bold"/>
-              <a:cs typeface="Arial Bold"/>
-              <a:sym typeface="Arial Bold"/>
-            </a:endParaRPr>
-          </a:p>
-          <a:p>
-            <a:pPr marL="519112" lvl="1" indent="-259556" algn="l">
-              <a:lnSpc>
-                <a:spcPts val="1800"/>
-              </a:lnSpc>
-              <a:buFont typeface="Arial"/>
-              <a:buChar char="•"/>
-            </a:pPr>
-            <a:endParaRPr lang="en-US" sz="1500" b="1">
-              <a:solidFill>
-                <a:srgbClr val="FFFFFF"/>
-              </a:solidFill>
-              <a:latin typeface="Arial Bold"/>
-              <a:ea typeface="Arial Bold"/>
-              <a:cs typeface="Arial Bold"/>
-              <a:sym typeface="Arial Bold"/>
-            </a:endParaRPr>
-          </a:p>
-          <a:p>
-            <a:pPr algn="l">
-              <a:lnSpc>
-                <a:spcPts val="1800"/>
-              </a:lnSpc>
-            </a:pPr>
-            <a:endParaRPr lang="en-US" sz="1500" b="1" dirty="0">
-              <a:solidFill>
-                <a:srgbClr val="FFFFFF"/>
-              </a:solidFill>
-              <a:latin typeface="Arial Bold"/>
-              <a:ea typeface="Arial Bold"/>
-              <a:cs typeface="Arial Bold"/>
-              <a:sym typeface="Arial Bold"/>
-            </a:endParaRPr>
+            <a:r>
+              <a:rPr sz="1500" b="1"/>
+              <a:t>Anglais (C1)</a:t>
+            </a:r>
           </a:p>
         </p:txBody>
       </p:sp>
@@ -5619,19 +5299,16 @@
         </p:spPr>
         <p:txBody>
           <a:bodyPr lIns="0" tIns="0" rIns="0" bIns="0" rtlCol="0" anchor="t" wrap="square">
-            <a:spAutoFit/>
+            <a:normAutofit/>
           </a:bodyPr>
           <a:lstStyle/>
           <a:p>
             <a:pPr marL="554355" lvl="1" indent="-277177" algn="l">
-              <a:lnSpc>
-                <a:spcPts val="2160"/>
-              </a:lnSpc>
               <a:buFont typeface="Arial"/>
               <a:buChar char="•"/>
             </a:pPr>
             <a:r>
-              <a:rPr lang="en-US" sz="1400" dirty="0">
+              <a:rPr lang="en-US" sz="1000" dirty="0">
                 <a:solidFill>
                   <a:srgbClr val="2E2D2C"/>
                 </a:solidFill>
@@ -5640,120 +5317,138 @@
                 <a:cs typeface="Calibri (MS)"/>
                 <a:sym typeface="Calibri (MS)"/>
               </a:rPr>
-              <a:t>ESP32, Automate, Ladder, Python, C, C++, Assembly, VHDL, STM32</a:t>
-            </a:r>
-          </a:p>
-          <a:p>
-            <a:pPr marL="646747" lvl="1" indent="-323374" algn="l">
-              <a:lnSpc>
-                <a:spcPts val="2520"/>
-              </a:lnSpc>
+              <a:t>ESP32</a:t>
+            </a:r>
+          </a:p>
+          <a:p>
+            <a:pPr marL="554355" lvl="1" indent="-277177" algn="l">
+              <a:buFont typeface="Arial"/>
+              <a:buChar char="•"/>
             </a:pPr>
-            <a:endParaRPr lang="en-US" sz="1800" dirty="0">
-              <a:solidFill>
-                <a:srgbClr val="2E2D2C"/>
-              </a:solidFill>
-              <a:latin typeface="Calibri (MS)"/>
-              <a:ea typeface="Calibri (MS)"/>
-              <a:cs typeface="Calibri (MS)"/>
-              <a:sym typeface="Calibri (MS)"/>
-            </a:endParaRPr>
-          </a:p>
-          <a:p>
-            <a:pPr marL="646747" lvl="1" indent="-323374" algn="l">
-              <a:lnSpc>
-                <a:spcPts val="2520"/>
-              </a:lnSpc>
+            <a:r>
+              <a:rPr sz="1000"/>
+              <a:t>Automate</a:t>
+            </a:r>
+          </a:p>
+          <a:p>
+            <a:pPr marL="554355" lvl="1" indent="-277177" algn="l">
+              <a:buFont typeface="Arial"/>
+              <a:buChar char="•"/>
             </a:pPr>
-            <a:endParaRPr lang="en-US" dirty="0">
-              <a:solidFill>
-                <a:srgbClr val="2E2D2C"/>
-              </a:solidFill>
-              <a:latin typeface="Calibri (MS)"/>
-              <a:ea typeface="Calibri (MS)"/>
-              <a:cs typeface="Calibri (MS)"/>
-              <a:sym typeface="Calibri (MS)"/>
-            </a:endParaRPr>
-          </a:p>
-          <a:p>
-            <a:pPr marL="646747" lvl="1" indent="-323374" algn="l">
-              <a:lnSpc>
-                <a:spcPts val="2520"/>
-              </a:lnSpc>
+            <a:r>
+              <a:rPr sz="1000"/>
+              <a:t>Ladder</a:t>
+            </a:r>
+          </a:p>
+          <a:p>
+            <a:pPr marL="554355" lvl="1" indent="-277177" algn="l">
+              <a:buFont typeface="Arial"/>
+              <a:buChar char="•"/>
             </a:pPr>
-            <a:endParaRPr lang="en-US" sz="1800" dirty="0">
-              <a:solidFill>
-                <a:srgbClr val="2E2D2C"/>
-              </a:solidFill>
-              <a:latin typeface="Calibri (MS)"/>
-              <a:ea typeface="Calibri (MS)"/>
-              <a:cs typeface="Calibri (MS)"/>
-              <a:sym typeface="Calibri (MS)"/>
-            </a:endParaRPr>
-          </a:p>
-          <a:p>
-            <a:pPr marL="646747" lvl="1" indent="-323374" algn="l">
-              <a:lnSpc>
-                <a:spcPts val="2520"/>
-              </a:lnSpc>
+            <a:r>
+              <a:rPr sz="1000"/>
+              <a:t>Python</a:t>
+            </a:r>
+          </a:p>
+          <a:p>
+            <a:pPr marL="554355" lvl="1" indent="-277177" algn="l">
+              <a:buFont typeface="Arial"/>
+              <a:buChar char="•"/>
             </a:pPr>
-            <a:endParaRPr lang="en-US" dirty="0">
-              <a:solidFill>
-                <a:srgbClr val="2E2D2C"/>
-              </a:solidFill>
-              <a:latin typeface="Calibri (MS)"/>
-              <a:ea typeface="Calibri (MS)"/>
-              <a:cs typeface="Calibri (MS)"/>
-              <a:sym typeface="Calibri (MS)"/>
-            </a:endParaRPr>
-          </a:p>
-          <a:p>
-            <a:pPr marL="646747" lvl="1" indent="-323374" algn="l">
-              <a:lnSpc>
-                <a:spcPts val="2520"/>
-              </a:lnSpc>
+            <a:r>
+              <a:rPr sz="1000"/>
+              <a:t>C</a:t>
+            </a:r>
+          </a:p>
+          <a:p>
+            <a:pPr marL="554355" lvl="1" indent="-277177" algn="l">
+              <a:buFont typeface="Arial"/>
+              <a:buChar char="•"/>
             </a:pPr>
-            <a:endParaRPr lang="en-US" sz="1800" dirty="0">
-              <a:solidFill>
-                <a:srgbClr val="2E2D2C"/>
-              </a:solidFill>
-              <a:latin typeface="Calibri (MS)"/>
-              <a:ea typeface="Calibri (MS)"/>
-              <a:cs typeface="Calibri (MS)"/>
-              <a:sym typeface="Calibri (MS)"/>
-            </a:endParaRPr>
-          </a:p>
-          <a:p>
-            <a:pPr marL="646747" lvl="1" indent="-323374" algn="l">
-              <a:lnSpc>
-                <a:spcPts val="2520"/>
-              </a:lnSpc>
+            <a:r>
+              <a:rPr sz="1000"/>
+              <a:t>C++</a:t>
+            </a:r>
+          </a:p>
+          <a:p>
+            <a:pPr marL="554355" lvl="1" indent="-277177" algn="l">
+              <a:buFont typeface="Arial"/>
+              <a:buChar char="•"/>
             </a:pPr>
-            <a:endParaRPr lang="en-US" dirty="0">
-              <a:solidFill>
-                <a:srgbClr val="2E2D2C"/>
-              </a:solidFill>
-              <a:latin typeface="Calibri (MS)"/>
-              <a:ea typeface="Calibri (MS)"/>
-              <a:cs typeface="Calibri (MS)"/>
-              <a:sym typeface="Calibri (MS)"/>
-            </a:endParaRPr>
-          </a:p>
-          <a:p>
-            <a:pPr marL="646747" lvl="1" indent="-323374" algn="l">
-              <a:lnSpc>
-                <a:spcPts val="2520"/>
-              </a:lnSpc>
+            <a:r>
+              <a:rPr sz="1000"/>
+              <a:t>Assembly</a:t>
+            </a:r>
+          </a:p>
+          <a:p>
+            <a:pPr marL="554355" lvl="1" indent="-277177" algn="l">
+              <a:buFont typeface="Arial"/>
+              <a:buChar char="•"/>
             </a:pPr>
-            <a:endParaRPr lang="en-US" sz="1800" dirty="0">
-              <a:solidFill>
-                <a:srgbClr val="2E2D2C"/>
-              </a:solidFill>
-              <a:latin typeface="Calibri (MS)"/>
-              <a:ea typeface="Calibri (MS)"/>
-              <a:cs typeface="Calibri (MS)"/>
-              <a:sym typeface="Calibri (MS)"/>
-            </a:endParaRPr>
+            <a:r>
+              <a:rPr sz="1000"/>
+              <a:t>VHDL</a:t>
+            </a:r>
+          </a:p>
+          <a:p>
+            <a:pPr marL="554355" lvl="1" indent="-277177" algn="l">
+              <a:buFont typeface="Arial"/>
+              <a:buChar char="•"/>
+            </a:pPr>
+            <a:r>
+              <a:rPr sz="1000"/>
+              <a:t>STM32</a:t>
+            </a:r>
+          </a:p>
+          <a:p>
+            <a:pPr marL="554355" lvl="1" indent="-277177" algn="l">
+              <a:buFont typeface="Arial"/>
+              <a:buChar char="•"/>
+            </a:pPr>
+            <a:r>
+              <a:rPr sz="1000"/>
+              <a:t>ANSYS Fluent</a:t>
+            </a:r>
+          </a:p>
+          <a:p>
+            <a:pPr marL="554355" lvl="1" indent="-277177" algn="l">
+              <a:buFont typeface="Arial"/>
+              <a:buChar char="•"/>
+            </a:pPr>
+            <a:r>
+              <a:rPr sz="1000"/>
+              <a:t>Solidworks</a:t>
+            </a:r>
+          </a:p>
+          <a:p>
+            <a:pPr marL="554355" lvl="1" indent="-277177" algn="l">
+              <a:buFont typeface="Arial"/>
+              <a:buChar char="•"/>
+            </a:pPr>
+            <a:r>
+              <a:rPr sz="1000"/>
+              <a:t>STM32CubeIDE</a:t>
+            </a:r>
+          </a:p>
+          <a:p>
+            <a:pPr marL="554355" lvl="1" indent="-277177" algn="l">
+              <a:buFont typeface="Arial"/>
+              <a:buChar char="•"/>
+            </a:pPr>
+            <a:r>
+              <a:rPr sz="1000"/>
+              <a:t>TIA PORTAL</a:t>
+            </a:r>
+          </a:p>
+          <a:p>
+            <a:pPr marL="554355" lvl="1" indent="-277177" algn="l">
+              <a:buFont typeface="Arial"/>
+              <a:buChar char="•"/>
+            </a:pPr>
+            <a:r>
+              <a:rPr sz="1000"/>
+              <a:t>VISUAL STUDIO</a:t>
+            </a:r>
           </a:p>
         </p:txBody>
       </p:sp>
@@ -5774,7 +5469,7 @@
         </p:spPr>
         <p:txBody>
           <a:bodyPr lIns="0" tIns="0" rIns="0" bIns="0" rtlCol="0" anchor="t" wrap="square">
-            <a:spAutoFit/>
+            <a:normAutofit/>
           </a:bodyPr>
           <a:lstStyle/>
           <a:p>
@@ -5786,7 +5481,7 @@
               <a:buChar char="•"/>
             </a:pPr>
             <a:r>
-              <a:rPr lang="en-US" sz="1400" dirty="0">
+              <a:rPr lang="en-US" sz="1800" dirty="0">
                 <a:solidFill>
                   <a:srgbClr val="2E2D2C"/>
                 </a:solidFill>
@@ -5795,7 +5490,7 @@
                 <a:cs typeface="Calibri (MS)"/>
                 <a:sym typeface="Calibri (MS)"/>
               </a:rPr>
-              <a:t>Communication, Adaptabilité, Travail d'équipe, Esprit d'initiative</a:t>
+              <a:t>Communication</a:t>
             </a:r>
           </a:p>
           <a:p>
@@ -5806,15 +5501,10 @@
               <a:buFont typeface="Arial"/>
               <a:buChar char="•"/>
             </a:pPr>
-            <a:endParaRPr lang="en-US" dirty="0">
-              <a:solidFill>
-                <a:srgbClr val="2E2D2C"/>
-              </a:solidFill>
-              <a:latin typeface="Calibri (MS)"/>
-              <a:ea typeface="Calibri (MS)"/>
-              <a:cs typeface="Calibri (MS)"/>
-              <a:sym typeface="Calibri (MS)"/>
-            </a:endParaRPr>
+            <a:r>
+              <a:rPr sz="1800"/>
+              <a:t>Adaptabilité</a:t>
+            </a:r>
           </a:p>
           <a:p>
             <a:pPr marL="554355" lvl="1" indent="-277177" algn="l">
@@ -5824,15 +5514,10 @@
               <a:buFont typeface="Arial"/>
               <a:buChar char="•"/>
             </a:pPr>
-            <a:endParaRPr lang="en-US" sz="1800" dirty="0">
-              <a:solidFill>
-                <a:srgbClr val="2E2D2C"/>
-              </a:solidFill>
-              <a:latin typeface="Calibri (MS)"/>
-              <a:ea typeface="Calibri (MS)"/>
-              <a:cs typeface="Calibri (MS)"/>
-              <a:sym typeface="Calibri (MS)"/>
-            </a:endParaRPr>
+            <a:r>
+              <a:rPr sz="1800"/>
+              <a:t>Travail d'équipe</a:t>
+            </a:r>
           </a:p>
           <a:p>
             <a:pPr marL="554355" lvl="1" indent="-277177" algn="l">
@@ -5842,101 +5527,10 @@
               <a:buFont typeface="Arial"/>
               <a:buChar char="•"/>
             </a:pPr>
-            <a:endParaRPr lang="en-US" dirty="0">
-              <a:solidFill>
-                <a:srgbClr val="2E2D2C"/>
-              </a:solidFill>
-              <a:latin typeface="Calibri (MS)"/>
-              <a:ea typeface="Calibri (MS)"/>
-              <a:cs typeface="Calibri (MS)"/>
-              <a:sym typeface="Calibri (MS)"/>
-            </a:endParaRPr>
-          </a:p>
-          <a:p>
-            <a:pPr marL="554355" lvl="1" indent="-277177" algn="l">
-              <a:lnSpc>
-                <a:spcPts val="2160"/>
-              </a:lnSpc>
-              <a:buFont typeface="Arial"/>
-              <a:buChar char="•"/>
-            </a:pPr>
-            <a:endParaRPr lang="en-US" sz="1800" dirty="0">
-              <a:solidFill>
-                <a:srgbClr val="2E2D2C"/>
-              </a:solidFill>
-              <a:latin typeface="Calibri (MS)"/>
-              <a:ea typeface="Calibri (MS)"/>
-              <a:cs typeface="Calibri (MS)"/>
-              <a:sym typeface="Calibri (MS)"/>
-            </a:endParaRPr>
-          </a:p>
-          <a:p>
-            <a:pPr marL="277178" lvl="1" algn="l">
-              <a:lnSpc>
-                <a:spcPts val="2160"/>
-              </a:lnSpc>
-            </a:pPr>
-            <a:endParaRPr lang="en-US" sz="1800" dirty="0">
-              <a:solidFill>
-                <a:srgbClr val="2E2D2C"/>
-              </a:solidFill>
-              <a:latin typeface="Calibri (MS)"/>
-              <a:ea typeface="Calibri (MS)"/>
-              <a:cs typeface="Calibri (MS)"/>
-              <a:sym typeface="Calibri (MS)"/>
-            </a:endParaRPr>
-          </a:p>
-          <a:p>
-            <a:pPr marL="554355" lvl="1" indent="-277177" algn="l">
-              <a:lnSpc>
-                <a:spcPts val="2160"/>
-              </a:lnSpc>
-              <a:buFont typeface="Arial"/>
-              <a:buChar char="•"/>
-            </a:pPr>
-            <a:endParaRPr lang="en-US" dirty="0">
-              <a:solidFill>
-                <a:srgbClr val="2E2D2C"/>
-              </a:solidFill>
-              <a:latin typeface="Calibri (MS)"/>
-              <a:ea typeface="Calibri (MS)"/>
-              <a:cs typeface="Calibri (MS)"/>
-              <a:sym typeface="Calibri (MS)"/>
-            </a:endParaRPr>
-          </a:p>
-          <a:p>
-            <a:pPr marL="554355" lvl="1" indent="-277177" algn="l">
-              <a:lnSpc>
-                <a:spcPts val="2160"/>
-              </a:lnSpc>
-              <a:buFont typeface="Arial"/>
-              <a:buChar char="•"/>
-            </a:pPr>
-            <a:endParaRPr lang="en-US" sz="1800" dirty="0">
-              <a:solidFill>
-                <a:srgbClr val="2E2D2C"/>
-              </a:solidFill>
-              <a:latin typeface="Calibri (MS)"/>
-              <a:ea typeface="Calibri (MS)"/>
-              <a:cs typeface="Calibri (MS)"/>
-              <a:sym typeface="Calibri (MS)"/>
-            </a:endParaRPr>
-          </a:p>
-          <a:p>
-            <a:pPr marL="646747" lvl="1" indent="-323374" algn="l">
-              <a:lnSpc>
-                <a:spcPts val="2520"/>
-              </a:lnSpc>
-            </a:pPr>
-            <a:endParaRPr lang="en-US" sz="1800" dirty="0">
-              <a:solidFill>
-                <a:srgbClr val="2E2D2C"/>
-              </a:solidFill>
-              <a:latin typeface="Calibri (MS)"/>
-              <a:ea typeface="Calibri (MS)"/>
-              <a:cs typeface="Calibri (MS)"/>
-              <a:sym typeface="Calibri (MS)"/>
-            </a:endParaRPr>
+            <a:r>
+              <a:rPr sz="1800"/>
+              <a:t>Esprit d'initiative</a:t>
+            </a:r>
           </a:p>
         </p:txBody>
       </p:sp>
@@ -5957,19 +5551,16 @@
         </p:spPr>
         <p:txBody>
           <a:bodyPr lIns="0" tIns="0" rIns="0" bIns="0" rtlCol="0" anchor="t" wrap="square">
-            <a:spAutoFit/>
+            <a:normAutofit/>
           </a:bodyPr>
           <a:lstStyle/>
           <a:p>
             <a:pPr marL="388620" lvl="1" indent="-194310" algn="l">
-              <a:lnSpc>
-                <a:spcPts val="2160"/>
-              </a:lnSpc>
               <a:buFont typeface="Arial"/>
               <a:buChar char="•"/>
             </a:pPr>
             <a:r>
-              <a:rPr lang="en-US" sz="1400" dirty="0">
+              <a:rPr lang="en-US" sz="1300" dirty="0">
                 <a:solidFill>
                   <a:srgbClr val="2E2D2C"/>
                 </a:solidFill>
@@ -5978,150 +5569,108 @@
                 <a:cs typeface="Calibri (MS)"/>
                 <a:sym typeface="Calibri (MS)"/>
               </a:rPr>
-              <a:t>ANSYS Fluent, Solidworks, STM32CubeIDE, TIA PORTAL, VISUAL STUDIO</a:t>
+              <a:t>BMS 3S</a:t>
             </a:r>
           </a:p>
           <a:p>
             <a:pPr marL="388620" lvl="1" indent="-194310" algn="l">
-              <a:lnSpc>
-                <a:spcPts val="2160"/>
-              </a:lnSpc>
               <a:buFont typeface="Arial"/>
               <a:buChar char="•"/>
             </a:pPr>
-            <a:endParaRPr lang="en-US" dirty="0">
-              <a:solidFill>
-                <a:srgbClr val="2E2D2C"/>
-              </a:solidFill>
-              <a:latin typeface="Calibri (MS)"/>
-              <a:ea typeface="Calibri (MS)"/>
-              <a:cs typeface="Calibri (MS)"/>
-              <a:sym typeface="Calibri (MS)"/>
-            </a:endParaRPr>
+            <a:r>
+              <a:rPr sz="1300"/>
+              <a:t>OpenCV</a:t>
+            </a:r>
           </a:p>
           <a:p>
             <a:pPr marL="388620" lvl="1" indent="-194310" algn="l">
-              <a:lnSpc>
-                <a:spcPts val="2160"/>
-              </a:lnSpc>
               <a:buFont typeface="Arial"/>
               <a:buChar char="•"/>
             </a:pPr>
-            <a:endParaRPr lang="en-US" sz="1800" dirty="0">
-              <a:solidFill>
-                <a:srgbClr val="2E2D2C"/>
-              </a:solidFill>
-              <a:latin typeface="Calibri (MS)"/>
-              <a:ea typeface="Calibri (MS)"/>
-              <a:cs typeface="Calibri (MS)"/>
-              <a:sym typeface="Calibri (MS)"/>
-            </a:endParaRPr>
+            <a:r>
+              <a:rPr sz="1300"/>
+              <a:t>ESP32CAM</a:t>
+            </a:r>
           </a:p>
           <a:p>
             <a:pPr marL="388620" lvl="1" indent="-194310" algn="l">
-              <a:lnSpc>
-                <a:spcPts val="2160"/>
-              </a:lnSpc>
               <a:buFont typeface="Arial"/>
               <a:buChar char="•"/>
             </a:pPr>
-            <a:endParaRPr lang="en-US" dirty="0">
-              <a:solidFill>
-                <a:srgbClr val="2E2D2C"/>
-              </a:solidFill>
-              <a:latin typeface="Calibri (MS)"/>
-              <a:ea typeface="Calibri (MS)"/>
-              <a:cs typeface="Calibri (MS)"/>
-              <a:sym typeface="Calibri (MS)"/>
-            </a:endParaRPr>
+            <a:r>
+              <a:rPr sz="1300"/>
+              <a:t>Bluetooth</a:t>
+            </a:r>
           </a:p>
           <a:p>
             <a:pPr marL="388620" lvl="1" indent="-194310" algn="l">
-              <a:lnSpc>
-                <a:spcPts val="2160"/>
-              </a:lnSpc>
               <a:buFont typeface="Arial"/>
               <a:buChar char="•"/>
             </a:pPr>
-            <a:endParaRPr lang="en-US" sz="1800" dirty="0">
-              <a:solidFill>
-                <a:srgbClr val="2E2D2C"/>
-              </a:solidFill>
-              <a:latin typeface="Calibri (MS)"/>
-              <a:ea typeface="Calibri (MS)"/>
-              <a:cs typeface="Calibri (MS)"/>
-              <a:sym typeface="Calibri (MS)"/>
-            </a:endParaRPr>
+            <a:r>
+              <a:rPr sz="1300"/>
+              <a:t>HTTP</a:t>
+            </a:r>
           </a:p>
           <a:p>
             <a:pPr marL="388620" lvl="1" indent="-194310" algn="l">
-              <a:lnSpc>
-                <a:spcPts val="2160"/>
-              </a:lnSpc>
               <a:buFont typeface="Arial"/>
               <a:buChar char="•"/>
             </a:pPr>
-            <a:endParaRPr lang="en-US" dirty="0">
-              <a:solidFill>
-                <a:srgbClr val="2E2D2C"/>
-              </a:solidFill>
-              <a:latin typeface="Calibri (MS)"/>
-              <a:ea typeface="Calibri (MS)"/>
-              <a:cs typeface="Calibri (MS)"/>
-              <a:sym typeface="Calibri (MS)"/>
-            </a:endParaRPr>
+            <a:r>
+              <a:rPr sz="1300"/>
+              <a:t>TCP/IP</a:t>
+            </a:r>
           </a:p>
           <a:p>
             <a:pPr marL="388620" lvl="1" indent="-194310" algn="l">
-              <a:lnSpc>
-                <a:spcPts val="2160"/>
-              </a:lnSpc>
               <a:buFont typeface="Arial"/>
               <a:buChar char="•"/>
             </a:pPr>
-            <a:endParaRPr lang="en-US" sz="1800" dirty="0">
-              <a:solidFill>
-                <a:srgbClr val="2E2D2C"/>
-              </a:solidFill>
-              <a:latin typeface="Calibri (MS)"/>
-              <a:ea typeface="Calibri (MS)"/>
-              <a:cs typeface="Calibri (MS)"/>
-              <a:sym typeface="Calibri (MS)"/>
-            </a:endParaRPr>
+            <a:r>
+              <a:rPr sz="1300"/>
+              <a:t>K210</a:t>
+            </a:r>
           </a:p>
           <a:p>
             <a:pPr marL="388620" lvl="1" indent="-194310" algn="l">
-              <a:lnSpc>
-                <a:spcPts val="2160"/>
-              </a:lnSpc>
               <a:buFont typeface="Arial"/>
               <a:buChar char="•"/>
             </a:pPr>
-            <a:endParaRPr lang="en-US" sz="1800" dirty="0">
-              <a:solidFill>
-                <a:srgbClr val="2E2D2C"/>
-              </a:solidFill>
-              <a:latin typeface="Calibri (MS)"/>
-              <a:ea typeface="Calibri (MS)"/>
-              <a:cs typeface="Calibri (MS)"/>
-              <a:sym typeface="Calibri (MS)"/>
-            </a:endParaRPr>
-          </a:p>
-          <a:p>
-            <a:pPr marL="702310" lvl="1" indent="-351155" algn="l">
-              <a:lnSpc>
-                <a:spcPts val="2520"/>
-              </a:lnSpc>
+            <a:r>
+              <a:rPr sz="1300"/>
+              <a:t>AprilTag</a:t>
+            </a:r>
+          </a:p>
+          <a:p>
+            <a:pPr marL="388620" lvl="1" indent="-194310" algn="l">
+              <a:buFont typeface="Arial"/>
+              <a:buChar char="•"/>
             </a:pPr>
-            <a:endParaRPr lang="en-US" sz="1800" dirty="0">
-              <a:solidFill>
-                <a:srgbClr val="2E2D2C"/>
-              </a:solidFill>
-              <a:latin typeface="Calibri (MS)"/>
-              <a:ea typeface="Calibri (MS)"/>
-              <a:cs typeface="Calibri (MS)"/>
-              <a:sym typeface="Calibri (MS)"/>
-            </a:endParaRPr>
+            <a:r>
+              <a:rPr sz="1300"/>
+              <a:t>écran OLED</a:t>
+            </a:r>
+          </a:p>
+          <a:p>
+            <a:pPr marL="388620" lvl="1" indent="-194310" algn="l">
+              <a:buFont typeface="Arial"/>
+              <a:buChar char="•"/>
+            </a:pPr>
+            <a:r>
+              <a:rPr sz="1300"/>
+              <a:t>voix bidirectionnelle</a:t>
+            </a:r>
+          </a:p>
+          <a:p>
+            <a:pPr marL="388620" lvl="1" indent="-194310" algn="l">
+              <a:buFont typeface="Arial"/>
+              <a:buChar char="•"/>
+            </a:pPr>
+            <a:r>
+              <a:rPr sz="1300"/>
+              <a:t>YOLA</a:t>
+            </a:r>
           </a:p>
         </p:txBody>
       </p:sp>
